--- a/docs/presentations/Tokenized_Funds_Comparative_Analysis.pptx
+++ b/docs/presentations/Tokenized_Funds_Comparative_Analysis.pptx
@@ -21841,6 +21841,484 @@
                           <a:ea typeface="Calibri" pitchFamily="34" charset="-122"/>
                           <a:cs typeface="Calibri" pitchFamily="34" charset="-120"/>
                         </a:rPr>
+                        <a:t>Blockchain is primary ledger?</a:t>
+                      </a:r>
+                      <a:endParaRPr lang="en-US" sz="830" dirty="0">
+                        <a:latin typeface="Calibri" charset="0"/>
+                        <a:ea typeface="Calibri" charset="0"/>
+                        <a:cs typeface="Calibri" charset="0"/>
+                      </a:endParaRPr>
+                    </a:p>
+                  </a:txBody>
+                  <a:tcPr marL="76200" marR="76200" marT="38100" marB="38100" anchor="ctr">
+                    <a:lnL w="9525" cap="flat" cmpd="sng" algn="ctr">
+                      <a:solidFill>
+                        <a:srgbClr val="D7E1F5"/>
+                      </a:solidFill>
+                      <a:prstDash val="solid"/>
+                      <a:round/>
+                      <a:headEnd type="none" w="med" len="med"/>
+                      <a:tailEnd type="none" w="med" len="med"/>
+                    </a:lnL>
+                    <a:lnR w="9525" cap="flat" cmpd="sng" algn="ctr">
+                      <a:solidFill>
+                        <a:srgbClr val="D7E1F5"/>
+                      </a:solidFill>
+                      <a:prstDash val="solid"/>
+                      <a:round/>
+                      <a:headEnd type="none" w="med" len="med"/>
+                      <a:tailEnd type="none" w="med" len="med"/>
+                    </a:lnR>
+                    <a:lnT w="9525" cap="flat" cmpd="sng" algn="ctr">
+                      <a:solidFill>
+                        <a:srgbClr val="D7E1F5"/>
+                      </a:solidFill>
+                      <a:prstDash val="solid"/>
+                      <a:round/>
+                      <a:headEnd type="none" w="med" len="med"/>
+                      <a:tailEnd type="none" w="med" len="med"/>
+                    </a:lnT>
+                    <a:lnB w="9525" cap="flat" cmpd="sng" algn="ctr">
+                      <a:solidFill>
+                        <a:srgbClr val="D7E1F5"/>
+                      </a:solidFill>
+                      <a:prstDash val="solid"/>
+                      <a:round/>
+                      <a:headEnd type="none" w="med" len="med"/>
+                      <a:tailEnd type="none" w="med" len="med"/>
+                    </a:lnB>
+                    <a:solidFill>
+                      <a:srgbClr val="FFFFFF"/>
+                    </a:solidFill>
+                  </a:tcPr>
+                </a:tc>
+                <a:tc>
+                  <a:txBody>
+                    <a:bodyPr/>
+                    <a:lstStyle/>
+                    <a:p>
+                      <a:pPr algn="ctr" indent="0" marL="0">
+                        <a:buNone/>
+                      </a:pPr>
+                      <a:r>
+                        <a:rPr lang="en-US" sz="830" dirty="0">
+                          <a:solidFill>
+                            <a:srgbClr val="3A4566"/>
+                          </a:solidFill>
+                          <a:latin typeface="Calibri" pitchFamily="34" charset="0"/>
+                          <a:ea typeface="Calibri" pitchFamily="34" charset="-122"/>
+                          <a:cs typeface="Calibri" pitchFamily="34" charset="-120"/>
+                        </a:rPr>
+                        <a:t>No — secondary record</a:t>
+                      </a:r>
+                      <a:endParaRPr lang="en-US" sz="830" dirty="0">
+                        <a:latin typeface="Calibri" charset="0"/>
+                        <a:ea typeface="Calibri" charset="0"/>
+                        <a:cs typeface="Calibri" charset="0"/>
+                      </a:endParaRPr>
+                    </a:p>
+                  </a:txBody>
+                  <a:tcPr marL="76200" marR="76200" marT="38100" marB="38100" anchor="ctr">
+                    <a:lnL w="9525" cap="flat" cmpd="sng" algn="ctr">
+                      <a:solidFill>
+                        <a:srgbClr val="D7E1F5"/>
+                      </a:solidFill>
+                      <a:prstDash val="solid"/>
+                      <a:round/>
+                      <a:headEnd type="none" w="med" len="med"/>
+                      <a:tailEnd type="none" w="med" len="med"/>
+                    </a:lnL>
+                    <a:lnR w="9525" cap="flat" cmpd="sng" algn="ctr">
+                      <a:solidFill>
+                        <a:srgbClr val="D7E1F5"/>
+                      </a:solidFill>
+                      <a:prstDash val="solid"/>
+                      <a:round/>
+                      <a:headEnd type="none" w="med" len="med"/>
+                      <a:tailEnd type="none" w="med" len="med"/>
+                    </a:lnR>
+                    <a:lnT w="9525" cap="flat" cmpd="sng" algn="ctr">
+                      <a:solidFill>
+                        <a:srgbClr val="D7E1F5"/>
+                      </a:solidFill>
+                      <a:prstDash val="solid"/>
+                      <a:round/>
+                      <a:headEnd type="none" w="med" len="med"/>
+                      <a:tailEnd type="none" w="med" len="med"/>
+                    </a:lnT>
+                    <a:lnB w="9525" cap="flat" cmpd="sng" algn="ctr">
+                      <a:solidFill>
+                        <a:srgbClr val="D7E1F5"/>
+                      </a:solidFill>
+                      <a:prstDash val="solid"/>
+                      <a:round/>
+                      <a:headEnd type="none" w="med" len="med"/>
+                      <a:tailEnd type="none" w="med" len="med"/>
+                    </a:lnB>
+                    <a:solidFill>
+                      <a:srgbClr val="FFFFFF"/>
+                    </a:solidFill>
+                  </a:tcPr>
+                </a:tc>
+                <a:tc>
+                  <a:txBody>
+                    <a:bodyPr/>
+                    <a:lstStyle/>
+                    <a:p>
+                      <a:pPr algn="ctr" indent="0" marL="0">
+                        <a:buNone/>
+                      </a:pPr>
+                      <a:r>
+                        <a:rPr lang="en-US" sz="830" dirty="0">
+                          <a:solidFill>
+                            <a:srgbClr val="3A4566"/>
+                          </a:solidFill>
+                          <a:latin typeface="Calibri" pitchFamily="34" charset="0"/>
+                          <a:ea typeface="Calibri" pitchFamily="34" charset="-122"/>
+                          <a:cs typeface="Calibri" pitchFamily="34" charset="-120"/>
+                        </a:rPr>
+                        <a:t>No — TA record controls</a:t>
+                      </a:r>
+                      <a:endParaRPr lang="en-US" sz="830" dirty="0">
+                        <a:latin typeface="Calibri" charset="0"/>
+                        <a:ea typeface="Calibri" charset="0"/>
+                        <a:cs typeface="Calibri" charset="0"/>
+                      </a:endParaRPr>
+                    </a:p>
+                  </a:txBody>
+                  <a:tcPr marL="76200" marR="76200" marT="38100" marB="38100" anchor="ctr">
+                    <a:lnL w="9525" cap="flat" cmpd="sng" algn="ctr">
+                      <a:solidFill>
+                        <a:srgbClr val="D7E1F5"/>
+                      </a:solidFill>
+                      <a:prstDash val="solid"/>
+                      <a:round/>
+                      <a:headEnd type="none" w="med" len="med"/>
+                      <a:tailEnd type="none" w="med" len="med"/>
+                    </a:lnL>
+                    <a:lnR w="9525" cap="flat" cmpd="sng" algn="ctr">
+                      <a:solidFill>
+                        <a:srgbClr val="D7E1F5"/>
+                      </a:solidFill>
+                      <a:prstDash val="solid"/>
+                      <a:round/>
+                      <a:headEnd type="none" w="med" len="med"/>
+                      <a:tailEnd type="none" w="med" len="med"/>
+                    </a:lnR>
+                    <a:lnT w="9525" cap="flat" cmpd="sng" algn="ctr">
+                      <a:solidFill>
+                        <a:srgbClr val="D7E1F5"/>
+                      </a:solidFill>
+                      <a:prstDash val="solid"/>
+                      <a:round/>
+                      <a:headEnd type="none" w="med" len="med"/>
+                      <a:tailEnd type="none" w="med" len="med"/>
+                    </a:lnT>
+                    <a:lnB w="9525" cap="flat" cmpd="sng" algn="ctr">
+                      <a:solidFill>
+                        <a:srgbClr val="D7E1F5"/>
+                      </a:solidFill>
+                      <a:prstDash val="solid"/>
+                      <a:round/>
+                      <a:headEnd type="none" w="med" len="med"/>
+                      <a:tailEnd type="none" w="med" len="med"/>
+                    </a:lnB>
+                    <a:solidFill>
+                      <a:srgbClr val="FFFFFF"/>
+                    </a:solidFill>
+                  </a:tcPr>
+                </a:tc>
+                <a:tc>
+                  <a:txBody>
+                    <a:bodyPr/>
+                    <a:lstStyle/>
+                    <a:p>
+                      <a:pPr algn="ctr" indent="0" marL="0">
+                        <a:buNone/>
+                      </a:pPr>
+                      <a:r>
+                        <a:rPr lang="en-US" sz="830" dirty="0">
+                          <a:solidFill>
+                            <a:srgbClr val="3A4566"/>
+                          </a:solidFill>
+                          <a:latin typeface="Calibri" pitchFamily="34" charset="0"/>
+                          <a:ea typeface="Calibri" pitchFamily="34" charset="-122"/>
+                          <a:cs typeface="Calibri" pitchFamily="34" charset="-120"/>
+                        </a:rPr>
+                        <a:t>No — TA record controls</a:t>
+                      </a:r>
+                      <a:endParaRPr lang="en-US" sz="830" dirty="0">
+                        <a:latin typeface="Calibri" charset="0"/>
+                        <a:ea typeface="Calibri" charset="0"/>
+                        <a:cs typeface="Calibri" charset="0"/>
+                      </a:endParaRPr>
+                    </a:p>
+                  </a:txBody>
+                  <a:tcPr marL="76200" marR="76200" marT="38100" marB="38100" anchor="ctr">
+                    <a:lnL w="9525" cap="flat" cmpd="sng" algn="ctr">
+                      <a:solidFill>
+                        <a:srgbClr val="D7E1F5"/>
+                      </a:solidFill>
+                      <a:prstDash val="solid"/>
+                      <a:round/>
+                      <a:headEnd type="none" w="med" len="med"/>
+                      <a:tailEnd type="none" w="med" len="med"/>
+                    </a:lnL>
+                    <a:lnR w="9525" cap="flat" cmpd="sng" algn="ctr">
+                      <a:solidFill>
+                        <a:srgbClr val="D7E1F5"/>
+                      </a:solidFill>
+                      <a:prstDash val="solid"/>
+                      <a:round/>
+                      <a:headEnd type="none" w="med" len="med"/>
+                      <a:tailEnd type="none" w="med" len="med"/>
+                    </a:lnR>
+                    <a:lnT w="9525" cap="flat" cmpd="sng" algn="ctr">
+                      <a:solidFill>
+                        <a:srgbClr val="D7E1F5"/>
+                      </a:solidFill>
+                      <a:prstDash val="solid"/>
+                      <a:round/>
+                      <a:headEnd type="none" w="med" len="med"/>
+                      <a:tailEnd type="none" w="med" len="med"/>
+                    </a:lnT>
+                    <a:lnB w="9525" cap="flat" cmpd="sng" algn="ctr">
+                      <a:solidFill>
+                        <a:srgbClr val="D7E1F5"/>
+                      </a:solidFill>
+                      <a:prstDash val="solid"/>
+                      <a:round/>
+                      <a:headEnd type="none" w="med" len="med"/>
+                      <a:tailEnd type="none" w="med" len="med"/>
+                    </a:lnB>
+                    <a:solidFill>
+                      <a:srgbClr val="FFFFFF"/>
+                    </a:solidFill>
+                  </a:tcPr>
+                </a:tc>
+                <a:tc>
+                  <a:txBody>
+                    <a:bodyPr/>
+                    <a:lstStyle/>
+                    <a:p>
+                      <a:pPr algn="ctr" indent="0" marL="0">
+                        <a:buNone/>
+                      </a:pPr>
+                      <a:r>
+                        <a:rPr lang="en-US" sz="830" dirty="0">
+                          <a:solidFill>
+                            <a:srgbClr val="3A4566"/>
+                          </a:solidFill>
+                          <a:latin typeface="Calibri" pitchFamily="34" charset="0"/>
+                          <a:ea typeface="Calibri" pitchFamily="34" charset="-122"/>
+                          <a:cs typeface="Calibri" pitchFamily="34" charset="-120"/>
+                        </a:rPr>
+                        <a:t>No — TA record controls</a:t>
+                      </a:r>
+                      <a:endParaRPr lang="en-US" sz="830" dirty="0">
+                        <a:latin typeface="Calibri" charset="0"/>
+                        <a:ea typeface="Calibri" charset="0"/>
+                        <a:cs typeface="Calibri" charset="0"/>
+                      </a:endParaRPr>
+                    </a:p>
+                  </a:txBody>
+                  <a:tcPr marL="76200" marR="76200" marT="38100" marB="38100" anchor="ctr">
+                    <a:lnL w="9525" cap="flat" cmpd="sng" algn="ctr">
+                      <a:solidFill>
+                        <a:srgbClr val="D7E1F5"/>
+                      </a:solidFill>
+                      <a:prstDash val="solid"/>
+                      <a:round/>
+                      <a:headEnd type="none" w="med" len="med"/>
+                      <a:tailEnd type="none" w="med" len="med"/>
+                    </a:lnL>
+                    <a:lnR w="9525" cap="flat" cmpd="sng" algn="ctr">
+                      <a:solidFill>
+                        <a:srgbClr val="D7E1F5"/>
+                      </a:solidFill>
+                      <a:prstDash val="solid"/>
+                      <a:round/>
+                      <a:headEnd type="none" w="med" len="med"/>
+                      <a:tailEnd type="none" w="med" len="med"/>
+                    </a:lnR>
+                    <a:lnT w="9525" cap="flat" cmpd="sng" algn="ctr">
+                      <a:solidFill>
+                        <a:srgbClr val="D7E1F5"/>
+                      </a:solidFill>
+                      <a:prstDash val="solid"/>
+                      <a:round/>
+                      <a:headEnd type="none" w="med" len="med"/>
+                      <a:tailEnd type="none" w="med" len="med"/>
+                    </a:lnT>
+                    <a:lnB w="9525" cap="flat" cmpd="sng" algn="ctr">
+                      <a:solidFill>
+                        <a:srgbClr val="D7E1F5"/>
+                      </a:solidFill>
+                      <a:prstDash val="solid"/>
+                      <a:round/>
+                      <a:headEnd type="none" w="med" len="med"/>
+                      <a:tailEnd type="none" w="med" len="med"/>
+                    </a:lnB>
+                    <a:solidFill>
+                      <a:srgbClr val="FFFFFF"/>
+                    </a:solidFill>
+                  </a:tcPr>
+                </a:tc>
+                <a:tc>
+                  <a:txBody>
+                    <a:bodyPr/>
+                    <a:lstStyle/>
+                    <a:p>
+                      <a:pPr algn="ctr" indent="0" marL="0">
+                        <a:buNone/>
+                      </a:pPr>
+                      <a:r>
+                        <a:rPr lang="en-US" sz="830" dirty="0">
+                          <a:solidFill>
+                            <a:srgbClr val="3A4566"/>
+                          </a:solidFill>
+                          <a:latin typeface="Calibri" pitchFamily="34" charset="0"/>
+                          <a:ea typeface="Calibri" pitchFamily="34" charset="-122"/>
+                          <a:cs typeface="Calibri" pitchFamily="34" charset="-120"/>
+                        </a:rPr>
+                        <a:t>Not disclosed</a:t>
+                      </a:r>
+                      <a:endParaRPr lang="en-US" sz="830" dirty="0">
+                        <a:latin typeface="Calibri" charset="0"/>
+                        <a:ea typeface="Calibri" charset="0"/>
+                        <a:cs typeface="Calibri" charset="0"/>
+                      </a:endParaRPr>
+                    </a:p>
+                  </a:txBody>
+                  <a:tcPr marL="76200" marR="76200" marT="38100" marB="38100" anchor="ctr">
+                    <a:lnL w="9525" cap="flat" cmpd="sng" algn="ctr">
+                      <a:solidFill>
+                        <a:srgbClr val="D7E1F5"/>
+                      </a:solidFill>
+                      <a:prstDash val="solid"/>
+                      <a:round/>
+                      <a:headEnd type="none" w="med" len="med"/>
+                      <a:tailEnd type="none" w="med" len="med"/>
+                    </a:lnL>
+                    <a:lnR w="9525" cap="flat" cmpd="sng" algn="ctr">
+                      <a:solidFill>
+                        <a:srgbClr val="D7E1F5"/>
+                      </a:solidFill>
+                      <a:prstDash val="solid"/>
+                      <a:round/>
+                      <a:headEnd type="none" w="med" len="med"/>
+                      <a:tailEnd type="none" w="med" len="med"/>
+                    </a:lnR>
+                    <a:lnT w="9525" cap="flat" cmpd="sng" algn="ctr">
+                      <a:solidFill>
+                        <a:srgbClr val="D7E1F5"/>
+                      </a:solidFill>
+                      <a:prstDash val="solid"/>
+                      <a:round/>
+                      <a:headEnd type="none" w="med" len="med"/>
+                      <a:tailEnd type="none" w="med" len="med"/>
+                    </a:lnT>
+                    <a:lnB w="9525" cap="flat" cmpd="sng" algn="ctr">
+                      <a:solidFill>
+                        <a:srgbClr val="D7E1F5"/>
+                      </a:solidFill>
+                      <a:prstDash val="solid"/>
+                      <a:round/>
+                      <a:headEnd type="none" w="med" len="med"/>
+                      <a:tailEnd type="none" w="med" len="med"/>
+                    </a:lnB>
+                    <a:solidFill>
+                      <a:srgbClr val="FFFFFF"/>
+                    </a:solidFill>
+                  </a:tcPr>
+                </a:tc>
+                <a:tc>
+                  <a:txBody>
+                    <a:bodyPr/>
+                    <a:lstStyle/>
+                    <a:p>
+                      <a:pPr algn="ctr" indent="0" marL="0">
+                        <a:buNone/>
+                      </a:pPr>
+                      <a:r>
+                        <a:rPr lang="en-US" sz="830" dirty="0">
+                          <a:solidFill>
+                            <a:srgbClr val="3A4566"/>
+                          </a:solidFill>
+                          <a:latin typeface="Calibri" pitchFamily="34" charset="0"/>
+                          <a:ea typeface="Calibri" pitchFamily="34" charset="-122"/>
+                          <a:cs typeface="Calibri" pitchFamily="34" charset="-120"/>
+                        </a:rPr>
+                        <a:t>No — secondary record</a:t>
+                      </a:r>
+                      <a:endParaRPr lang="en-US" sz="830" dirty="0">
+                        <a:latin typeface="Calibri" charset="0"/>
+                        <a:ea typeface="Calibri" charset="0"/>
+                        <a:cs typeface="Calibri" charset="0"/>
+                      </a:endParaRPr>
+                    </a:p>
+                  </a:txBody>
+                  <a:tcPr marL="76200" marR="76200" marT="38100" marB="38100" anchor="ctr">
+                    <a:lnL w="9525" cap="flat" cmpd="sng" algn="ctr">
+                      <a:solidFill>
+                        <a:srgbClr val="D7E1F5"/>
+                      </a:solidFill>
+                      <a:prstDash val="solid"/>
+                      <a:round/>
+                      <a:headEnd type="none" w="med" len="med"/>
+                      <a:tailEnd type="none" w="med" len="med"/>
+                    </a:lnL>
+                    <a:lnR w="9525" cap="flat" cmpd="sng" algn="ctr">
+                      <a:solidFill>
+                        <a:srgbClr val="D7E1F5"/>
+                      </a:solidFill>
+                      <a:prstDash val="solid"/>
+                      <a:round/>
+                      <a:headEnd type="none" w="med" len="med"/>
+                      <a:tailEnd type="none" w="med" len="med"/>
+                    </a:lnR>
+                    <a:lnT w="9525" cap="flat" cmpd="sng" algn="ctr">
+                      <a:solidFill>
+                        <a:srgbClr val="D7E1F5"/>
+                      </a:solidFill>
+                      <a:prstDash val="solid"/>
+                      <a:round/>
+                      <a:headEnd type="none" w="med" len="med"/>
+                      <a:tailEnd type="none" w="med" len="med"/>
+                    </a:lnT>
+                    <a:lnB w="9525" cap="flat" cmpd="sng" algn="ctr">
+                      <a:solidFill>
+                        <a:srgbClr val="D7E1F5"/>
+                      </a:solidFill>
+                      <a:prstDash val="solid"/>
+                      <a:round/>
+                      <a:headEnd type="none" w="med" len="med"/>
+                      <a:tailEnd type="none" w="med" len="med"/>
+                    </a:lnB>
+                    <a:solidFill>
+                      <a:srgbClr val="FFFFFF"/>
+                    </a:solidFill>
+                  </a:tcPr>
+                </a:tc>
+              </a:tr>
+              <a:tr h="0">
+                <a:tc>
+                  <a:txBody>
+                    <a:bodyPr/>
+                    <a:lstStyle/>
+                    <a:p>
+                      <a:pPr algn="l" indent="0" marL="0">
+                        <a:buNone/>
+                      </a:pPr>
+                      <a:r>
+                        <a:rPr lang="en-US" sz="830" b="1" dirty="0">
+                          <a:solidFill>
+                            <a:srgbClr val="1E2761"/>
+                          </a:solidFill>
+                          <a:latin typeface="Calibri" pitchFamily="34" charset="0"/>
+                          <a:ea typeface="Calibri" pitchFamily="34" charset="-122"/>
+                          <a:cs typeface="Calibri" pitchFamily="34" charset="-120"/>
+                        </a:rPr>
                         <a:t>Settlement rail</a:t>
                       </a:r>
                       <a:endParaRPr lang="en-US" sz="830" dirty="0">
@@ -21888,7 +22366,7 @@
                       <a:tailEnd type="none" w="med" len="med"/>
                     </a:lnB>
                     <a:solidFill>
-                      <a:srgbClr val="FFFFFF"/>
+                      <a:srgbClr val="F5F8FD"/>
                     </a:solidFill>
                   </a:tcPr>
                 </a:tc>
@@ -21956,7 +22434,7 @@
                       <a:tailEnd type="none" w="med" len="med"/>
                     </a:lnB>
                     <a:solidFill>
-                      <a:srgbClr val="FFFFFF"/>
+                      <a:srgbClr val="F5F8FD"/>
                     </a:solidFill>
                   </a:tcPr>
                 </a:tc>
@@ -22024,7 +22502,7 @@
                       <a:tailEnd type="none" w="med" len="med"/>
                     </a:lnB>
                     <a:solidFill>
-                      <a:srgbClr val="FFFFFF"/>
+                      <a:srgbClr val="F5F8FD"/>
                     </a:solidFill>
                   </a:tcPr>
                 </a:tc>
@@ -22092,7 +22570,7 @@
                       <a:tailEnd type="none" w="med" len="med"/>
                     </a:lnB>
                     <a:solidFill>
-                      <a:srgbClr val="FFFFFF"/>
+                      <a:srgbClr val="F5F8FD"/>
                     </a:solidFill>
                   </a:tcPr>
                 </a:tc>
@@ -22160,7 +22638,7 @@
                       <a:tailEnd type="none" w="med" len="med"/>
                     </a:lnB>
                     <a:solidFill>
-                      <a:srgbClr val="FFFFFF"/>
+                      <a:srgbClr val="F5F8FD"/>
                     </a:solidFill>
                   </a:tcPr>
                 </a:tc>
@@ -22228,7 +22706,7 @@
                       <a:tailEnd type="none" w="med" len="med"/>
                     </a:lnB>
                     <a:solidFill>
-                      <a:srgbClr val="FFFFFF"/>
+                      <a:srgbClr val="F5F8FD"/>
                     </a:solidFill>
                   </a:tcPr>
                 </a:tc>
@@ -22296,7 +22774,7 @@
                       <a:tailEnd type="none" w="med" len="med"/>
                     </a:lnB>
                     <a:solidFill>
-                      <a:srgbClr val="FFFFFF"/>
+                      <a:srgbClr val="F5F8FD"/>
                     </a:solidFill>
                   </a:tcPr>
                 </a:tc>
@@ -22366,7 +22844,7 @@
                       <a:tailEnd type="none" w="med" len="med"/>
                     </a:lnB>
                     <a:solidFill>
-                      <a:srgbClr val="F5F8FD"/>
+                      <a:srgbClr val="FFFFFF"/>
                     </a:solidFill>
                   </a:tcPr>
                 </a:tc>
@@ -22434,7 +22912,7 @@
                       <a:tailEnd type="none" w="med" len="med"/>
                     </a:lnB>
                     <a:solidFill>
-                      <a:srgbClr val="F5F8FD"/>
+                      <a:srgbClr val="FFFFFF"/>
                     </a:solidFill>
                   </a:tcPr>
                 </a:tc>
@@ -22502,7 +22980,7 @@
                       <a:tailEnd type="none" w="med" len="med"/>
                     </a:lnB>
                     <a:solidFill>
-                      <a:srgbClr val="F5F8FD"/>
+                      <a:srgbClr val="FFFFFF"/>
                     </a:solidFill>
                   </a:tcPr>
                 </a:tc>
@@ -22570,7 +23048,7 @@
                       <a:tailEnd type="none" w="med" len="med"/>
                     </a:lnB>
                     <a:solidFill>
-                      <a:srgbClr val="F5F8FD"/>
+                      <a:srgbClr val="FFFFFF"/>
                     </a:solidFill>
                   </a:tcPr>
                 </a:tc>
@@ -22638,7 +23116,7 @@
                       <a:tailEnd type="none" w="med" len="med"/>
                     </a:lnB>
                     <a:solidFill>
-                      <a:srgbClr val="F5F8FD"/>
+                      <a:srgbClr val="FFFFFF"/>
                     </a:solidFill>
                   </a:tcPr>
                 </a:tc>
@@ -22706,7 +23184,7 @@
                       <a:tailEnd type="none" w="med" len="med"/>
                     </a:lnB>
                     <a:solidFill>
-                      <a:srgbClr val="F5F8FD"/>
+                      <a:srgbClr val="FFFFFF"/>
                     </a:solidFill>
                   </a:tcPr>
                 </a:tc>
@@ -22774,7 +23252,7 @@
                       <a:tailEnd type="none" w="med" len="med"/>
                     </a:lnB>
                     <a:solidFill>
-                      <a:srgbClr val="F5F8FD"/>
+                      <a:srgbClr val="FFFFFF"/>
                     </a:solidFill>
                   </a:tcPr>
                 </a:tc>

--- a/docs/presentations/Tokenized_Funds_Comparative_Analysis.pptx
+++ b/docs/presentations/Tokenized_Funds_Comparative_Analysis.pptx
@@ -21977,7 +21977,7 @@
                           <a:ea typeface="Calibri" pitchFamily="34" charset="-122"/>
                           <a:cs typeface="Calibri" pitchFamily="34" charset="-120"/>
                         </a:rPr>
-                        <a:t>No — TA record controls</a:t>
+                        <a:t>Yes — per TA's own filings</a:t>
                       </a:r>
                       <a:endParaRPr lang="en-US" sz="830" dirty="0">
                         <a:latin typeface="Calibri" charset="0"/>
@@ -22045,7 +22045,7 @@
                           <a:ea typeface="Calibri" pitchFamily="34" charset="-122"/>
                           <a:cs typeface="Calibri" pitchFamily="34" charset="-120"/>
                         </a:rPr>
-                        <a:t>No — TA record controls</a:t>
+                        <a:t>Hybrid — no such claim found</a:t>
                       </a:r>
                       <a:endParaRPr lang="en-US" sz="830" dirty="0">
                         <a:latin typeface="Calibri" charset="0"/>
@@ -22113,7 +22113,7 @@
                           <a:ea typeface="Calibri" pitchFamily="34" charset="-122"/>
                           <a:cs typeface="Calibri" pitchFamily="34" charset="-120"/>
                         </a:rPr>
-                        <a:t>No — TA record controls</a:t>
+                        <a:t>Hybrid — no such claim found</a:t>
                       </a:r>
                       <a:endParaRPr lang="en-US" sz="830" dirty="0">
                         <a:latin typeface="Calibri" charset="0"/>

--- a/docs/presentations/Tokenized_Funds_Comparative_Analysis.pptx
+++ b/docs/presentations/Tokenized_Funds_Comparative_Analysis.pptx
@@ -18495,6 +18495,484 @@
                           <a:ea typeface="Calibri" pitchFamily="34" charset="-122"/>
                           <a:cs typeface="Calibri" pitchFamily="34" charset="-120"/>
                         </a:rPr>
+                        <a:t>TA legally required?</a:t>
+                      </a:r>
+                      <a:endParaRPr lang="en-US" sz="830" dirty="0">
+                        <a:latin typeface="Calibri" charset="0"/>
+                        <a:ea typeface="Calibri" charset="0"/>
+                        <a:cs typeface="Calibri" charset="0"/>
+                      </a:endParaRPr>
+                    </a:p>
+                  </a:txBody>
+                  <a:tcPr marL="76200" marR="76200" marT="38100" marB="38100" anchor="ctr">
+                    <a:lnL w="9525" cap="flat" cmpd="sng" algn="ctr">
+                      <a:solidFill>
+                        <a:srgbClr val="D7E1F5"/>
+                      </a:solidFill>
+                      <a:prstDash val="solid"/>
+                      <a:round/>
+                      <a:headEnd type="none" w="med" len="med"/>
+                      <a:tailEnd type="none" w="med" len="med"/>
+                    </a:lnL>
+                    <a:lnR w="9525" cap="flat" cmpd="sng" algn="ctr">
+                      <a:solidFill>
+                        <a:srgbClr val="D7E1F5"/>
+                      </a:solidFill>
+                      <a:prstDash val="solid"/>
+                      <a:round/>
+                      <a:headEnd type="none" w="med" len="med"/>
+                      <a:tailEnd type="none" w="med" len="med"/>
+                    </a:lnR>
+                    <a:lnT w="9525" cap="flat" cmpd="sng" algn="ctr">
+                      <a:solidFill>
+                        <a:srgbClr val="D7E1F5"/>
+                      </a:solidFill>
+                      <a:prstDash val="solid"/>
+                      <a:round/>
+                      <a:headEnd type="none" w="med" len="med"/>
+                      <a:tailEnd type="none" w="med" len="med"/>
+                    </a:lnT>
+                    <a:lnB w="9525" cap="flat" cmpd="sng" algn="ctr">
+                      <a:solidFill>
+                        <a:srgbClr val="D7E1F5"/>
+                      </a:solidFill>
+                      <a:prstDash val="solid"/>
+                      <a:round/>
+                      <a:headEnd type="none" w="med" len="med"/>
+                      <a:tailEnd type="none" w="med" len="med"/>
+                    </a:lnB>
+                    <a:solidFill>
+                      <a:srgbClr val="F5F8FD"/>
+                    </a:solidFill>
+                  </a:tcPr>
+                </a:tc>
+                <a:tc>
+                  <a:txBody>
+                    <a:bodyPr/>
+                    <a:lstStyle/>
+                    <a:p>
+                      <a:pPr algn="ctr" indent="0" marL="0">
+                        <a:buNone/>
+                      </a:pPr>
+                      <a:r>
+                        <a:rPr lang="en-US" sz="830" dirty="0">
+                          <a:solidFill>
+                            <a:srgbClr val="3A4566"/>
+                          </a:solidFill>
+                          <a:latin typeface="Calibri" pitchFamily="34" charset="0"/>
+                          <a:ea typeface="Calibri" pitchFamily="34" charset="-122"/>
+                          <a:cs typeface="Calibri" pitchFamily="34" charset="-120"/>
+                        </a:rPr>
+                        <a:t>Yes — qualifying security</a:t>
+                      </a:r>
+                      <a:endParaRPr lang="en-US" sz="830" dirty="0">
+                        <a:latin typeface="Calibri" charset="0"/>
+                        <a:ea typeface="Calibri" charset="0"/>
+                        <a:cs typeface="Calibri" charset="0"/>
+                      </a:endParaRPr>
+                    </a:p>
+                  </a:txBody>
+                  <a:tcPr marL="76200" marR="76200" marT="38100" marB="38100" anchor="ctr">
+                    <a:lnL w="9525" cap="flat" cmpd="sng" algn="ctr">
+                      <a:solidFill>
+                        <a:srgbClr val="D7E1F5"/>
+                      </a:solidFill>
+                      <a:prstDash val="solid"/>
+                      <a:round/>
+                      <a:headEnd type="none" w="med" len="med"/>
+                      <a:tailEnd type="none" w="med" len="med"/>
+                    </a:lnL>
+                    <a:lnR w="9525" cap="flat" cmpd="sng" algn="ctr">
+                      <a:solidFill>
+                        <a:srgbClr val="D7E1F5"/>
+                      </a:solidFill>
+                      <a:prstDash val="solid"/>
+                      <a:round/>
+                      <a:headEnd type="none" w="med" len="med"/>
+                      <a:tailEnd type="none" w="med" len="med"/>
+                    </a:lnR>
+                    <a:lnT w="9525" cap="flat" cmpd="sng" algn="ctr">
+                      <a:solidFill>
+                        <a:srgbClr val="D7E1F5"/>
+                      </a:solidFill>
+                      <a:prstDash val="solid"/>
+                      <a:round/>
+                      <a:headEnd type="none" w="med" len="med"/>
+                      <a:tailEnd type="none" w="med" len="med"/>
+                    </a:lnT>
+                    <a:lnB w="9525" cap="flat" cmpd="sng" algn="ctr">
+                      <a:solidFill>
+                        <a:srgbClr val="D7E1F5"/>
+                      </a:solidFill>
+                      <a:prstDash val="solid"/>
+                      <a:round/>
+                      <a:headEnd type="none" w="med" len="med"/>
+                      <a:tailEnd type="none" w="med" len="med"/>
+                    </a:lnB>
+                    <a:solidFill>
+                      <a:srgbClr val="F5F8FD"/>
+                    </a:solidFill>
+                  </a:tcPr>
+                </a:tc>
+                <a:tc>
+                  <a:txBody>
+                    <a:bodyPr/>
+                    <a:lstStyle/>
+                    <a:p>
+                      <a:pPr algn="ctr" indent="0" marL="0">
+                        <a:buNone/>
+                      </a:pPr>
+                      <a:r>
+                        <a:rPr lang="en-US" sz="830" dirty="0">
+                          <a:solidFill>
+                            <a:srgbClr val="3A4566"/>
+                          </a:solidFill>
+                          <a:latin typeface="Calibri" pitchFamily="34" charset="0"/>
+                          <a:ea typeface="Calibri" pitchFamily="34" charset="-122"/>
+                          <a:cs typeface="Calibri" pitchFamily="34" charset="-120"/>
+                        </a:rPr>
+                        <a:t>No — voluntary (3(c)(7))</a:t>
+                      </a:r>
+                      <a:endParaRPr lang="en-US" sz="830" dirty="0">
+                        <a:latin typeface="Calibri" charset="0"/>
+                        <a:ea typeface="Calibri" charset="0"/>
+                        <a:cs typeface="Calibri" charset="0"/>
+                      </a:endParaRPr>
+                    </a:p>
+                  </a:txBody>
+                  <a:tcPr marL="76200" marR="76200" marT="38100" marB="38100" anchor="ctr">
+                    <a:lnL w="9525" cap="flat" cmpd="sng" algn="ctr">
+                      <a:solidFill>
+                        <a:srgbClr val="D7E1F5"/>
+                      </a:solidFill>
+                      <a:prstDash val="solid"/>
+                      <a:round/>
+                      <a:headEnd type="none" w="med" len="med"/>
+                      <a:tailEnd type="none" w="med" len="med"/>
+                    </a:lnL>
+                    <a:lnR w="9525" cap="flat" cmpd="sng" algn="ctr">
+                      <a:solidFill>
+                        <a:srgbClr val="D7E1F5"/>
+                      </a:solidFill>
+                      <a:prstDash val="solid"/>
+                      <a:round/>
+                      <a:headEnd type="none" w="med" len="med"/>
+                      <a:tailEnd type="none" w="med" len="med"/>
+                    </a:lnR>
+                    <a:lnT w="9525" cap="flat" cmpd="sng" algn="ctr">
+                      <a:solidFill>
+                        <a:srgbClr val="D7E1F5"/>
+                      </a:solidFill>
+                      <a:prstDash val="solid"/>
+                      <a:round/>
+                      <a:headEnd type="none" w="med" len="med"/>
+                      <a:tailEnd type="none" w="med" len="med"/>
+                    </a:lnT>
+                    <a:lnB w="9525" cap="flat" cmpd="sng" algn="ctr">
+                      <a:solidFill>
+                        <a:srgbClr val="D7E1F5"/>
+                      </a:solidFill>
+                      <a:prstDash val="solid"/>
+                      <a:round/>
+                      <a:headEnd type="none" w="med" len="med"/>
+                      <a:tailEnd type="none" w="med" len="med"/>
+                    </a:lnB>
+                    <a:solidFill>
+                      <a:srgbClr val="F5F8FD"/>
+                    </a:solidFill>
+                  </a:tcPr>
+                </a:tc>
+                <a:tc>
+                  <a:txBody>
+                    <a:bodyPr/>
+                    <a:lstStyle/>
+                    <a:p>
+                      <a:pPr algn="ctr" indent="0" marL="0">
+                        <a:buNone/>
+                      </a:pPr>
+                      <a:r>
+                        <a:rPr lang="en-US" sz="830" dirty="0">
+                          <a:solidFill>
+                            <a:srgbClr val="3A4566"/>
+                          </a:solidFill>
+                          <a:latin typeface="Calibri" pitchFamily="34" charset="0"/>
+                          <a:ea typeface="Calibri" pitchFamily="34" charset="-122"/>
+                          <a:cs typeface="Calibri" pitchFamily="34" charset="-120"/>
+                        </a:rPr>
+                        <a:t>No now → Yes (converting)</a:t>
+                      </a:r>
+                      <a:endParaRPr lang="en-US" sz="830" dirty="0">
+                        <a:latin typeface="Calibri" charset="0"/>
+                        <a:ea typeface="Calibri" charset="0"/>
+                        <a:cs typeface="Calibri" charset="0"/>
+                      </a:endParaRPr>
+                    </a:p>
+                  </a:txBody>
+                  <a:tcPr marL="76200" marR="76200" marT="38100" marB="38100" anchor="ctr">
+                    <a:lnL w="9525" cap="flat" cmpd="sng" algn="ctr">
+                      <a:solidFill>
+                        <a:srgbClr val="D7E1F5"/>
+                      </a:solidFill>
+                      <a:prstDash val="solid"/>
+                      <a:round/>
+                      <a:headEnd type="none" w="med" len="med"/>
+                      <a:tailEnd type="none" w="med" len="med"/>
+                    </a:lnL>
+                    <a:lnR w="9525" cap="flat" cmpd="sng" algn="ctr">
+                      <a:solidFill>
+                        <a:srgbClr val="D7E1F5"/>
+                      </a:solidFill>
+                      <a:prstDash val="solid"/>
+                      <a:round/>
+                      <a:headEnd type="none" w="med" len="med"/>
+                      <a:tailEnd type="none" w="med" len="med"/>
+                    </a:lnR>
+                    <a:lnT w="9525" cap="flat" cmpd="sng" algn="ctr">
+                      <a:solidFill>
+                        <a:srgbClr val="D7E1F5"/>
+                      </a:solidFill>
+                      <a:prstDash val="solid"/>
+                      <a:round/>
+                      <a:headEnd type="none" w="med" len="med"/>
+                      <a:tailEnd type="none" w="med" len="med"/>
+                    </a:lnT>
+                    <a:lnB w="9525" cap="flat" cmpd="sng" algn="ctr">
+                      <a:solidFill>
+                        <a:srgbClr val="D7E1F5"/>
+                      </a:solidFill>
+                      <a:prstDash val="solid"/>
+                      <a:round/>
+                      <a:headEnd type="none" w="med" len="med"/>
+                      <a:tailEnd type="none" w="med" len="med"/>
+                    </a:lnB>
+                    <a:solidFill>
+                      <a:srgbClr val="F5F8FD"/>
+                    </a:solidFill>
+                  </a:tcPr>
+                </a:tc>
+                <a:tc>
+                  <a:txBody>
+                    <a:bodyPr/>
+                    <a:lstStyle/>
+                    <a:p>
+                      <a:pPr algn="ctr" indent="0" marL="0">
+                        <a:buNone/>
+                      </a:pPr>
+                      <a:r>
+                        <a:rPr lang="en-US" sz="830" dirty="0">
+                          <a:solidFill>
+                            <a:srgbClr val="3A4566"/>
+                          </a:solidFill>
+                          <a:latin typeface="Calibri" pitchFamily="34" charset="0"/>
+                          <a:ea typeface="Calibri" pitchFamily="34" charset="-122"/>
+                          <a:cs typeface="Calibri" pitchFamily="34" charset="-120"/>
+                        </a:rPr>
+                        <a:t>No — voluntary (3(c)(7))</a:t>
+                      </a:r>
+                      <a:endParaRPr lang="en-US" sz="830" dirty="0">
+                        <a:latin typeface="Calibri" charset="0"/>
+                        <a:ea typeface="Calibri" charset="0"/>
+                        <a:cs typeface="Calibri" charset="0"/>
+                      </a:endParaRPr>
+                    </a:p>
+                  </a:txBody>
+                  <a:tcPr marL="76200" marR="76200" marT="38100" marB="38100" anchor="ctr">
+                    <a:lnL w="9525" cap="flat" cmpd="sng" algn="ctr">
+                      <a:solidFill>
+                        <a:srgbClr val="D7E1F5"/>
+                      </a:solidFill>
+                      <a:prstDash val="solid"/>
+                      <a:round/>
+                      <a:headEnd type="none" w="med" len="med"/>
+                      <a:tailEnd type="none" w="med" len="med"/>
+                    </a:lnL>
+                    <a:lnR w="9525" cap="flat" cmpd="sng" algn="ctr">
+                      <a:solidFill>
+                        <a:srgbClr val="D7E1F5"/>
+                      </a:solidFill>
+                      <a:prstDash val="solid"/>
+                      <a:round/>
+                      <a:headEnd type="none" w="med" len="med"/>
+                      <a:tailEnd type="none" w="med" len="med"/>
+                    </a:lnR>
+                    <a:lnT w="9525" cap="flat" cmpd="sng" algn="ctr">
+                      <a:solidFill>
+                        <a:srgbClr val="D7E1F5"/>
+                      </a:solidFill>
+                      <a:prstDash val="solid"/>
+                      <a:round/>
+                      <a:headEnd type="none" w="med" len="med"/>
+                      <a:tailEnd type="none" w="med" len="med"/>
+                    </a:lnT>
+                    <a:lnB w="9525" cap="flat" cmpd="sng" algn="ctr">
+                      <a:solidFill>
+                        <a:srgbClr val="D7E1F5"/>
+                      </a:solidFill>
+                      <a:prstDash val="solid"/>
+                      <a:round/>
+                      <a:headEnd type="none" w="med" len="med"/>
+                      <a:tailEnd type="none" w="med" len="med"/>
+                    </a:lnB>
+                    <a:solidFill>
+                      <a:srgbClr val="F5F8FD"/>
+                    </a:solidFill>
+                  </a:tcPr>
+                </a:tc>
+                <a:tc>
+                  <a:txBody>
+                    <a:bodyPr/>
+                    <a:lstStyle/>
+                    <a:p>
+                      <a:pPr algn="ctr" indent="0" marL="0">
+                        <a:buNone/>
+                      </a:pPr>
+                      <a:r>
+                        <a:rPr lang="en-US" sz="830" dirty="0">
+                          <a:solidFill>
+                            <a:srgbClr val="3A4566"/>
+                          </a:solidFill>
+                          <a:latin typeface="Calibri" pitchFamily="34" charset="0"/>
+                          <a:ea typeface="Calibri" pitchFamily="34" charset="-122"/>
+                          <a:cs typeface="Calibri" pitchFamily="34" charset="-120"/>
+                        </a:rPr>
+                        <a:t>No — voluntary (3(c)(7))</a:t>
+                      </a:r>
+                      <a:endParaRPr lang="en-US" sz="830" dirty="0">
+                        <a:latin typeface="Calibri" charset="0"/>
+                        <a:ea typeface="Calibri" charset="0"/>
+                        <a:cs typeface="Calibri" charset="0"/>
+                      </a:endParaRPr>
+                    </a:p>
+                  </a:txBody>
+                  <a:tcPr marL="76200" marR="76200" marT="38100" marB="38100" anchor="ctr">
+                    <a:lnL w="9525" cap="flat" cmpd="sng" algn="ctr">
+                      <a:solidFill>
+                        <a:srgbClr val="D7E1F5"/>
+                      </a:solidFill>
+                      <a:prstDash val="solid"/>
+                      <a:round/>
+                      <a:headEnd type="none" w="med" len="med"/>
+                      <a:tailEnd type="none" w="med" len="med"/>
+                    </a:lnL>
+                    <a:lnR w="9525" cap="flat" cmpd="sng" algn="ctr">
+                      <a:solidFill>
+                        <a:srgbClr val="D7E1F5"/>
+                      </a:solidFill>
+                      <a:prstDash val="solid"/>
+                      <a:round/>
+                      <a:headEnd type="none" w="med" len="med"/>
+                      <a:tailEnd type="none" w="med" len="med"/>
+                    </a:lnR>
+                    <a:lnT w="9525" cap="flat" cmpd="sng" algn="ctr">
+                      <a:solidFill>
+                        <a:srgbClr val="D7E1F5"/>
+                      </a:solidFill>
+                      <a:prstDash val="solid"/>
+                      <a:round/>
+                      <a:headEnd type="none" w="med" len="med"/>
+                      <a:tailEnd type="none" w="med" len="med"/>
+                    </a:lnT>
+                    <a:lnB w="9525" cap="flat" cmpd="sng" algn="ctr">
+                      <a:solidFill>
+                        <a:srgbClr val="D7E1F5"/>
+                      </a:solidFill>
+                      <a:prstDash val="solid"/>
+                      <a:round/>
+                      <a:headEnd type="none" w="med" len="med"/>
+                      <a:tailEnd type="none" w="med" len="med"/>
+                    </a:lnB>
+                    <a:solidFill>
+                      <a:srgbClr val="F5F8FD"/>
+                    </a:solidFill>
+                  </a:tcPr>
+                </a:tc>
+                <a:tc>
+                  <a:txBody>
+                    <a:bodyPr/>
+                    <a:lstStyle/>
+                    <a:p>
+                      <a:pPr algn="ctr" indent="0" marL="0">
+                        <a:buNone/>
+                      </a:pPr>
+                      <a:r>
+                        <a:rPr lang="en-US" sz="830" dirty="0">
+                          <a:solidFill>
+                            <a:srgbClr val="3A4566"/>
+                          </a:solidFill>
+                          <a:latin typeface="Calibri" pitchFamily="34" charset="0"/>
+                          <a:ea typeface="Calibri" pitchFamily="34" charset="-122"/>
+                          <a:cs typeface="Calibri" pitchFamily="34" charset="-120"/>
+                        </a:rPr>
+                        <a:t>Yes — qualifying security</a:t>
+                      </a:r>
+                      <a:endParaRPr lang="en-US" sz="830" dirty="0">
+                        <a:latin typeface="Calibri" charset="0"/>
+                        <a:ea typeface="Calibri" charset="0"/>
+                        <a:cs typeface="Calibri" charset="0"/>
+                      </a:endParaRPr>
+                    </a:p>
+                  </a:txBody>
+                  <a:tcPr marL="76200" marR="76200" marT="38100" marB="38100" anchor="ctr">
+                    <a:lnL w="9525" cap="flat" cmpd="sng" algn="ctr">
+                      <a:solidFill>
+                        <a:srgbClr val="D7E1F5"/>
+                      </a:solidFill>
+                      <a:prstDash val="solid"/>
+                      <a:round/>
+                      <a:headEnd type="none" w="med" len="med"/>
+                      <a:tailEnd type="none" w="med" len="med"/>
+                    </a:lnL>
+                    <a:lnR w="9525" cap="flat" cmpd="sng" algn="ctr">
+                      <a:solidFill>
+                        <a:srgbClr val="D7E1F5"/>
+                      </a:solidFill>
+                      <a:prstDash val="solid"/>
+                      <a:round/>
+                      <a:headEnd type="none" w="med" len="med"/>
+                      <a:tailEnd type="none" w="med" len="med"/>
+                    </a:lnR>
+                    <a:lnT w="9525" cap="flat" cmpd="sng" algn="ctr">
+                      <a:solidFill>
+                        <a:srgbClr val="D7E1F5"/>
+                      </a:solidFill>
+                      <a:prstDash val="solid"/>
+                      <a:round/>
+                      <a:headEnd type="none" w="med" len="med"/>
+                      <a:tailEnd type="none" w="med" len="med"/>
+                    </a:lnT>
+                    <a:lnB w="9525" cap="flat" cmpd="sng" algn="ctr">
+                      <a:solidFill>
+                        <a:srgbClr val="D7E1F5"/>
+                      </a:solidFill>
+                      <a:prstDash val="solid"/>
+                      <a:round/>
+                      <a:headEnd type="none" w="med" len="med"/>
+                      <a:tailEnd type="none" w="med" len="med"/>
+                    </a:lnB>
+                    <a:solidFill>
+                      <a:srgbClr val="F5F8FD"/>
+                    </a:solidFill>
+                  </a:tcPr>
+                </a:tc>
+              </a:tr>
+              <a:tr h="0">
+                <a:tc>
+                  <a:txBody>
+                    <a:bodyPr/>
+                    <a:lstStyle/>
+                    <a:p>
+                      <a:pPr algn="l" indent="0" marL="0">
+                        <a:buNone/>
+                      </a:pPr>
+                      <a:r>
+                        <a:rPr lang="en-US" sz="830" b="1" dirty="0">
+                          <a:solidFill>
+                            <a:srgbClr val="1E2761"/>
+                          </a:solidFill>
+                          <a:latin typeface="Calibri" pitchFamily="34" charset="0"/>
+                          <a:ea typeface="Calibri" pitchFamily="34" charset="-122"/>
+                          <a:cs typeface="Calibri" pitchFamily="34" charset="-120"/>
+                        </a:rPr>
                         <a:t>Eligible investors</a:t>
                       </a:r>
                       <a:endParaRPr lang="en-US" sz="830" dirty="0">
@@ -18542,7 +19020,7 @@
                       <a:tailEnd type="none" w="med" len="med"/>
                     </a:lnB>
                     <a:solidFill>
-                      <a:srgbClr val="F5F8FD"/>
+                      <a:srgbClr val="FFFFFF"/>
                     </a:solidFill>
                   </a:tcPr>
                 </a:tc>
@@ -18610,7 +19088,7 @@
                       <a:tailEnd type="none" w="med" len="med"/>
                     </a:lnB>
                     <a:solidFill>
-                      <a:srgbClr val="F5F8FD"/>
+                      <a:srgbClr val="FFFFFF"/>
                     </a:solidFill>
                   </a:tcPr>
                 </a:tc>
@@ -18678,7 +19156,7 @@
                       <a:tailEnd type="none" w="med" len="med"/>
                     </a:lnB>
                     <a:solidFill>
-                      <a:srgbClr val="F5F8FD"/>
+                      <a:srgbClr val="FFFFFF"/>
                     </a:solidFill>
                   </a:tcPr>
                 </a:tc>
@@ -18746,7 +19224,7 @@
                       <a:tailEnd type="none" w="med" len="med"/>
                     </a:lnB>
                     <a:solidFill>
-                      <a:srgbClr val="F5F8FD"/>
+                      <a:srgbClr val="FFFFFF"/>
                     </a:solidFill>
                   </a:tcPr>
                 </a:tc>
@@ -18814,7 +19292,7 @@
                       <a:tailEnd type="none" w="med" len="med"/>
                     </a:lnB>
                     <a:solidFill>
-                      <a:srgbClr val="F5F8FD"/>
+                      <a:srgbClr val="FFFFFF"/>
                     </a:solidFill>
                   </a:tcPr>
                 </a:tc>
@@ -18882,7 +19360,7 @@
                       <a:tailEnd type="none" w="med" len="med"/>
                     </a:lnB>
                     <a:solidFill>
-                      <a:srgbClr val="F5F8FD"/>
+                      <a:srgbClr val="FFFFFF"/>
                     </a:solidFill>
                   </a:tcPr>
                 </a:tc>
@@ -18950,7 +19428,7 @@
                       <a:tailEnd type="none" w="med" len="med"/>
                     </a:lnB>
                     <a:solidFill>
-                      <a:srgbClr val="F5F8FD"/>
+                      <a:srgbClr val="FFFFFF"/>
                     </a:solidFill>
                   </a:tcPr>
                 </a:tc>
@@ -19020,7 +19498,7 @@
                       <a:tailEnd type="none" w="med" len="med"/>
                     </a:lnB>
                     <a:solidFill>
-                      <a:srgbClr val="FFFFFF"/>
+                      <a:srgbClr val="F5F8FD"/>
                     </a:solidFill>
                   </a:tcPr>
                 </a:tc>
@@ -19088,7 +19566,7 @@
                       <a:tailEnd type="none" w="med" len="med"/>
                     </a:lnB>
                     <a:solidFill>
-                      <a:srgbClr val="FFFFFF"/>
+                      <a:srgbClr val="F5F8FD"/>
                     </a:solidFill>
                   </a:tcPr>
                 </a:tc>
@@ -19156,7 +19634,7 @@
                       <a:tailEnd type="none" w="med" len="med"/>
                     </a:lnB>
                     <a:solidFill>
-                      <a:srgbClr val="FFFFFF"/>
+                      <a:srgbClr val="F5F8FD"/>
                     </a:solidFill>
                   </a:tcPr>
                 </a:tc>
@@ -19224,7 +19702,7 @@
                       <a:tailEnd type="none" w="med" len="med"/>
                     </a:lnB>
                     <a:solidFill>
-                      <a:srgbClr val="FFFFFF"/>
+                      <a:srgbClr val="F5F8FD"/>
                     </a:solidFill>
                   </a:tcPr>
                 </a:tc>
@@ -19292,7 +19770,7 @@
                       <a:tailEnd type="none" w="med" len="med"/>
                     </a:lnB>
                     <a:solidFill>
-                      <a:srgbClr val="FFFFFF"/>
+                      <a:srgbClr val="F5F8FD"/>
                     </a:solidFill>
                   </a:tcPr>
                 </a:tc>
@@ -19360,7 +19838,7 @@
                       <a:tailEnd type="none" w="med" len="med"/>
                     </a:lnB>
                     <a:solidFill>
-                      <a:srgbClr val="FFFFFF"/>
+                      <a:srgbClr val="F5F8FD"/>
                     </a:solidFill>
                   </a:tcPr>
                 </a:tc>
@@ -19428,7 +19906,7 @@
                       <a:tailEnd type="none" w="med" len="med"/>
                     </a:lnB>
                     <a:solidFill>
-                      <a:srgbClr val="FFFFFF"/>
+                      <a:srgbClr val="F5F8FD"/>
                     </a:solidFill>
                   </a:tcPr>
                 </a:tc>
@@ -19498,7 +19976,7 @@
                       <a:tailEnd type="none" w="med" len="med"/>
                     </a:lnB>
                     <a:solidFill>
-                      <a:srgbClr val="F5F8FD"/>
+                      <a:srgbClr val="FFFFFF"/>
                     </a:solidFill>
                   </a:tcPr>
                 </a:tc>
@@ -19566,7 +20044,7 @@
                       <a:tailEnd type="none" w="med" len="med"/>
                     </a:lnB>
                     <a:solidFill>
-                      <a:srgbClr val="F5F8FD"/>
+                      <a:srgbClr val="FFFFFF"/>
                     </a:solidFill>
                   </a:tcPr>
                 </a:tc>
@@ -19634,7 +20112,7 @@
                       <a:tailEnd type="none" w="med" len="med"/>
                     </a:lnB>
                     <a:solidFill>
-                      <a:srgbClr val="F5F8FD"/>
+                      <a:srgbClr val="FFFFFF"/>
                     </a:solidFill>
                   </a:tcPr>
                 </a:tc>
@@ -19702,7 +20180,7 @@
                       <a:tailEnd type="none" w="med" len="med"/>
                     </a:lnB>
                     <a:solidFill>
-                      <a:srgbClr val="F5F8FD"/>
+                      <a:srgbClr val="FFFFFF"/>
                     </a:solidFill>
                   </a:tcPr>
                 </a:tc>
@@ -19770,7 +20248,7 @@
                       <a:tailEnd type="none" w="med" len="med"/>
                     </a:lnB>
                     <a:solidFill>
-                      <a:srgbClr val="F5F8FD"/>
+                      <a:srgbClr val="FFFFFF"/>
                     </a:solidFill>
                   </a:tcPr>
                 </a:tc>
@@ -19838,7 +20316,7 @@
                       <a:tailEnd type="none" w="med" len="med"/>
                     </a:lnB>
                     <a:solidFill>
-                      <a:srgbClr val="F5F8FD"/>
+                      <a:srgbClr val="FFFFFF"/>
                     </a:solidFill>
                   </a:tcPr>
                 </a:tc>
@@ -19906,7 +20384,7 @@
                       <a:tailEnd type="none" w="med" len="med"/>
                     </a:lnB>
                     <a:solidFill>
-                      <a:srgbClr val="F5F8FD"/>
+                      <a:srgbClr val="FFFFFF"/>
                     </a:solidFill>
                   </a:tcPr>
                 </a:tc>
@@ -19976,6 +20454,484 @@
                       <a:tailEnd type="none" w="med" len="med"/>
                     </a:lnB>
                     <a:solidFill>
+                      <a:srgbClr val="F5F8FD"/>
+                    </a:solidFill>
+                  </a:tcPr>
+                </a:tc>
+                <a:tc>
+                  <a:txBody>
+                    <a:bodyPr/>
+                    <a:lstStyle/>
+                    <a:p>
+                      <a:pPr algn="ctr" indent="0" marL="0">
+                        <a:buNone/>
+                      </a:pPr>
+                      <a:r>
+                        <a:rPr lang="en-US" sz="830" dirty="0">
+                          <a:solidFill>
+                            <a:srgbClr val="3A4566"/>
+                          </a:solidFill>
+                          <a:latin typeface="Calibri" pitchFamily="34" charset="0"/>
+                          <a:ea typeface="Calibri" pitchFamily="34" charset="-122"/>
+                          <a:cs typeface="Calibri" pitchFamily="34" charset="-120"/>
+                        </a:rPr>
+                        <a:t>FT Services/JPMorgan</a:t>
+                      </a:r>
+                      <a:endParaRPr lang="en-US" sz="830" dirty="0">
+                        <a:latin typeface="Calibri" charset="0"/>
+                        <a:ea typeface="Calibri" charset="0"/>
+                        <a:cs typeface="Calibri" charset="0"/>
+                      </a:endParaRPr>
+                    </a:p>
+                  </a:txBody>
+                  <a:tcPr marL="76200" marR="76200" marT="38100" marB="38100" anchor="ctr">
+                    <a:lnL w="9525" cap="flat" cmpd="sng" algn="ctr">
+                      <a:solidFill>
+                        <a:srgbClr val="D7E1F5"/>
+                      </a:solidFill>
+                      <a:prstDash val="solid"/>
+                      <a:round/>
+                      <a:headEnd type="none" w="med" len="med"/>
+                      <a:tailEnd type="none" w="med" len="med"/>
+                    </a:lnL>
+                    <a:lnR w="9525" cap="flat" cmpd="sng" algn="ctr">
+                      <a:solidFill>
+                        <a:srgbClr val="D7E1F5"/>
+                      </a:solidFill>
+                      <a:prstDash val="solid"/>
+                      <a:round/>
+                      <a:headEnd type="none" w="med" len="med"/>
+                      <a:tailEnd type="none" w="med" len="med"/>
+                    </a:lnR>
+                    <a:lnT w="9525" cap="flat" cmpd="sng" algn="ctr">
+                      <a:solidFill>
+                        <a:srgbClr val="D7E1F5"/>
+                      </a:solidFill>
+                      <a:prstDash val="solid"/>
+                      <a:round/>
+                      <a:headEnd type="none" w="med" len="med"/>
+                      <a:tailEnd type="none" w="med" len="med"/>
+                    </a:lnT>
+                    <a:lnB w="9525" cap="flat" cmpd="sng" algn="ctr">
+                      <a:solidFill>
+                        <a:srgbClr val="D7E1F5"/>
+                      </a:solidFill>
+                      <a:prstDash val="solid"/>
+                      <a:round/>
+                      <a:headEnd type="none" w="med" len="med"/>
+                      <a:tailEnd type="none" w="med" len="med"/>
+                    </a:lnB>
+                    <a:solidFill>
+                      <a:srgbClr val="F5F8FD"/>
+                    </a:solidFill>
+                  </a:tcPr>
+                </a:tc>
+                <a:tc>
+                  <a:txBody>
+                    <a:bodyPr/>
+                    <a:lstStyle/>
+                    <a:p>
+                      <a:pPr algn="ctr" indent="0" marL="0">
+                        <a:buNone/>
+                      </a:pPr>
+                      <a:r>
+                        <a:rPr lang="en-US" sz="830" dirty="0">
+                          <a:solidFill>
+                            <a:srgbClr val="3A4566"/>
+                          </a:solidFill>
+                          <a:latin typeface="Calibri" pitchFamily="34" charset="0"/>
+                          <a:ea typeface="Calibri" pitchFamily="34" charset="-122"/>
+                          <a:cs typeface="Calibri" pitchFamily="34" charset="-120"/>
+                        </a:rPr>
+                        <a:t>BNY Mellon</a:t>
+                      </a:r>
+                      <a:endParaRPr lang="en-US" sz="830" dirty="0">
+                        <a:latin typeface="Calibri" charset="0"/>
+                        <a:ea typeface="Calibri" charset="0"/>
+                        <a:cs typeface="Calibri" charset="0"/>
+                      </a:endParaRPr>
+                    </a:p>
+                  </a:txBody>
+                  <a:tcPr marL="76200" marR="76200" marT="38100" marB="38100" anchor="ctr">
+                    <a:lnL w="9525" cap="flat" cmpd="sng" algn="ctr">
+                      <a:solidFill>
+                        <a:srgbClr val="D7E1F5"/>
+                      </a:solidFill>
+                      <a:prstDash val="solid"/>
+                      <a:round/>
+                      <a:headEnd type="none" w="med" len="med"/>
+                      <a:tailEnd type="none" w="med" len="med"/>
+                    </a:lnL>
+                    <a:lnR w="9525" cap="flat" cmpd="sng" algn="ctr">
+                      <a:solidFill>
+                        <a:srgbClr val="D7E1F5"/>
+                      </a:solidFill>
+                      <a:prstDash val="solid"/>
+                      <a:round/>
+                      <a:headEnd type="none" w="med" len="med"/>
+                      <a:tailEnd type="none" w="med" len="med"/>
+                    </a:lnR>
+                    <a:lnT w="9525" cap="flat" cmpd="sng" algn="ctr">
+                      <a:solidFill>
+                        <a:srgbClr val="D7E1F5"/>
+                      </a:solidFill>
+                      <a:prstDash val="solid"/>
+                      <a:round/>
+                      <a:headEnd type="none" w="med" len="med"/>
+                      <a:tailEnd type="none" w="med" len="med"/>
+                    </a:lnT>
+                    <a:lnB w="9525" cap="flat" cmpd="sng" algn="ctr">
+                      <a:solidFill>
+                        <a:srgbClr val="D7E1F5"/>
+                      </a:solidFill>
+                      <a:prstDash val="solid"/>
+                      <a:round/>
+                      <a:headEnd type="none" w="med" len="med"/>
+                      <a:tailEnd type="none" w="med" len="med"/>
+                    </a:lnB>
+                    <a:solidFill>
+                      <a:srgbClr val="F5F8FD"/>
+                    </a:solidFill>
+                  </a:tcPr>
+                </a:tc>
+                <a:tc>
+                  <a:txBody>
+                    <a:bodyPr/>
+                    <a:lstStyle/>
+                    <a:p>
+                      <a:pPr algn="ctr" indent="0" marL="0">
+                        <a:buNone/>
+                      </a:pPr>
+                      <a:r>
+                        <a:rPr lang="en-US" sz="830" dirty="0">
+                          <a:solidFill>
+                            <a:srgbClr val="3A4566"/>
+                          </a:solidFill>
+                          <a:latin typeface="Calibri" pitchFamily="34" charset="0"/>
+                          <a:ea typeface="Calibri" pitchFamily="34" charset="-122"/>
+                          <a:cs typeface="Calibri" pitchFamily="34" charset="-120"/>
+                        </a:rPr>
+                        <a:t>Not confirmed</a:t>
+                      </a:r>
+                      <a:endParaRPr lang="en-US" sz="830" dirty="0">
+                        <a:latin typeface="Calibri" charset="0"/>
+                        <a:ea typeface="Calibri" charset="0"/>
+                        <a:cs typeface="Calibri" charset="0"/>
+                      </a:endParaRPr>
+                    </a:p>
+                  </a:txBody>
+                  <a:tcPr marL="76200" marR="76200" marT="38100" marB="38100" anchor="ctr">
+                    <a:lnL w="9525" cap="flat" cmpd="sng" algn="ctr">
+                      <a:solidFill>
+                        <a:srgbClr val="D7E1F5"/>
+                      </a:solidFill>
+                      <a:prstDash val="solid"/>
+                      <a:round/>
+                      <a:headEnd type="none" w="med" len="med"/>
+                      <a:tailEnd type="none" w="med" len="med"/>
+                    </a:lnL>
+                    <a:lnR w="9525" cap="flat" cmpd="sng" algn="ctr">
+                      <a:solidFill>
+                        <a:srgbClr val="D7E1F5"/>
+                      </a:solidFill>
+                      <a:prstDash val="solid"/>
+                      <a:round/>
+                      <a:headEnd type="none" w="med" len="med"/>
+                      <a:tailEnd type="none" w="med" len="med"/>
+                    </a:lnR>
+                    <a:lnT w="9525" cap="flat" cmpd="sng" algn="ctr">
+                      <a:solidFill>
+                        <a:srgbClr val="D7E1F5"/>
+                      </a:solidFill>
+                      <a:prstDash val="solid"/>
+                      <a:round/>
+                      <a:headEnd type="none" w="med" len="med"/>
+                      <a:tailEnd type="none" w="med" len="med"/>
+                    </a:lnT>
+                    <a:lnB w="9525" cap="flat" cmpd="sng" algn="ctr">
+                      <a:solidFill>
+                        <a:srgbClr val="D7E1F5"/>
+                      </a:solidFill>
+                      <a:prstDash val="solid"/>
+                      <a:round/>
+                      <a:headEnd type="none" w="med" len="med"/>
+                      <a:tailEnd type="none" w="med" len="med"/>
+                    </a:lnB>
+                    <a:solidFill>
+                      <a:srgbClr val="F5F8FD"/>
+                    </a:solidFill>
+                  </a:tcPr>
+                </a:tc>
+                <a:tc>
+                  <a:txBody>
+                    <a:bodyPr/>
+                    <a:lstStyle/>
+                    <a:p>
+                      <a:pPr algn="ctr" indent="0" marL="0">
+                        <a:buNone/>
+                      </a:pPr>
+                      <a:r>
+                        <a:rPr lang="en-US" sz="830" dirty="0">
+                          <a:solidFill>
+                            <a:srgbClr val="3A4566"/>
+                          </a:solidFill>
+                          <a:latin typeface="Calibri" pitchFamily="34" charset="0"/>
+                          <a:ea typeface="Calibri" pitchFamily="34" charset="-122"/>
+                          <a:cs typeface="Calibri" pitchFamily="34" charset="-120"/>
+                        </a:rPr>
+                        <a:t>Not confirmed</a:t>
+                      </a:r>
+                      <a:endParaRPr lang="en-US" sz="830" dirty="0">
+                        <a:latin typeface="Calibri" charset="0"/>
+                        <a:ea typeface="Calibri" charset="0"/>
+                        <a:cs typeface="Calibri" charset="0"/>
+                      </a:endParaRPr>
+                    </a:p>
+                  </a:txBody>
+                  <a:tcPr marL="76200" marR="76200" marT="38100" marB="38100" anchor="ctr">
+                    <a:lnL w="9525" cap="flat" cmpd="sng" algn="ctr">
+                      <a:solidFill>
+                        <a:srgbClr val="D7E1F5"/>
+                      </a:solidFill>
+                      <a:prstDash val="solid"/>
+                      <a:round/>
+                      <a:headEnd type="none" w="med" len="med"/>
+                      <a:tailEnd type="none" w="med" len="med"/>
+                    </a:lnL>
+                    <a:lnR w="9525" cap="flat" cmpd="sng" algn="ctr">
+                      <a:solidFill>
+                        <a:srgbClr val="D7E1F5"/>
+                      </a:solidFill>
+                      <a:prstDash val="solid"/>
+                      <a:round/>
+                      <a:headEnd type="none" w="med" len="med"/>
+                      <a:tailEnd type="none" w="med" len="med"/>
+                    </a:lnR>
+                    <a:lnT w="9525" cap="flat" cmpd="sng" algn="ctr">
+                      <a:solidFill>
+                        <a:srgbClr val="D7E1F5"/>
+                      </a:solidFill>
+                      <a:prstDash val="solid"/>
+                      <a:round/>
+                      <a:headEnd type="none" w="med" len="med"/>
+                      <a:tailEnd type="none" w="med" len="med"/>
+                    </a:lnT>
+                    <a:lnB w="9525" cap="flat" cmpd="sng" algn="ctr">
+                      <a:solidFill>
+                        <a:srgbClr val="D7E1F5"/>
+                      </a:solidFill>
+                      <a:prstDash val="solid"/>
+                      <a:round/>
+                      <a:headEnd type="none" w="med" len="med"/>
+                      <a:tailEnd type="none" w="med" len="med"/>
+                    </a:lnB>
+                    <a:solidFill>
+                      <a:srgbClr val="F5F8FD"/>
+                    </a:solidFill>
+                  </a:tcPr>
+                </a:tc>
+                <a:tc>
+                  <a:txBody>
+                    <a:bodyPr/>
+                    <a:lstStyle/>
+                    <a:p>
+                      <a:pPr algn="ctr" indent="0" marL="0">
+                        <a:buNone/>
+                      </a:pPr>
+                      <a:r>
+                        <a:rPr lang="en-US" sz="830" dirty="0">
+                          <a:solidFill>
+                            <a:srgbClr val="3A4566"/>
+                          </a:solidFill>
+                          <a:latin typeface="Calibri" pitchFamily="34" charset="0"/>
+                          <a:ea typeface="Calibri" pitchFamily="34" charset="-122"/>
+                          <a:cs typeface="Calibri" pitchFamily="34" charset="-120"/>
+                        </a:rPr>
+                        <a:t>NAV Consulting</a:t>
+                      </a:r>
+                      <a:endParaRPr lang="en-US" sz="830" dirty="0">
+                        <a:latin typeface="Calibri" charset="0"/>
+                        <a:ea typeface="Calibri" charset="0"/>
+                        <a:cs typeface="Calibri" charset="0"/>
+                      </a:endParaRPr>
+                    </a:p>
+                  </a:txBody>
+                  <a:tcPr marL="76200" marR="76200" marT="38100" marB="38100" anchor="ctr">
+                    <a:lnL w="9525" cap="flat" cmpd="sng" algn="ctr">
+                      <a:solidFill>
+                        <a:srgbClr val="D7E1F5"/>
+                      </a:solidFill>
+                      <a:prstDash val="solid"/>
+                      <a:round/>
+                      <a:headEnd type="none" w="med" len="med"/>
+                      <a:tailEnd type="none" w="med" len="med"/>
+                    </a:lnL>
+                    <a:lnR w="9525" cap="flat" cmpd="sng" algn="ctr">
+                      <a:solidFill>
+                        <a:srgbClr val="D7E1F5"/>
+                      </a:solidFill>
+                      <a:prstDash val="solid"/>
+                      <a:round/>
+                      <a:headEnd type="none" w="med" len="med"/>
+                      <a:tailEnd type="none" w="med" len="med"/>
+                    </a:lnR>
+                    <a:lnT w="9525" cap="flat" cmpd="sng" algn="ctr">
+                      <a:solidFill>
+                        <a:srgbClr val="D7E1F5"/>
+                      </a:solidFill>
+                      <a:prstDash val="solid"/>
+                      <a:round/>
+                      <a:headEnd type="none" w="med" len="med"/>
+                      <a:tailEnd type="none" w="med" len="med"/>
+                    </a:lnT>
+                    <a:lnB w="9525" cap="flat" cmpd="sng" algn="ctr">
+                      <a:solidFill>
+                        <a:srgbClr val="D7E1F5"/>
+                      </a:solidFill>
+                      <a:prstDash val="solid"/>
+                      <a:round/>
+                      <a:headEnd type="none" w="med" len="med"/>
+                      <a:tailEnd type="none" w="med" len="med"/>
+                    </a:lnB>
+                    <a:solidFill>
+                      <a:srgbClr val="F5F8FD"/>
+                    </a:solidFill>
+                  </a:tcPr>
+                </a:tc>
+                <a:tc>
+                  <a:txBody>
+                    <a:bodyPr/>
+                    <a:lstStyle/>
+                    <a:p>
+                      <a:pPr algn="ctr" indent="0" marL="0">
+                        <a:buNone/>
+                      </a:pPr>
+                      <a:r>
+                        <a:rPr lang="en-US" sz="830" dirty="0">
+                          <a:solidFill>
+                            <a:srgbClr val="3A4566"/>
+                          </a:solidFill>
+                          <a:latin typeface="Calibri" pitchFamily="34" charset="0"/>
+                          <a:ea typeface="Calibri" pitchFamily="34" charset="-122"/>
+                          <a:cs typeface="Calibri" pitchFamily="34" charset="-120"/>
+                        </a:rPr>
+                        <a:t>Not confirmed</a:t>
+                      </a:r>
+                      <a:endParaRPr lang="en-US" sz="830" dirty="0">
+                        <a:latin typeface="Calibri" charset="0"/>
+                        <a:ea typeface="Calibri" charset="0"/>
+                        <a:cs typeface="Calibri" charset="0"/>
+                      </a:endParaRPr>
+                    </a:p>
+                  </a:txBody>
+                  <a:tcPr marL="76200" marR="76200" marT="38100" marB="38100" anchor="ctr">
+                    <a:lnL w="9525" cap="flat" cmpd="sng" algn="ctr">
+                      <a:solidFill>
+                        <a:srgbClr val="D7E1F5"/>
+                      </a:solidFill>
+                      <a:prstDash val="solid"/>
+                      <a:round/>
+                      <a:headEnd type="none" w="med" len="med"/>
+                      <a:tailEnd type="none" w="med" len="med"/>
+                    </a:lnL>
+                    <a:lnR w="9525" cap="flat" cmpd="sng" algn="ctr">
+                      <a:solidFill>
+                        <a:srgbClr val="D7E1F5"/>
+                      </a:solidFill>
+                      <a:prstDash val="solid"/>
+                      <a:round/>
+                      <a:headEnd type="none" w="med" len="med"/>
+                      <a:tailEnd type="none" w="med" len="med"/>
+                    </a:lnR>
+                    <a:lnT w="9525" cap="flat" cmpd="sng" algn="ctr">
+                      <a:solidFill>
+                        <a:srgbClr val="D7E1F5"/>
+                      </a:solidFill>
+                      <a:prstDash val="solid"/>
+                      <a:round/>
+                      <a:headEnd type="none" w="med" len="med"/>
+                      <a:tailEnd type="none" w="med" len="med"/>
+                    </a:lnT>
+                    <a:lnB w="9525" cap="flat" cmpd="sng" algn="ctr">
+                      <a:solidFill>
+                        <a:srgbClr val="D7E1F5"/>
+                      </a:solidFill>
+                      <a:prstDash val="solid"/>
+                      <a:round/>
+                      <a:headEnd type="none" w="med" len="med"/>
+                      <a:tailEnd type="none" w="med" len="med"/>
+                    </a:lnB>
+                    <a:solidFill>
+                      <a:srgbClr val="F5F8FD"/>
+                    </a:solidFill>
+                  </a:tcPr>
+                </a:tc>
+              </a:tr>
+              <a:tr h="0">
+                <a:tc>
+                  <a:txBody>
+                    <a:bodyPr/>
+                    <a:lstStyle/>
+                    <a:p>
+                      <a:pPr algn="l" indent="0" marL="0">
+                        <a:buNone/>
+                      </a:pPr>
+                      <a:r>
+                        <a:rPr lang="en-US" sz="830" b="1" dirty="0">
+                          <a:solidFill>
+                            <a:srgbClr val="1E2761"/>
+                          </a:solidFill>
+                          <a:latin typeface="Calibri" pitchFamily="34" charset="0"/>
+                          <a:ea typeface="Calibri" pitchFamily="34" charset="-122"/>
+                          <a:cs typeface="Calibri" pitchFamily="34" charset="-120"/>
+                        </a:rPr>
+                        <a:t>Custodian</a:t>
+                      </a:r>
+                      <a:endParaRPr lang="en-US" sz="830" dirty="0">
+                        <a:latin typeface="Calibri" charset="0"/>
+                        <a:ea typeface="Calibri" charset="0"/>
+                        <a:cs typeface="Calibri" charset="0"/>
+                      </a:endParaRPr>
+                    </a:p>
+                  </a:txBody>
+                  <a:tcPr marL="76200" marR="76200" marT="38100" marB="38100" anchor="ctr">
+                    <a:lnL w="9525" cap="flat" cmpd="sng" algn="ctr">
+                      <a:solidFill>
+                        <a:srgbClr val="D7E1F5"/>
+                      </a:solidFill>
+                      <a:prstDash val="solid"/>
+                      <a:round/>
+                      <a:headEnd type="none" w="med" len="med"/>
+                      <a:tailEnd type="none" w="med" len="med"/>
+                    </a:lnL>
+                    <a:lnR w="9525" cap="flat" cmpd="sng" algn="ctr">
+                      <a:solidFill>
+                        <a:srgbClr val="D7E1F5"/>
+                      </a:solidFill>
+                      <a:prstDash val="solid"/>
+                      <a:round/>
+                      <a:headEnd type="none" w="med" len="med"/>
+                      <a:tailEnd type="none" w="med" len="med"/>
+                    </a:lnR>
+                    <a:lnT w="9525" cap="flat" cmpd="sng" algn="ctr">
+                      <a:solidFill>
+                        <a:srgbClr val="D7E1F5"/>
+                      </a:solidFill>
+                      <a:prstDash val="solid"/>
+                      <a:round/>
+                      <a:headEnd type="none" w="med" len="med"/>
+                      <a:tailEnd type="none" w="med" len="med"/>
+                    </a:lnT>
+                    <a:lnB w="9525" cap="flat" cmpd="sng" algn="ctr">
+                      <a:solidFill>
+                        <a:srgbClr val="D7E1F5"/>
+                      </a:solidFill>
+                      <a:prstDash val="solid"/>
+                      <a:round/>
+                      <a:headEnd type="none" w="med" len="med"/>
+                      <a:tailEnd type="none" w="med" len="med"/>
+                    </a:lnB>
+                    <a:solidFill>
                       <a:srgbClr val="FFFFFF"/>
                     </a:solidFill>
                   </a:tcPr>
@@ -19997,7 +20953,7 @@
                           <a:ea typeface="Calibri" pitchFamily="34" charset="-122"/>
                           <a:cs typeface="Calibri" pitchFamily="34" charset="-120"/>
                         </a:rPr>
-                        <a:t>FT Services/JPMorgan</a:t>
+                        <a:t>JPMorgan Chase</a:t>
                       </a:r>
                       <a:endParaRPr lang="en-US" sz="830" dirty="0">
                         <a:latin typeface="Calibri" charset="0"/>
@@ -20269,7 +21225,7 @@
                           <a:ea typeface="Calibri" pitchFamily="34" charset="-122"/>
                           <a:cs typeface="Calibri" pitchFamily="34" charset="-120"/>
                         </a:rPr>
-                        <a:t>NAV Consulting</a:t>
+                        <a:t>Not confirmed</a:t>
                       </a:r>
                       <a:endParaRPr lang="en-US" sz="830" dirty="0">
                         <a:latin typeface="Calibri" charset="0"/>
@@ -20407,7 +21363,7 @@
                           <a:ea typeface="Calibri" pitchFamily="34" charset="-122"/>
                           <a:cs typeface="Calibri" pitchFamily="34" charset="-120"/>
                         </a:rPr>
-                        <a:t>Custodian</a:t>
+                        <a:t>Auditor</a:t>
                       </a:r>
                       <a:endParaRPr lang="en-US" sz="830" dirty="0">
                         <a:latin typeface="Calibri" charset="0"/>
@@ -20475,7 +21431,7 @@
                           <a:ea typeface="Calibri" pitchFamily="34" charset="-122"/>
                           <a:cs typeface="Calibri" pitchFamily="34" charset="-120"/>
                         </a:rPr>
-                        <a:t>JPMorgan Chase</a:t>
+                        <a:t>PwC</a:t>
                       </a:r>
                       <a:endParaRPr lang="en-US" sz="830" dirty="0">
                         <a:latin typeface="Calibri" charset="0"/>
@@ -20543,7 +21499,7 @@
                           <a:ea typeface="Calibri" pitchFamily="34" charset="-122"/>
                           <a:cs typeface="Calibri" pitchFamily="34" charset="-120"/>
                         </a:rPr>
-                        <a:t>BNY Mellon</a:t>
+                        <a:t>PwC</a:t>
                       </a:r>
                       <a:endParaRPr lang="en-US" sz="830" dirty="0">
                         <a:latin typeface="Calibri" charset="0"/>
@@ -20679,7 +21635,7 @@
                           <a:ea typeface="Calibri" pitchFamily="34" charset="-122"/>
                           <a:cs typeface="Calibri" pitchFamily="34" charset="-120"/>
                         </a:rPr>
-                        <a:t>Not confirmed</a:t>
+                        <a:t>EY (secondary)</a:t>
                       </a:r>
                       <a:endParaRPr lang="en-US" sz="830" dirty="0">
                         <a:latin typeface="Calibri" charset="0"/>
@@ -20885,484 +21841,6 @@
                           <a:ea typeface="Calibri" pitchFamily="34" charset="-122"/>
                           <a:cs typeface="Calibri" pitchFamily="34" charset="-120"/>
                         </a:rPr>
-                        <a:t>Auditor</a:t>
-                      </a:r>
-                      <a:endParaRPr lang="en-US" sz="830" dirty="0">
-                        <a:latin typeface="Calibri" charset="0"/>
-                        <a:ea typeface="Calibri" charset="0"/>
-                        <a:cs typeface="Calibri" charset="0"/>
-                      </a:endParaRPr>
-                    </a:p>
-                  </a:txBody>
-                  <a:tcPr marL="76200" marR="76200" marT="38100" marB="38100" anchor="ctr">
-                    <a:lnL w="9525" cap="flat" cmpd="sng" algn="ctr">
-                      <a:solidFill>
-                        <a:srgbClr val="D7E1F5"/>
-                      </a:solidFill>
-                      <a:prstDash val="solid"/>
-                      <a:round/>
-                      <a:headEnd type="none" w="med" len="med"/>
-                      <a:tailEnd type="none" w="med" len="med"/>
-                    </a:lnL>
-                    <a:lnR w="9525" cap="flat" cmpd="sng" algn="ctr">
-                      <a:solidFill>
-                        <a:srgbClr val="D7E1F5"/>
-                      </a:solidFill>
-                      <a:prstDash val="solid"/>
-                      <a:round/>
-                      <a:headEnd type="none" w="med" len="med"/>
-                      <a:tailEnd type="none" w="med" len="med"/>
-                    </a:lnR>
-                    <a:lnT w="9525" cap="flat" cmpd="sng" algn="ctr">
-                      <a:solidFill>
-                        <a:srgbClr val="D7E1F5"/>
-                      </a:solidFill>
-                      <a:prstDash val="solid"/>
-                      <a:round/>
-                      <a:headEnd type="none" w="med" len="med"/>
-                      <a:tailEnd type="none" w="med" len="med"/>
-                    </a:lnT>
-                    <a:lnB w="9525" cap="flat" cmpd="sng" algn="ctr">
-                      <a:solidFill>
-                        <a:srgbClr val="D7E1F5"/>
-                      </a:solidFill>
-                      <a:prstDash val="solid"/>
-                      <a:round/>
-                      <a:headEnd type="none" w="med" len="med"/>
-                      <a:tailEnd type="none" w="med" len="med"/>
-                    </a:lnB>
-                    <a:solidFill>
-                      <a:srgbClr val="FFFFFF"/>
-                    </a:solidFill>
-                  </a:tcPr>
-                </a:tc>
-                <a:tc>
-                  <a:txBody>
-                    <a:bodyPr/>
-                    <a:lstStyle/>
-                    <a:p>
-                      <a:pPr algn="ctr" indent="0" marL="0">
-                        <a:buNone/>
-                      </a:pPr>
-                      <a:r>
-                        <a:rPr lang="en-US" sz="830" dirty="0">
-                          <a:solidFill>
-                            <a:srgbClr val="3A4566"/>
-                          </a:solidFill>
-                          <a:latin typeface="Calibri" pitchFamily="34" charset="0"/>
-                          <a:ea typeface="Calibri" pitchFamily="34" charset="-122"/>
-                          <a:cs typeface="Calibri" pitchFamily="34" charset="-120"/>
-                        </a:rPr>
-                        <a:t>PwC</a:t>
-                      </a:r>
-                      <a:endParaRPr lang="en-US" sz="830" dirty="0">
-                        <a:latin typeface="Calibri" charset="0"/>
-                        <a:ea typeface="Calibri" charset="0"/>
-                        <a:cs typeface="Calibri" charset="0"/>
-                      </a:endParaRPr>
-                    </a:p>
-                  </a:txBody>
-                  <a:tcPr marL="76200" marR="76200" marT="38100" marB="38100" anchor="ctr">
-                    <a:lnL w="9525" cap="flat" cmpd="sng" algn="ctr">
-                      <a:solidFill>
-                        <a:srgbClr val="D7E1F5"/>
-                      </a:solidFill>
-                      <a:prstDash val="solid"/>
-                      <a:round/>
-                      <a:headEnd type="none" w="med" len="med"/>
-                      <a:tailEnd type="none" w="med" len="med"/>
-                    </a:lnL>
-                    <a:lnR w="9525" cap="flat" cmpd="sng" algn="ctr">
-                      <a:solidFill>
-                        <a:srgbClr val="D7E1F5"/>
-                      </a:solidFill>
-                      <a:prstDash val="solid"/>
-                      <a:round/>
-                      <a:headEnd type="none" w="med" len="med"/>
-                      <a:tailEnd type="none" w="med" len="med"/>
-                    </a:lnR>
-                    <a:lnT w="9525" cap="flat" cmpd="sng" algn="ctr">
-                      <a:solidFill>
-                        <a:srgbClr val="D7E1F5"/>
-                      </a:solidFill>
-                      <a:prstDash val="solid"/>
-                      <a:round/>
-                      <a:headEnd type="none" w="med" len="med"/>
-                      <a:tailEnd type="none" w="med" len="med"/>
-                    </a:lnT>
-                    <a:lnB w="9525" cap="flat" cmpd="sng" algn="ctr">
-                      <a:solidFill>
-                        <a:srgbClr val="D7E1F5"/>
-                      </a:solidFill>
-                      <a:prstDash val="solid"/>
-                      <a:round/>
-                      <a:headEnd type="none" w="med" len="med"/>
-                      <a:tailEnd type="none" w="med" len="med"/>
-                    </a:lnB>
-                    <a:solidFill>
-                      <a:srgbClr val="FFFFFF"/>
-                    </a:solidFill>
-                  </a:tcPr>
-                </a:tc>
-                <a:tc>
-                  <a:txBody>
-                    <a:bodyPr/>
-                    <a:lstStyle/>
-                    <a:p>
-                      <a:pPr algn="ctr" indent="0" marL="0">
-                        <a:buNone/>
-                      </a:pPr>
-                      <a:r>
-                        <a:rPr lang="en-US" sz="830" dirty="0">
-                          <a:solidFill>
-                            <a:srgbClr val="3A4566"/>
-                          </a:solidFill>
-                          <a:latin typeface="Calibri" pitchFamily="34" charset="0"/>
-                          <a:ea typeface="Calibri" pitchFamily="34" charset="-122"/>
-                          <a:cs typeface="Calibri" pitchFamily="34" charset="-120"/>
-                        </a:rPr>
-                        <a:t>PwC</a:t>
-                      </a:r>
-                      <a:endParaRPr lang="en-US" sz="830" dirty="0">
-                        <a:latin typeface="Calibri" charset="0"/>
-                        <a:ea typeface="Calibri" charset="0"/>
-                        <a:cs typeface="Calibri" charset="0"/>
-                      </a:endParaRPr>
-                    </a:p>
-                  </a:txBody>
-                  <a:tcPr marL="76200" marR="76200" marT="38100" marB="38100" anchor="ctr">
-                    <a:lnL w="9525" cap="flat" cmpd="sng" algn="ctr">
-                      <a:solidFill>
-                        <a:srgbClr val="D7E1F5"/>
-                      </a:solidFill>
-                      <a:prstDash val="solid"/>
-                      <a:round/>
-                      <a:headEnd type="none" w="med" len="med"/>
-                      <a:tailEnd type="none" w="med" len="med"/>
-                    </a:lnL>
-                    <a:lnR w="9525" cap="flat" cmpd="sng" algn="ctr">
-                      <a:solidFill>
-                        <a:srgbClr val="D7E1F5"/>
-                      </a:solidFill>
-                      <a:prstDash val="solid"/>
-                      <a:round/>
-                      <a:headEnd type="none" w="med" len="med"/>
-                      <a:tailEnd type="none" w="med" len="med"/>
-                    </a:lnR>
-                    <a:lnT w="9525" cap="flat" cmpd="sng" algn="ctr">
-                      <a:solidFill>
-                        <a:srgbClr val="D7E1F5"/>
-                      </a:solidFill>
-                      <a:prstDash val="solid"/>
-                      <a:round/>
-                      <a:headEnd type="none" w="med" len="med"/>
-                      <a:tailEnd type="none" w="med" len="med"/>
-                    </a:lnT>
-                    <a:lnB w="9525" cap="flat" cmpd="sng" algn="ctr">
-                      <a:solidFill>
-                        <a:srgbClr val="D7E1F5"/>
-                      </a:solidFill>
-                      <a:prstDash val="solid"/>
-                      <a:round/>
-                      <a:headEnd type="none" w="med" len="med"/>
-                      <a:tailEnd type="none" w="med" len="med"/>
-                    </a:lnB>
-                    <a:solidFill>
-                      <a:srgbClr val="FFFFFF"/>
-                    </a:solidFill>
-                  </a:tcPr>
-                </a:tc>
-                <a:tc>
-                  <a:txBody>
-                    <a:bodyPr/>
-                    <a:lstStyle/>
-                    <a:p>
-                      <a:pPr algn="ctr" indent="0" marL="0">
-                        <a:buNone/>
-                      </a:pPr>
-                      <a:r>
-                        <a:rPr lang="en-US" sz="830" dirty="0">
-                          <a:solidFill>
-                            <a:srgbClr val="3A4566"/>
-                          </a:solidFill>
-                          <a:latin typeface="Calibri" pitchFamily="34" charset="0"/>
-                          <a:ea typeface="Calibri" pitchFamily="34" charset="-122"/>
-                          <a:cs typeface="Calibri" pitchFamily="34" charset="-120"/>
-                        </a:rPr>
-                        <a:t>Not confirmed</a:t>
-                      </a:r>
-                      <a:endParaRPr lang="en-US" sz="830" dirty="0">
-                        <a:latin typeface="Calibri" charset="0"/>
-                        <a:ea typeface="Calibri" charset="0"/>
-                        <a:cs typeface="Calibri" charset="0"/>
-                      </a:endParaRPr>
-                    </a:p>
-                  </a:txBody>
-                  <a:tcPr marL="76200" marR="76200" marT="38100" marB="38100" anchor="ctr">
-                    <a:lnL w="9525" cap="flat" cmpd="sng" algn="ctr">
-                      <a:solidFill>
-                        <a:srgbClr val="D7E1F5"/>
-                      </a:solidFill>
-                      <a:prstDash val="solid"/>
-                      <a:round/>
-                      <a:headEnd type="none" w="med" len="med"/>
-                      <a:tailEnd type="none" w="med" len="med"/>
-                    </a:lnL>
-                    <a:lnR w="9525" cap="flat" cmpd="sng" algn="ctr">
-                      <a:solidFill>
-                        <a:srgbClr val="D7E1F5"/>
-                      </a:solidFill>
-                      <a:prstDash val="solid"/>
-                      <a:round/>
-                      <a:headEnd type="none" w="med" len="med"/>
-                      <a:tailEnd type="none" w="med" len="med"/>
-                    </a:lnR>
-                    <a:lnT w="9525" cap="flat" cmpd="sng" algn="ctr">
-                      <a:solidFill>
-                        <a:srgbClr val="D7E1F5"/>
-                      </a:solidFill>
-                      <a:prstDash val="solid"/>
-                      <a:round/>
-                      <a:headEnd type="none" w="med" len="med"/>
-                      <a:tailEnd type="none" w="med" len="med"/>
-                    </a:lnT>
-                    <a:lnB w="9525" cap="flat" cmpd="sng" algn="ctr">
-                      <a:solidFill>
-                        <a:srgbClr val="D7E1F5"/>
-                      </a:solidFill>
-                      <a:prstDash val="solid"/>
-                      <a:round/>
-                      <a:headEnd type="none" w="med" len="med"/>
-                      <a:tailEnd type="none" w="med" len="med"/>
-                    </a:lnB>
-                    <a:solidFill>
-                      <a:srgbClr val="FFFFFF"/>
-                    </a:solidFill>
-                  </a:tcPr>
-                </a:tc>
-                <a:tc>
-                  <a:txBody>
-                    <a:bodyPr/>
-                    <a:lstStyle/>
-                    <a:p>
-                      <a:pPr algn="ctr" indent="0" marL="0">
-                        <a:buNone/>
-                      </a:pPr>
-                      <a:r>
-                        <a:rPr lang="en-US" sz="830" dirty="0">
-                          <a:solidFill>
-                            <a:srgbClr val="3A4566"/>
-                          </a:solidFill>
-                          <a:latin typeface="Calibri" pitchFamily="34" charset="0"/>
-                          <a:ea typeface="Calibri" pitchFamily="34" charset="-122"/>
-                          <a:cs typeface="Calibri" pitchFamily="34" charset="-120"/>
-                        </a:rPr>
-                        <a:t>EY (secondary)</a:t>
-                      </a:r>
-                      <a:endParaRPr lang="en-US" sz="830" dirty="0">
-                        <a:latin typeface="Calibri" charset="0"/>
-                        <a:ea typeface="Calibri" charset="0"/>
-                        <a:cs typeface="Calibri" charset="0"/>
-                      </a:endParaRPr>
-                    </a:p>
-                  </a:txBody>
-                  <a:tcPr marL="76200" marR="76200" marT="38100" marB="38100" anchor="ctr">
-                    <a:lnL w="9525" cap="flat" cmpd="sng" algn="ctr">
-                      <a:solidFill>
-                        <a:srgbClr val="D7E1F5"/>
-                      </a:solidFill>
-                      <a:prstDash val="solid"/>
-                      <a:round/>
-                      <a:headEnd type="none" w="med" len="med"/>
-                      <a:tailEnd type="none" w="med" len="med"/>
-                    </a:lnL>
-                    <a:lnR w="9525" cap="flat" cmpd="sng" algn="ctr">
-                      <a:solidFill>
-                        <a:srgbClr val="D7E1F5"/>
-                      </a:solidFill>
-                      <a:prstDash val="solid"/>
-                      <a:round/>
-                      <a:headEnd type="none" w="med" len="med"/>
-                      <a:tailEnd type="none" w="med" len="med"/>
-                    </a:lnR>
-                    <a:lnT w="9525" cap="flat" cmpd="sng" algn="ctr">
-                      <a:solidFill>
-                        <a:srgbClr val="D7E1F5"/>
-                      </a:solidFill>
-                      <a:prstDash val="solid"/>
-                      <a:round/>
-                      <a:headEnd type="none" w="med" len="med"/>
-                      <a:tailEnd type="none" w="med" len="med"/>
-                    </a:lnT>
-                    <a:lnB w="9525" cap="flat" cmpd="sng" algn="ctr">
-                      <a:solidFill>
-                        <a:srgbClr val="D7E1F5"/>
-                      </a:solidFill>
-                      <a:prstDash val="solid"/>
-                      <a:round/>
-                      <a:headEnd type="none" w="med" len="med"/>
-                      <a:tailEnd type="none" w="med" len="med"/>
-                    </a:lnB>
-                    <a:solidFill>
-                      <a:srgbClr val="FFFFFF"/>
-                    </a:solidFill>
-                  </a:tcPr>
-                </a:tc>
-                <a:tc>
-                  <a:txBody>
-                    <a:bodyPr/>
-                    <a:lstStyle/>
-                    <a:p>
-                      <a:pPr algn="ctr" indent="0" marL="0">
-                        <a:buNone/>
-                      </a:pPr>
-                      <a:r>
-                        <a:rPr lang="en-US" sz="830" dirty="0">
-                          <a:solidFill>
-                            <a:srgbClr val="3A4566"/>
-                          </a:solidFill>
-                          <a:latin typeface="Calibri" pitchFamily="34" charset="0"/>
-                          <a:ea typeface="Calibri" pitchFamily="34" charset="-122"/>
-                          <a:cs typeface="Calibri" pitchFamily="34" charset="-120"/>
-                        </a:rPr>
-                        <a:t>Not confirmed</a:t>
-                      </a:r>
-                      <a:endParaRPr lang="en-US" sz="830" dirty="0">
-                        <a:latin typeface="Calibri" charset="0"/>
-                        <a:ea typeface="Calibri" charset="0"/>
-                        <a:cs typeface="Calibri" charset="0"/>
-                      </a:endParaRPr>
-                    </a:p>
-                  </a:txBody>
-                  <a:tcPr marL="76200" marR="76200" marT="38100" marB="38100" anchor="ctr">
-                    <a:lnL w="9525" cap="flat" cmpd="sng" algn="ctr">
-                      <a:solidFill>
-                        <a:srgbClr val="D7E1F5"/>
-                      </a:solidFill>
-                      <a:prstDash val="solid"/>
-                      <a:round/>
-                      <a:headEnd type="none" w="med" len="med"/>
-                      <a:tailEnd type="none" w="med" len="med"/>
-                    </a:lnL>
-                    <a:lnR w="9525" cap="flat" cmpd="sng" algn="ctr">
-                      <a:solidFill>
-                        <a:srgbClr val="D7E1F5"/>
-                      </a:solidFill>
-                      <a:prstDash val="solid"/>
-                      <a:round/>
-                      <a:headEnd type="none" w="med" len="med"/>
-                      <a:tailEnd type="none" w="med" len="med"/>
-                    </a:lnR>
-                    <a:lnT w="9525" cap="flat" cmpd="sng" algn="ctr">
-                      <a:solidFill>
-                        <a:srgbClr val="D7E1F5"/>
-                      </a:solidFill>
-                      <a:prstDash val="solid"/>
-                      <a:round/>
-                      <a:headEnd type="none" w="med" len="med"/>
-                      <a:tailEnd type="none" w="med" len="med"/>
-                    </a:lnT>
-                    <a:lnB w="9525" cap="flat" cmpd="sng" algn="ctr">
-                      <a:solidFill>
-                        <a:srgbClr val="D7E1F5"/>
-                      </a:solidFill>
-                      <a:prstDash val="solid"/>
-                      <a:round/>
-                      <a:headEnd type="none" w="med" len="med"/>
-                      <a:tailEnd type="none" w="med" len="med"/>
-                    </a:lnB>
-                    <a:solidFill>
-                      <a:srgbClr val="FFFFFF"/>
-                    </a:solidFill>
-                  </a:tcPr>
-                </a:tc>
-                <a:tc>
-                  <a:txBody>
-                    <a:bodyPr/>
-                    <a:lstStyle/>
-                    <a:p>
-                      <a:pPr algn="ctr" indent="0" marL="0">
-                        <a:buNone/>
-                      </a:pPr>
-                      <a:r>
-                        <a:rPr lang="en-US" sz="830" dirty="0">
-                          <a:solidFill>
-                            <a:srgbClr val="3A4566"/>
-                          </a:solidFill>
-                          <a:latin typeface="Calibri" pitchFamily="34" charset="0"/>
-                          <a:ea typeface="Calibri" pitchFamily="34" charset="-122"/>
-                          <a:cs typeface="Calibri" pitchFamily="34" charset="-120"/>
-                        </a:rPr>
-                        <a:t>Not confirmed</a:t>
-                      </a:r>
-                      <a:endParaRPr lang="en-US" sz="830" dirty="0">
-                        <a:latin typeface="Calibri" charset="0"/>
-                        <a:ea typeface="Calibri" charset="0"/>
-                        <a:cs typeface="Calibri" charset="0"/>
-                      </a:endParaRPr>
-                    </a:p>
-                  </a:txBody>
-                  <a:tcPr marL="76200" marR="76200" marT="38100" marB="38100" anchor="ctr">
-                    <a:lnL w="9525" cap="flat" cmpd="sng" algn="ctr">
-                      <a:solidFill>
-                        <a:srgbClr val="D7E1F5"/>
-                      </a:solidFill>
-                      <a:prstDash val="solid"/>
-                      <a:round/>
-                      <a:headEnd type="none" w="med" len="med"/>
-                      <a:tailEnd type="none" w="med" len="med"/>
-                    </a:lnL>
-                    <a:lnR w="9525" cap="flat" cmpd="sng" algn="ctr">
-                      <a:solidFill>
-                        <a:srgbClr val="D7E1F5"/>
-                      </a:solidFill>
-                      <a:prstDash val="solid"/>
-                      <a:round/>
-                      <a:headEnd type="none" w="med" len="med"/>
-                      <a:tailEnd type="none" w="med" len="med"/>
-                    </a:lnR>
-                    <a:lnT w="9525" cap="flat" cmpd="sng" algn="ctr">
-                      <a:solidFill>
-                        <a:srgbClr val="D7E1F5"/>
-                      </a:solidFill>
-                      <a:prstDash val="solid"/>
-                      <a:round/>
-                      <a:headEnd type="none" w="med" len="med"/>
-                      <a:tailEnd type="none" w="med" len="med"/>
-                    </a:lnT>
-                    <a:lnB w="9525" cap="flat" cmpd="sng" algn="ctr">
-                      <a:solidFill>
-                        <a:srgbClr val="D7E1F5"/>
-                      </a:solidFill>
-                      <a:prstDash val="solid"/>
-                      <a:round/>
-                      <a:headEnd type="none" w="med" len="med"/>
-                      <a:tailEnd type="none" w="med" len="med"/>
-                    </a:lnB>
-                    <a:solidFill>
-                      <a:srgbClr val="FFFFFF"/>
-                    </a:solidFill>
-                  </a:tcPr>
-                </a:tc>
-              </a:tr>
-              <a:tr h="0">
-                <a:tc>
-                  <a:txBody>
-                    <a:bodyPr/>
-                    <a:lstStyle/>
-                    <a:p>
-                      <a:pPr algn="l" indent="0" marL="0">
-                        <a:buNone/>
-                      </a:pPr>
-                      <a:r>
-                        <a:rPr lang="en-US" sz="830" b="1" dirty="0">
-                          <a:solidFill>
-                            <a:srgbClr val="1E2761"/>
-                          </a:solidFill>
-                          <a:latin typeface="Calibri" pitchFamily="34" charset="0"/>
-                          <a:ea typeface="Calibri" pitchFamily="34" charset="-122"/>
-                          <a:cs typeface="Calibri" pitchFamily="34" charset="-120"/>
-                        </a:rPr>
                         <a:t>Primary blockchain</a:t>
                       </a:r>
                       <a:endParaRPr lang="en-US" sz="830" dirty="0">
@@ -21410,7 +21888,7 @@
                       <a:tailEnd type="none" w="med" len="med"/>
                     </a:lnB>
                     <a:solidFill>
-                      <a:srgbClr val="F5F8FD"/>
+                      <a:srgbClr val="FFFFFF"/>
                     </a:solidFill>
                   </a:tcPr>
                 </a:tc>
@@ -21478,7 +21956,7 @@
                       <a:tailEnd type="none" w="med" len="med"/>
                     </a:lnB>
                     <a:solidFill>
-                      <a:srgbClr val="F5F8FD"/>
+                      <a:srgbClr val="FFFFFF"/>
                     </a:solidFill>
                   </a:tcPr>
                 </a:tc>
@@ -21546,7 +22024,7 @@
                       <a:tailEnd type="none" w="med" len="med"/>
                     </a:lnB>
                     <a:solidFill>
-                      <a:srgbClr val="F5F8FD"/>
+                      <a:srgbClr val="FFFFFF"/>
                     </a:solidFill>
                   </a:tcPr>
                 </a:tc>
@@ -21614,7 +22092,7 @@
                       <a:tailEnd type="none" w="med" len="med"/>
                     </a:lnB>
                     <a:solidFill>
-                      <a:srgbClr val="F5F8FD"/>
+                      <a:srgbClr val="FFFFFF"/>
                     </a:solidFill>
                   </a:tcPr>
                 </a:tc>
@@ -21682,7 +22160,7 @@
                       <a:tailEnd type="none" w="med" len="med"/>
                     </a:lnB>
                     <a:solidFill>
-                      <a:srgbClr val="F5F8FD"/>
+                      <a:srgbClr val="FFFFFF"/>
                     </a:solidFill>
                   </a:tcPr>
                 </a:tc>
@@ -21750,7 +22228,7 @@
                       <a:tailEnd type="none" w="med" len="med"/>
                     </a:lnB>
                     <a:solidFill>
-                      <a:srgbClr val="F5F8FD"/>
+                      <a:srgbClr val="FFFFFF"/>
                     </a:solidFill>
                   </a:tcPr>
                 </a:tc>
@@ -21818,7 +22296,7 @@
                       <a:tailEnd type="none" w="med" len="med"/>
                     </a:lnB>
                     <a:solidFill>
-                      <a:srgbClr val="F5F8FD"/>
+                      <a:srgbClr val="FFFFFF"/>
                     </a:solidFill>
                   </a:tcPr>
                 </a:tc>
@@ -21888,7 +22366,7 @@
                       <a:tailEnd type="none" w="med" len="med"/>
                     </a:lnB>
                     <a:solidFill>
-                      <a:srgbClr val="FFFFFF"/>
+                      <a:srgbClr val="F5F8FD"/>
                     </a:solidFill>
                   </a:tcPr>
                 </a:tc>
@@ -21956,7 +22434,7 @@
                       <a:tailEnd type="none" w="med" len="med"/>
                     </a:lnB>
                     <a:solidFill>
-                      <a:srgbClr val="FFFFFF"/>
+                      <a:srgbClr val="F5F8FD"/>
                     </a:solidFill>
                   </a:tcPr>
                 </a:tc>
@@ -22024,7 +22502,7 @@
                       <a:tailEnd type="none" w="med" len="med"/>
                     </a:lnB>
                     <a:solidFill>
-                      <a:srgbClr val="FFFFFF"/>
+                      <a:srgbClr val="F5F8FD"/>
                     </a:solidFill>
                   </a:tcPr>
                 </a:tc>
@@ -22092,7 +22570,7 @@
                       <a:tailEnd type="none" w="med" len="med"/>
                     </a:lnB>
                     <a:solidFill>
-                      <a:srgbClr val="FFFFFF"/>
+                      <a:srgbClr val="F5F8FD"/>
                     </a:solidFill>
                   </a:tcPr>
                 </a:tc>
@@ -22160,7 +22638,7 @@
                       <a:tailEnd type="none" w="med" len="med"/>
                     </a:lnB>
                     <a:solidFill>
-                      <a:srgbClr val="FFFFFF"/>
+                      <a:srgbClr val="F5F8FD"/>
                     </a:solidFill>
                   </a:tcPr>
                 </a:tc>
@@ -22228,7 +22706,7 @@
                       <a:tailEnd type="none" w="med" len="med"/>
                     </a:lnB>
                     <a:solidFill>
-                      <a:srgbClr val="FFFFFF"/>
+                      <a:srgbClr val="F5F8FD"/>
                     </a:solidFill>
                   </a:tcPr>
                 </a:tc>
@@ -22296,7 +22774,7 @@
                       <a:tailEnd type="none" w="med" len="med"/>
                     </a:lnB>
                     <a:solidFill>
-                      <a:srgbClr val="FFFFFF"/>
+                      <a:srgbClr val="F5F8FD"/>
                     </a:solidFill>
                   </a:tcPr>
                 </a:tc>
@@ -22366,7 +22844,7 @@
                       <a:tailEnd type="none" w="med" len="med"/>
                     </a:lnB>
                     <a:solidFill>
-                      <a:srgbClr val="F5F8FD"/>
+                      <a:srgbClr val="FFFFFF"/>
                     </a:solidFill>
                   </a:tcPr>
                 </a:tc>
@@ -22434,7 +22912,7 @@
                       <a:tailEnd type="none" w="med" len="med"/>
                     </a:lnB>
                     <a:solidFill>
-                      <a:srgbClr val="F5F8FD"/>
+                      <a:srgbClr val="FFFFFF"/>
                     </a:solidFill>
                   </a:tcPr>
                 </a:tc>
@@ -22502,7 +22980,7 @@
                       <a:tailEnd type="none" w="med" len="med"/>
                     </a:lnB>
                     <a:solidFill>
-                      <a:srgbClr val="F5F8FD"/>
+                      <a:srgbClr val="FFFFFF"/>
                     </a:solidFill>
                   </a:tcPr>
                 </a:tc>
@@ -22570,7 +23048,7 @@
                       <a:tailEnd type="none" w="med" len="med"/>
                     </a:lnB>
                     <a:solidFill>
-                      <a:srgbClr val="F5F8FD"/>
+                      <a:srgbClr val="FFFFFF"/>
                     </a:solidFill>
                   </a:tcPr>
                 </a:tc>
@@ -22638,7 +23116,7 @@
                       <a:tailEnd type="none" w="med" len="med"/>
                     </a:lnB>
                     <a:solidFill>
-                      <a:srgbClr val="F5F8FD"/>
+                      <a:srgbClr val="FFFFFF"/>
                     </a:solidFill>
                   </a:tcPr>
                 </a:tc>
@@ -22706,7 +23184,7 @@
                       <a:tailEnd type="none" w="med" len="med"/>
                     </a:lnB>
                     <a:solidFill>
-                      <a:srgbClr val="F5F8FD"/>
+                      <a:srgbClr val="FFFFFF"/>
                     </a:solidFill>
                   </a:tcPr>
                 </a:tc>
@@ -22774,7 +23252,7 @@
                       <a:tailEnd type="none" w="med" len="med"/>
                     </a:lnB>
                     <a:solidFill>
-                      <a:srgbClr val="F5F8FD"/>
+                      <a:srgbClr val="FFFFFF"/>
                     </a:solidFill>
                   </a:tcPr>
                 </a:tc>
@@ -22844,7 +23322,7 @@
                       <a:tailEnd type="none" w="med" len="med"/>
                     </a:lnB>
                     <a:solidFill>
-                      <a:srgbClr val="FFFFFF"/>
+                      <a:srgbClr val="F5F8FD"/>
                     </a:solidFill>
                   </a:tcPr>
                 </a:tc>
@@ -22912,7 +23390,7 @@
                       <a:tailEnd type="none" w="med" len="med"/>
                     </a:lnB>
                     <a:solidFill>
-                      <a:srgbClr val="FFFFFF"/>
+                      <a:srgbClr val="F5F8FD"/>
                     </a:solidFill>
                   </a:tcPr>
                 </a:tc>
@@ -22980,7 +23458,7 @@
                       <a:tailEnd type="none" w="med" len="med"/>
                     </a:lnB>
                     <a:solidFill>
-                      <a:srgbClr val="FFFFFF"/>
+                      <a:srgbClr val="F5F8FD"/>
                     </a:solidFill>
                   </a:tcPr>
                 </a:tc>
@@ -23048,7 +23526,7 @@
                       <a:tailEnd type="none" w="med" len="med"/>
                     </a:lnB>
                     <a:solidFill>
-                      <a:srgbClr val="FFFFFF"/>
+                      <a:srgbClr val="F5F8FD"/>
                     </a:solidFill>
                   </a:tcPr>
                 </a:tc>
@@ -23116,7 +23594,7 @@
                       <a:tailEnd type="none" w="med" len="med"/>
                     </a:lnB>
                     <a:solidFill>
-                      <a:srgbClr val="FFFFFF"/>
+                      <a:srgbClr val="F5F8FD"/>
                     </a:solidFill>
                   </a:tcPr>
                 </a:tc>
@@ -23184,7 +23662,7 @@
                       <a:tailEnd type="none" w="med" len="med"/>
                     </a:lnB>
                     <a:solidFill>
-                      <a:srgbClr val="FFFFFF"/>
+                      <a:srgbClr val="F5F8FD"/>
                     </a:solidFill>
                   </a:tcPr>
                 </a:tc>
@@ -23252,7 +23730,7 @@
                       <a:tailEnd type="none" w="med" len="med"/>
                     </a:lnB>
                     <a:solidFill>
-                      <a:srgbClr val="FFFFFF"/>
+                      <a:srgbClr val="F5F8FD"/>
                     </a:solidFill>
                   </a:tcPr>
                 </a:tc>

--- a/docs/presentations/Tokenized_Funds_Comparative_Analysis.pptx
+++ b/docs/presentations/Tokenized_Funds_Comparative_Analysis.pptx
@@ -18973,6 +18973,484 @@
                           <a:ea typeface="Calibri" pitchFamily="34" charset="-122"/>
                           <a:cs typeface="Calibri" pitchFamily="34" charset="-120"/>
                         </a:rPr>
+                        <a:t>Taxation (manager's role)</a:t>
+                      </a:r>
+                      <a:endParaRPr lang="en-US" sz="830" dirty="0">
+                        <a:latin typeface="Calibri" charset="0"/>
+                        <a:ea typeface="Calibri" charset="0"/>
+                        <a:cs typeface="Calibri" charset="0"/>
+                      </a:endParaRPr>
+                    </a:p>
+                  </a:txBody>
+                  <a:tcPr marL="76200" marR="76200" marT="38100" marB="38100" anchor="ctr">
+                    <a:lnL w="9525" cap="flat" cmpd="sng" algn="ctr">
+                      <a:solidFill>
+                        <a:srgbClr val="D7E1F5"/>
+                      </a:solidFill>
+                      <a:prstDash val="solid"/>
+                      <a:round/>
+                      <a:headEnd type="none" w="med" len="med"/>
+                      <a:tailEnd type="none" w="med" len="med"/>
+                    </a:lnL>
+                    <a:lnR w="9525" cap="flat" cmpd="sng" algn="ctr">
+                      <a:solidFill>
+                        <a:srgbClr val="D7E1F5"/>
+                      </a:solidFill>
+                      <a:prstDash val="solid"/>
+                      <a:round/>
+                      <a:headEnd type="none" w="med" len="med"/>
+                      <a:tailEnd type="none" w="med" len="med"/>
+                    </a:lnR>
+                    <a:lnT w="9525" cap="flat" cmpd="sng" algn="ctr">
+                      <a:solidFill>
+                        <a:srgbClr val="D7E1F5"/>
+                      </a:solidFill>
+                      <a:prstDash val="solid"/>
+                      <a:round/>
+                      <a:headEnd type="none" w="med" len="med"/>
+                      <a:tailEnd type="none" w="med" len="med"/>
+                    </a:lnT>
+                    <a:lnB w="9525" cap="flat" cmpd="sng" algn="ctr">
+                      <a:solidFill>
+                        <a:srgbClr val="D7E1F5"/>
+                      </a:solidFill>
+                      <a:prstDash val="solid"/>
+                      <a:round/>
+                      <a:headEnd type="none" w="med" len="med"/>
+                      <a:tailEnd type="none" w="med" len="med"/>
+                    </a:lnB>
+                    <a:solidFill>
+                      <a:srgbClr val="FFFFFF"/>
+                    </a:solidFill>
+                  </a:tcPr>
+                </a:tc>
+                <a:tc>
+                  <a:txBody>
+                    <a:bodyPr/>
+                    <a:lstStyle/>
+                    <a:p>
+                      <a:pPr algn="ctr" indent="0" marL="0">
+                        <a:buNone/>
+                      </a:pPr>
+                      <a:r>
+                        <a:rPr lang="en-US" sz="830" dirty="0">
+                          <a:solidFill>
+                            <a:srgbClr val="3A4566"/>
+                          </a:solidFill>
+                          <a:latin typeface="Calibri" pitchFamily="34" charset="0"/>
+                          <a:ea typeface="Calibri" pitchFamily="34" charset="-122"/>
+                          <a:cs typeface="Calibri" pitchFamily="34" charset="-120"/>
+                        </a:rPr>
+                        <a:t>RIC — issues 1099-DIV</a:t>
+                      </a:r>
+                      <a:endParaRPr lang="en-US" sz="830" dirty="0">
+                        <a:latin typeface="Calibri" charset="0"/>
+                        <a:ea typeface="Calibri" charset="0"/>
+                        <a:cs typeface="Calibri" charset="0"/>
+                      </a:endParaRPr>
+                    </a:p>
+                  </a:txBody>
+                  <a:tcPr marL="76200" marR="76200" marT="38100" marB="38100" anchor="ctr">
+                    <a:lnL w="9525" cap="flat" cmpd="sng" algn="ctr">
+                      <a:solidFill>
+                        <a:srgbClr val="D7E1F5"/>
+                      </a:solidFill>
+                      <a:prstDash val="solid"/>
+                      <a:round/>
+                      <a:headEnd type="none" w="med" len="med"/>
+                      <a:tailEnd type="none" w="med" len="med"/>
+                    </a:lnL>
+                    <a:lnR w="9525" cap="flat" cmpd="sng" algn="ctr">
+                      <a:solidFill>
+                        <a:srgbClr val="D7E1F5"/>
+                      </a:solidFill>
+                      <a:prstDash val="solid"/>
+                      <a:round/>
+                      <a:headEnd type="none" w="med" len="med"/>
+                      <a:tailEnd type="none" w="med" len="med"/>
+                    </a:lnR>
+                    <a:lnT w="9525" cap="flat" cmpd="sng" algn="ctr">
+                      <a:solidFill>
+                        <a:srgbClr val="D7E1F5"/>
+                      </a:solidFill>
+                      <a:prstDash val="solid"/>
+                      <a:round/>
+                      <a:headEnd type="none" w="med" len="med"/>
+                      <a:tailEnd type="none" w="med" len="med"/>
+                    </a:lnT>
+                    <a:lnB w="9525" cap="flat" cmpd="sng" algn="ctr">
+                      <a:solidFill>
+                        <a:srgbClr val="D7E1F5"/>
+                      </a:solidFill>
+                      <a:prstDash val="solid"/>
+                      <a:round/>
+                      <a:headEnd type="none" w="med" len="med"/>
+                      <a:tailEnd type="none" w="med" len="med"/>
+                    </a:lnB>
+                    <a:solidFill>
+                      <a:srgbClr val="FFFFFF"/>
+                    </a:solidFill>
+                  </a:tcPr>
+                </a:tc>
+                <a:tc>
+                  <a:txBody>
+                    <a:bodyPr/>
+                    <a:lstStyle/>
+                    <a:p>
+                      <a:pPr algn="ctr" indent="0" marL="0">
+                        <a:buNone/>
+                      </a:pPr>
+                      <a:r>
+                        <a:rPr lang="en-US" sz="830" dirty="0">
+                          <a:solidFill>
+                            <a:srgbClr val="3A4566"/>
+                          </a:solidFill>
+                          <a:latin typeface="Calibri" pitchFamily="34" charset="0"/>
+                          <a:ea typeface="Calibri" pitchFamily="34" charset="-122"/>
+                          <a:cs typeface="Calibri" pitchFamily="34" charset="-120"/>
+                        </a:rPr>
+                        <a:t>PFIC — issues PFIC statement</a:t>
+                      </a:r>
+                      <a:endParaRPr lang="en-US" sz="830" dirty="0">
+                        <a:latin typeface="Calibri" charset="0"/>
+                        <a:ea typeface="Calibri" charset="0"/>
+                        <a:cs typeface="Calibri" charset="0"/>
+                      </a:endParaRPr>
+                    </a:p>
+                  </a:txBody>
+                  <a:tcPr marL="76200" marR="76200" marT="38100" marB="38100" anchor="ctr">
+                    <a:lnL w="9525" cap="flat" cmpd="sng" algn="ctr">
+                      <a:solidFill>
+                        <a:srgbClr val="D7E1F5"/>
+                      </a:solidFill>
+                      <a:prstDash val="solid"/>
+                      <a:round/>
+                      <a:headEnd type="none" w="med" len="med"/>
+                      <a:tailEnd type="none" w="med" len="med"/>
+                    </a:lnL>
+                    <a:lnR w="9525" cap="flat" cmpd="sng" algn="ctr">
+                      <a:solidFill>
+                        <a:srgbClr val="D7E1F5"/>
+                      </a:solidFill>
+                      <a:prstDash val="solid"/>
+                      <a:round/>
+                      <a:headEnd type="none" w="med" len="med"/>
+                      <a:tailEnd type="none" w="med" len="med"/>
+                    </a:lnR>
+                    <a:lnT w="9525" cap="flat" cmpd="sng" algn="ctr">
+                      <a:solidFill>
+                        <a:srgbClr val="D7E1F5"/>
+                      </a:solidFill>
+                      <a:prstDash val="solid"/>
+                      <a:round/>
+                      <a:headEnd type="none" w="med" len="med"/>
+                      <a:tailEnd type="none" w="med" len="med"/>
+                    </a:lnT>
+                    <a:lnB w="9525" cap="flat" cmpd="sng" algn="ctr">
+                      <a:solidFill>
+                        <a:srgbClr val="D7E1F5"/>
+                      </a:solidFill>
+                      <a:prstDash val="solid"/>
+                      <a:round/>
+                      <a:headEnd type="none" w="med" len="med"/>
+                      <a:tailEnd type="none" w="med" len="med"/>
+                    </a:lnB>
+                    <a:solidFill>
+                      <a:srgbClr val="FFFFFF"/>
+                    </a:solidFill>
+                  </a:tcPr>
+                </a:tc>
+                <a:tc>
+                  <a:txBody>
+                    <a:bodyPr/>
+                    <a:lstStyle/>
+                    <a:p>
+                      <a:pPr algn="ctr" indent="0" marL="0">
+                        <a:buNone/>
+                      </a:pPr>
+                      <a:r>
+                        <a:rPr lang="en-US" sz="830" dirty="0">
+                          <a:solidFill>
+                            <a:srgbClr val="3A4566"/>
+                          </a:solidFill>
+                          <a:latin typeface="Calibri" pitchFamily="34" charset="0"/>
+                          <a:ea typeface="Calibri" pitchFamily="34" charset="-122"/>
+                          <a:cs typeface="Calibri" pitchFamily="34" charset="-120"/>
+                        </a:rPr>
+                        <a:t>Partnership — issues K-1</a:t>
+                      </a:r>
+                      <a:endParaRPr lang="en-US" sz="830" dirty="0">
+                        <a:latin typeface="Calibri" charset="0"/>
+                        <a:ea typeface="Calibri" charset="0"/>
+                        <a:cs typeface="Calibri" charset="0"/>
+                      </a:endParaRPr>
+                    </a:p>
+                  </a:txBody>
+                  <a:tcPr marL="76200" marR="76200" marT="38100" marB="38100" anchor="ctr">
+                    <a:lnL w="9525" cap="flat" cmpd="sng" algn="ctr">
+                      <a:solidFill>
+                        <a:srgbClr val="D7E1F5"/>
+                      </a:solidFill>
+                      <a:prstDash val="solid"/>
+                      <a:round/>
+                      <a:headEnd type="none" w="med" len="med"/>
+                      <a:tailEnd type="none" w="med" len="med"/>
+                    </a:lnL>
+                    <a:lnR w="9525" cap="flat" cmpd="sng" algn="ctr">
+                      <a:solidFill>
+                        <a:srgbClr val="D7E1F5"/>
+                      </a:solidFill>
+                      <a:prstDash val="solid"/>
+                      <a:round/>
+                      <a:headEnd type="none" w="med" len="med"/>
+                      <a:tailEnd type="none" w="med" len="med"/>
+                    </a:lnR>
+                    <a:lnT w="9525" cap="flat" cmpd="sng" algn="ctr">
+                      <a:solidFill>
+                        <a:srgbClr val="D7E1F5"/>
+                      </a:solidFill>
+                      <a:prstDash val="solid"/>
+                      <a:round/>
+                      <a:headEnd type="none" w="med" len="med"/>
+                      <a:tailEnd type="none" w="med" len="med"/>
+                    </a:lnT>
+                    <a:lnB w="9525" cap="flat" cmpd="sng" algn="ctr">
+                      <a:solidFill>
+                        <a:srgbClr val="D7E1F5"/>
+                      </a:solidFill>
+                      <a:prstDash val="solid"/>
+                      <a:round/>
+                      <a:headEnd type="none" w="med" len="med"/>
+                      <a:tailEnd type="none" w="med" len="med"/>
+                    </a:lnB>
+                    <a:solidFill>
+                      <a:srgbClr val="FFFFFF"/>
+                    </a:solidFill>
+                  </a:tcPr>
+                </a:tc>
+                <a:tc>
+                  <a:txBody>
+                    <a:bodyPr/>
+                    <a:lstStyle/>
+                    <a:p>
+                      <a:pPr algn="ctr" indent="0" marL="0">
+                        <a:buNone/>
+                      </a:pPr>
+                      <a:r>
+                        <a:rPr lang="en-US" sz="830" dirty="0">
+                          <a:solidFill>
+                            <a:srgbClr val="3A4566"/>
+                          </a:solidFill>
+                          <a:latin typeface="Calibri" pitchFamily="34" charset="0"/>
+                          <a:ea typeface="Calibri" pitchFamily="34" charset="-122"/>
+                          <a:cs typeface="Calibri" pitchFamily="34" charset="-120"/>
+                        </a:rPr>
+                        <a:t>Partnership — issues K-1</a:t>
+                      </a:r>
+                      <a:endParaRPr lang="en-US" sz="830" dirty="0">
+                        <a:latin typeface="Calibri" charset="0"/>
+                        <a:ea typeface="Calibri" charset="0"/>
+                        <a:cs typeface="Calibri" charset="0"/>
+                      </a:endParaRPr>
+                    </a:p>
+                  </a:txBody>
+                  <a:tcPr marL="76200" marR="76200" marT="38100" marB="38100" anchor="ctr">
+                    <a:lnL w="9525" cap="flat" cmpd="sng" algn="ctr">
+                      <a:solidFill>
+                        <a:srgbClr val="D7E1F5"/>
+                      </a:solidFill>
+                      <a:prstDash val="solid"/>
+                      <a:round/>
+                      <a:headEnd type="none" w="med" len="med"/>
+                      <a:tailEnd type="none" w="med" len="med"/>
+                    </a:lnL>
+                    <a:lnR w="9525" cap="flat" cmpd="sng" algn="ctr">
+                      <a:solidFill>
+                        <a:srgbClr val="D7E1F5"/>
+                      </a:solidFill>
+                      <a:prstDash val="solid"/>
+                      <a:round/>
+                      <a:headEnd type="none" w="med" len="med"/>
+                      <a:tailEnd type="none" w="med" len="med"/>
+                    </a:lnR>
+                    <a:lnT w="9525" cap="flat" cmpd="sng" algn="ctr">
+                      <a:solidFill>
+                        <a:srgbClr val="D7E1F5"/>
+                      </a:solidFill>
+                      <a:prstDash val="solid"/>
+                      <a:round/>
+                      <a:headEnd type="none" w="med" len="med"/>
+                      <a:tailEnd type="none" w="med" len="med"/>
+                    </a:lnT>
+                    <a:lnB w="9525" cap="flat" cmpd="sng" algn="ctr">
+                      <a:solidFill>
+                        <a:srgbClr val="D7E1F5"/>
+                      </a:solidFill>
+                      <a:prstDash val="solid"/>
+                      <a:round/>
+                      <a:headEnd type="none" w="med" len="med"/>
+                      <a:tailEnd type="none" w="med" len="med"/>
+                    </a:lnB>
+                    <a:solidFill>
+                      <a:srgbClr val="FFFFFF"/>
+                    </a:solidFill>
+                  </a:tcPr>
+                </a:tc>
+                <a:tc>
+                  <a:txBody>
+                    <a:bodyPr/>
+                    <a:lstStyle/>
+                    <a:p>
+                      <a:pPr algn="ctr" indent="0" marL="0">
+                        <a:buNone/>
+                      </a:pPr>
+                      <a:r>
+                        <a:rPr lang="en-US" sz="830" dirty="0">
+                          <a:solidFill>
+                            <a:srgbClr val="3A4566"/>
+                          </a:solidFill>
+                          <a:latin typeface="Calibri" pitchFamily="34" charset="0"/>
+                          <a:ea typeface="Calibri" pitchFamily="34" charset="-122"/>
+                          <a:cs typeface="Calibri" pitchFamily="34" charset="-120"/>
+                        </a:rPr>
+                        <a:t>Partnership (inferred) — K-1</a:t>
+                      </a:r>
+                      <a:endParaRPr lang="en-US" sz="830" dirty="0">
+                        <a:latin typeface="Calibri" charset="0"/>
+                        <a:ea typeface="Calibri" charset="0"/>
+                        <a:cs typeface="Calibri" charset="0"/>
+                      </a:endParaRPr>
+                    </a:p>
+                  </a:txBody>
+                  <a:tcPr marL="76200" marR="76200" marT="38100" marB="38100" anchor="ctr">
+                    <a:lnL w="9525" cap="flat" cmpd="sng" algn="ctr">
+                      <a:solidFill>
+                        <a:srgbClr val="D7E1F5"/>
+                      </a:solidFill>
+                      <a:prstDash val="solid"/>
+                      <a:round/>
+                      <a:headEnd type="none" w="med" len="med"/>
+                      <a:tailEnd type="none" w="med" len="med"/>
+                    </a:lnL>
+                    <a:lnR w="9525" cap="flat" cmpd="sng" algn="ctr">
+                      <a:solidFill>
+                        <a:srgbClr val="D7E1F5"/>
+                      </a:solidFill>
+                      <a:prstDash val="solid"/>
+                      <a:round/>
+                      <a:headEnd type="none" w="med" len="med"/>
+                      <a:tailEnd type="none" w="med" len="med"/>
+                    </a:lnR>
+                    <a:lnT w="9525" cap="flat" cmpd="sng" algn="ctr">
+                      <a:solidFill>
+                        <a:srgbClr val="D7E1F5"/>
+                      </a:solidFill>
+                      <a:prstDash val="solid"/>
+                      <a:round/>
+                      <a:headEnd type="none" w="med" len="med"/>
+                      <a:tailEnd type="none" w="med" len="med"/>
+                    </a:lnT>
+                    <a:lnB w="9525" cap="flat" cmpd="sng" algn="ctr">
+                      <a:solidFill>
+                        <a:srgbClr val="D7E1F5"/>
+                      </a:solidFill>
+                      <a:prstDash val="solid"/>
+                      <a:round/>
+                      <a:headEnd type="none" w="med" len="med"/>
+                      <a:tailEnd type="none" w="med" len="med"/>
+                    </a:lnB>
+                    <a:solidFill>
+                      <a:srgbClr val="FFFFFF"/>
+                    </a:solidFill>
+                  </a:tcPr>
+                </a:tc>
+                <a:tc>
+                  <a:txBody>
+                    <a:bodyPr/>
+                    <a:lstStyle/>
+                    <a:p>
+                      <a:pPr algn="ctr" indent="0" marL="0">
+                        <a:buNone/>
+                      </a:pPr>
+                      <a:r>
+                        <a:rPr lang="en-US" sz="830" dirty="0">
+                          <a:solidFill>
+                            <a:srgbClr val="3A4566"/>
+                          </a:solidFill>
+                          <a:latin typeface="Calibri" pitchFamily="34" charset="0"/>
+                          <a:ea typeface="Calibri" pitchFamily="34" charset="-122"/>
+                          <a:cs typeface="Calibri" pitchFamily="34" charset="-120"/>
+                        </a:rPr>
+                        <a:t>Likely RIC — 1099-DIV (unconfirmed)</a:t>
+                      </a:r>
+                      <a:endParaRPr lang="en-US" sz="830" dirty="0">
+                        <a:latin typeface="Calibri" charset="0"/>
+                        <a:ea typeface="Calibri" charset="0"/>
+                        <a:cs typeface="Calibri" charset="0"/>
+                      </a:endParaRPr>
+                    </a:p>
+                  </a:txBody>
+                  <a:tcPr marL="76200" marR="76200" marT="38100" marB="38100" anchor="ctr">
+                    <a:lnL w="9525" cap="flat" cmpd="sng" algn="ctr">
+                      <a:solidFill>
+                        <a:srgbClr val="D7E1F5"/>
+                      </a:solidFill>
+                      <a:prstDash val="solid"/>
+                      <a:round/>
+                      <a:headEnd type="none" w="med" len="med"/>
+                      <a:tailEnd type="none" w="med" len="med"/>
+                    </a:lnL>
+                    <a:lnR w="9525" cap="flat" cmpd="sng" algn="ctr">
+                      <a:solidFill>
+                        <a:srgbClr val="D7E1F5"/>
+                      </a:solidFill>
+                      <a:prstDash val="solid"/>
+                      <a:round/>
+                      <a:headEnd type="none" w="med" len="med"/>
+                      <a:tailEnd type="none" w="med" len="med"/>
+                    </a:lnR>
+                    <a:lnT w="9525" cap="flat" cmpd="sng" algn="ctr">
+                      <a:solidFill>
+                        <a:srgbClr val="D7E1F5"/>
+                      </a:solidFill>
+                      <a:prstDash val="solid"/>
+                      <a:round/>
+                      <a:headEnd type="none" w="med" len="med"/>
+                      <a:tailEnd type="none" w="med" len="med"/>
+                    </a:lnT>
+                    <a:lnB w="9525" cap="flat" cmpd="sng" algn="ctr">
+                      <a:solidFill>
+                        <a:srgbClr val="D7E1F5"/>
+                      </a:solidFill>
+                      <a:prstDash val="solid"/>
+                      <a:round/>
+                      <a:headEnd type="none" w="med" len="med"/>
+                      <a:tailEnd type="none" w="med" len="med"/>
+                    </a:lnB>
+                    <a:solidFill>
+                      <a:srgbClr val="FFFFFF"/>
+                    </a:solidFill>
+                  </a:tcPr>
+                </a:tc>
+              </a:tr>
+              <a:tr h="0">
+                <a:tc>
+                  <a:txBody>
+                    <a:bodyPr/>
+                    <a:lstStyle/>
+                    <a:p>
+                      <a:pPr algn="l" indent="0" marL="0">
+                        <a:buNone/>
+                      </a:pPr>
+                      <a:r>
+                        <a:rPr lang="en-US" sz="830" b="1" dirty="0">
+                          <a:solidFill>
+                            <a:srgbClr val="1E2761"/>
+                          </a:solidFill>
+                          <a:latin typeface="Calibri" pitchFamily="34" charset="0"/>
+                          <a:ea typeface="Calibri" pitchFamily="34" charset="-122"/>
+                          <a:cs typeface="Calibri" pitchFamily="34" charset="-120"/>
+                        </a:rPr>
                         <a:t>Eligible investors</a:t>
                       </a:r>
                       <a:endParaRPr lang="en-US" sz="830" dirty="0">
@@ -19020,7 +19498,7 @@
                       <a:tailEnd type="none" w="med" len="med"/>
                     </a:lnB>
                     <a:solidFill>
-                      <a:srgbClr val="FFFFFF"/>
+                      <a:srgbClr val="F5F8FD"/>
                     </a:solidFill>
                   </a:tcPr>
                 </a:tc>
@@ -19088,7 +19566,7 @@
                       <a:tailEnd type="none" w="med" len="med"/>
                     </a:lnB>
                     <a:solidFill>
-                      <a:srgbClr val="FFFFFF"/>
+                      <a:srgbClr val="F5F8FD"/>
                     </a:solidFill>
                   </a:tcPr>
                 </a:tc>
@@ -19156,7 +19634,7 @@
                       <a:tailEnd type="none" w="med" len="med"/>
                     </a:lnB>
                     <a:solidFill>
-                      <a:srgbClr val="FFFFFF"/>
+                      <a:srgbClr val="F5F8FD"/>
                     </a:solidFill>
                   </a:tcPr>
                 </a:tc>
@@ -19224,7 +19702,7 @@
                       <a:tailEnd type="none" w="med" len="med"/>
                     </a:lnB>
                     <a:solidFill>
-                      <a:srgbClr val="FFFFFF"/>
+                      <a:srgbClr val="F5F8FD"/>
                     </a:solidFill>
                   </a:tcPr>
                 </a:tc>
@@ -19292,7 +19770,7 @@
                       <a:tailEnd type="none" w="med" len="med"/>
                     </a:lnB>
                     <a:solidFill>
-                      <a:srgbClr val="FFFFFF"/>
+                      <a:srgbClr val="F5F8FD"/>
                     </a:solidFill>
                   </a:tcPr>
                 </a:tc>
@@ -19360,7 +19838,7 @@
                       <a:tailEnd type="none" w="med" len="med"/>
                     </a:lnB>
                     <a:solidFill>
-                      <a:srgbClr val="FFFFFF"/>
+                      <a:srgbClr val="F5F8FD"/>
                     </a:solidFill>
                   </a:tcPr>
                 </a:tc>
@@ -19428,7 +19906,7 @@
                       <a:tailEnd type="none" w="med" len="med"/>
                     </a:lnB>
                     <a:solidFill>
-                      <a:srgbClr val="FFFFFF"/>
+                      <a:srgbClr val="F5F8FD"/>
                     </a:solidFill>
                   </a:tcPr>
                 </a:tc>
@@ -19498,7 +19976,7 @@
                       <a:tailEnd type="none" w="med" len="med"/>
                     </a:lnB>
                     <a:solidFill>
-                      <a:srgbClr val="F5F8FD"/>
+                      <a:srgbClr val="FFFFFF"/>
                     </a:solidFill>
                   </a:tcPr>
                 </a:tc>
@@ -19566,7 +20044,7 @@
                       <a:tailEnd type="none" w="med" len="med"/>
                     </a:lnB>
                     <a:solidFill>
-                      <a:srgbClr val="F5F8FD"/>
+                      <a:srgbClr val="FFFFFF"/>
                     </a:solidFill>
                   </a:tcPr>
                 </a:tc>
@@ -19634,7 +20112,7 @@
                       <a:tailEnd type="none" w="med" len="med"/>
                     </a:lnB>
                     <a:solidFill>
-                      <a:srgbClr val="F5F8FD"/>
+                      <a:srgbClr val="FFFFFF"/>
                     </a:solidFill>
                   </a:tcPr>
                 </a:tc>
@@ -19702,7 +20180,7 @@
                       <a:tailEnd type="none" w="med" len="med"/>
                     </a:lnB>
                     <a:solidFill>
-                      <a:srgbClr val="F5F8FD"/>
+                      <a:srgbClr val="FFFFFF"/>
                     </a:solidFill>
                   </a:tcPr>
                 </a:tc>
@@ -19770,7 +20248,7 @@
                       <a:tailEnd type="none" w="med" len="med"/>
                     </a:lnB>
                     <a:solidFill>
-                      <a:srgbClr val="F5F8FD"/>
+                      <a:srgbClr val="FFFFFF"/>
                     </a:solidFill>
                   </a:tcPr>
                 </a:tc>
@@ -19838,7 +20316,7 @@
                       <a:tailEnd type="none" w="med" len="med"/>
                     </a:lnB>
                     <a:solidFill>
-                      <a:srgbClr val="F5F8FD"/>
+                      <a:srgbClr val="FFFFFF"/>
                     </a:solidFill>
                   </a:tcPr>
                 </a:tc>
@@ -19906,7 +20384,7 @@
                       <a:tailEnd type="none" w="med" len="med"/>
                     </a:lnB>
                     <a:solidFill>
-                      <a:srgbClr val="F5F8FD"/>
+                      <a:srgbClr val="FFFFFF"/>
                     </a:solidFill>
                   </a:tcPr>
                 </a:tc>
@@ -19976,7 +20454,7 @@
                       <a:tailEnd type="none" w="med" len="med"/>
                     </a:lnB>
                     <a:solidFill>
-                      <a:srgbClr val="FFFFFF"/>
+                      <a:srgbClr val="F5F8FD"/>
                     </a:solidFill>
                   </a:tcPr>
                 </a:tc>
@@ -20044,7 +20522,7 @@
                       <a:tailEnd type="none" w="med" len="med"/>
                     </a:lnB>
                     <a:solidFill>
-                      <a:srgbClr val="FFFFFF"/>
+                      <a:srgbClr val="F5F8FD"/>
                     </a:solidFill>
                   </a:tcPr>
                 </a:tc>
@@ -20112,7 +20590,7 @@
                       <a:tailEnd type="none" w="med" len="med"/>
                     </a:lnB>
                     <a:solidFill>
-                      <a:srgbClr val="FFFFFF"/>
+                      <a:srgbClr val="F5F8FD"/>
                     </a:solidFill>
                   </a:tcPr>
                 </a:tc>
@@ -20180,7 +20658,7 @@
                       <a:tailEnd type="none" w="med" len="med"/>
                     </a:lnB>
                     <a:solidFill>
-                      <a:srgbClr val="FFFFFF"/>
+                      <a:srgbClr val="F5F8FD"/>
                     </a:solidFill>
                   </a:tcPr>
                 </a:tc>
@@ -20248,7 +20726,7 @@
                       <a:tailEnd type="none" w="med" len="med"/>
                     </a:lnB>
                     <a:solidFill>
-                      <a:srgbClr val="FFFFFF"/>
+                      <a:srgbClr val="F5F8FD"/>
                     </a:solidFill>
                   </a:tcPr>
                 </a:tc>
@@ -20316,7 +20794,7 @@
                       <a:tailEnd type="none" w="med" len="med"/>
                     </a:lnB>
                     <a:solidFill>
-                      <a:srgbClr val="FFFFFF"/>
+                      <a:srgbClr val="F5F8FD"/>
                     </a:solidFill>
                   </a:tcPr>
                 </a:tc>
@@ -20384,7 +20862,7 @@
                       <a:tailEnd type="none" w="med" len="med"/>
                     </a:lnB>
                     <a:solidFill>
-                      <a:srgbClr val="FFFFFF"/>
+                      <a:srgbClr val="F5F8FD"/>
                     </a:solidFill>
                   </a:tcPr>
                 </a:tc>
@@ -20454,6 +20932,484 @@
                       <a:tailEnd type="none" w="med" len="med"/>
                     </a:lnB>
                     <a:solidFill>
+                      <a:srgbClr val="FFFFFF"/>
+                    </a:solidFill>
+                  </a:tcPr>
+                </a:tc>
+                <a:tc>
+                  <a:txBody>
+                    <a:bodyPr/>
+                    <a:lstStyle/>
+                    <a:p>
+                      <a:pPr algn="ctr" indent="0" marL="0">
+                        <a:buNone/>
+                      </a:pPr>
+                      <a:r>
+                        <a:rPr lang="en-US" sz="830" dirty="0">
+                          <a:solidFill>
+                            <a:srgbClr val="3A4566"/>
+                          </a:solidFill>
+                          <a:latin typeface="Calibri" pitchFamily="34" charset="0"/>
+                          <a:ea typeface="Calibri" pitchFamily="34" charset="-122"/>
+                          <a:cs typeface="Calibri" pitchFamily="34" charset="-120"/>
+                        </a:rPr>
+                        <a:t>FT Services/JPMorgan</a:t>
+                      </a:r>
+                      <a:endParaRPr lang="en-US" sz="830" dirty="0">
+                        <a:latin typeface="Calibri" charset="0"/>
+                        <a:ea typeface="Calibri" charset="0"/>
+                        <a:cs typeface="Calibri" charset="0"/>
+                      </a:endParaRPr>
+                    </a:p>
+                  </a:txBody>
+                  <a:tcPr marL="76200" marR="76200" marT="38100" marB="38100" anchor="ctr">
+                    <a:lnL w="9525" cap="flat" cmpd="sng" algn="ctr">
+                      <a:solidFill>
+                        <a:srgbClr val="D7E1F5"/>
+                      </a:solidFill>
+                      <a:prstDash val="solid"/>
+                      <a:round/>
+                      <a:headEnd type="none" w="med" len="med"/>
+                      <a:tailEnd type="none" w="med" len="med"/>
+                    </a:lnL>
+                    <a:lnR w="9525" cap="flat" cmpd="sng" algn="ctr">
+                      <a:solidFill>
+                        <a:srgbClr val="D7E1F5"/>
+                      </a:solidFill>
+                      <a:prstDash val="solid"/>
+                      <a:round/>
+                      <a:headEnd type="none" w="med" len="med"/>
+                      <a:tailEnd type="none" w="med" len="med"/>
+                    </a:lnR>
+                    <a:lnT w="9525" cap="flat" cmpd="sng" algn="ctr">
+                      <a:solidFill>
+                        <a:srgbClr val="D7E1F5"/>
+                      </a:solidFill>
+                      <a:prstDash val="solid"/>
+                      <a:round/>
+                      <a:headEnd type="none" w="med" len="med"/>
+                      <a:tailEnd type="none" w="med" len="med"/>
+                    </a:lnT>
+                    <a:lnB w="9525" cap="flat" cmpd="sng" algn="ctr">
+                      <a:solidFill>
+                        <a:srgbClr val="D7E1F5"/>
+                      </a:solidFill>
+                      <a:prstDash val="solid"/>
+                      <a:round/>
+                      <a:headEnd type="none" w="med" len="med"/>
+                      <a:tailEnd type="none" w="med" len="med"/>
+                    </a:lnB>
+                    <a:solidFill>
+                      <a:srgbClr val="FFFFFF"/>
+                    </a:solidFill>
+                  </a:tcPr>
+                </a:tc>
+                <a:tc>
+                  <a:txBody>
+                    <a:bodyPr/>
+                    <a:lstStyle/>
+                    <a:p>
+                      <a:pPr algn="ctr" indent="0" marL="0">
+                        <a:buNone/>
+                      </a:pPr>
+                      <a:r>
+                        <a:rPr lang="en-US" sz="830" dirty="0">
+                          <a:solidFill>
+                            <a:srgbClr val="3A4566"/>
+                          </a:solidFill>
+                          <a:latin typeface="Calibri" pitchFamily="34" charset="0"/>
+                          <a:ea typeface="Calibri" pitchFamily="34" charset="-122"/>
+                          <a:cs typeface="Calibri" pitchFamily="34" charset="-120"/>
+                        </a:rPr>
+                        <a:t>BNY Mellon</a:t>
+                      </a:r>
+                      <a:endParaRPr lang="en-US" sz="830" dirty="0">
+                        <a:latin typeface="Calibri" charset="0"/>
+                        <a:ea typeface="Calibri" charset="0"/>
+                        <a:cs typeface="Calibri" charset="0"/>
+                      </a:endParaRPr>
+                    </a:p>
+                  </a:txBody>
+                  <a:tcPr marL="76200" marR="76200" marT="38100" marB="38100" anchor="ctr">
+                    <a:lnL w="9525" cap="flat" cmpd="sng" algn="ctr">
+                      <a:solidFill>
+                        <a:srgbClr val="D7E1F5"/>
+                      </a:solidFill>
+                      <a:prstDash val="solid"/>
+                      <a:round/>
+                      <a:headEnd type="none" w="med" len="med"/>
+                      <a:tailEnd type="none" w="med" len="med"/>
+                    </a:lnL>
+                    <a:lnR w="9525" cap="flat" cmpd="sng" algn="ctr">
+                      <a:solidFill>
+                        <a:srgbClr val="D7E1F5"/>
+                      </a:solidFill>
+                      <a:prstDash val="solid"/>
+                      <a:round/>
+                      <a:headEnd type="none" w="med" len="med"/>
+                      <a:tailEnd type="none" w="med" len="med"/>
+                    </a:lnR>
+                    <a:lnT w="9525" cap="flat" cmpd="sng" algn="ctr">
+                      <a:solidFill>
+                        <a:srgbClr val="D7E1F5"/>
+                      </a:solidFill>
+                      <a:prstDash val="solid"/>
+                      <a:round/>
+                      <a:headEnd type="none" w="med" len="med"/>
+                      <a:tailEnd type="none" w="med" len="med"/>
+                    </a:lnT>
+                    <a:lnB w="9525" cap="flat" cmpd="sng" algn="ctr">
+                      <a:solidFill>
+                        <a:srgbClr val="D7E1F5"/>
+                      </a:solidFill>
+                      <a:prstDash val="solid"/>
+                      <a:round/>
+                      <a:headEnd type="none" w="med" len="med"/>
+                      <a:tailEnd type="none" w="med" len="med"/>
+                    </a:lnB>
+                    <a:solidFill>
+                      <a:srgbClr val="FFFFFF"/>
+                    </a:solidFill>
+                  </a:tcPr>
+                </a:tc>
+                <a:tc>
+                  <a:txBody>
+                    <a:bodyPr/>
+                    <a:lstStyle/>
+                    <a:p>
+                      <a:pPr algn="ctr" indent="0" marL="0">
+                        <a:buNone/>
+                      </a:pPr>
+                      <a:r>
+                        <a:rPr lang="en-US" sz="830" dirty="0">
+                          <a:solidFill>
+                            <a:srgbClr val="3A4566"/>
+                          </a:solidFill>
+                          <a:latin typeface="Calibri" pitchFamily="34" charset="0"/>
+                          <a:ea typeface="Calibri" pitchFamily="34" charset="-122"/>
+                          <a:cs typeface="Calibri" pitchFamily="34" charset="-120"/>
+                        </a:rPr>
+                        <a:t>Not confirmed</a:t>
+                      </a:r>
+                      <a:endParaRPr lang="en-US" sz="830" dirty="0">
+                        <a:latin typeface="Calibri" charset="0"/>
+                        <a:ea typeface="Calibri" charset="0"/>
+                        <a:cs typeface="Calibri" charset="0"/>
+                      </a:endParaRPr>
+                    </a:p>
+                  </a:txBody>
+                  <a:tcPr marL="76200" marR="76200" marT="38100" marB="38100" anchor="ctr">
+                    <a:lnL w="9525" cap="flat" cmpd="sng" algn="ctr">
+                      <a:solidFill>
+                        <a:srgbClr val="D7E1F5"/>
+                      </a:solidFill>
+                      <a:prstDash val="solid"/>
+                      <a:round/>
+                      <a:headEnd type="none" w="med" len="med"/>
+                      <a:tailEnd type="none" w="med" len="med"/>
+                    </a:lnL>
+                    <a:lnR w="9525" cap="flat" cmpd="sng" algn="ctr">
+                      <a:solidFill>
+                        <a:srgbClr val="D7E1F5"/>
+                      </a:solidFill>
+                      <a:prstDash val="solid"/>
+                      <a:round/>
+                      <a:headEnd type="none" w="med" len="med"/>
+                      <a:tailEnd type="none" w="med" len="med"/>
+                    </a:lnR>
+                    <a:lnT w="9525" cap="flat" cmpd="sng" algn="ctr">
+                      <a:solidFill>
+                        <a:srgbClr val="D7E1F5"/>
+                      </a:solidFill>
+                      <a:prstDash val="solid"/>
+                      <a:round/>
+                      <a:headEnd type="none" w="med" len="med"/>
+                      <a:tailEnd type="none" w="med" len="med"/>
+                    </a:lnT>
+                    <a:lnB w="9525" cap="flat" cmpd="sng" algn="ctr">
+                      <a:solidFill>
+                        <a:srgbClr val="D7E1F5"/>
+                      </a:solidFill>
+                      <a:prstDash val="solid"/>
+                      <a:round/>
+                      <a:headEnd type="none" w="med" len="med"/>
+                      <a:tailEnd type="none" w="med" len="med"/>
+                    </a:lnB>
+                    <a:solidFill>
+                      <a:srgbClr val="FFFFFF"/>
+                    </a:solidFill>
+                  </a:tcPr>
+                </a:tc>
+                <a:tc>
+                  <a:txBody>
+                    <a:bodyPr/>
+                    <a:lstStyle/>
+                    <a:p>
+                      <a:pPr algn="ctr" indent="0" marL="0">
+                        <a:buNone/>
+                      </a:pPr>
+                      <a:r>
+                        <a:rPr lang="en-US" sz="830" dirty="0">
+                          <a:solidFill>
+                            <a:srgbClr val="3A4566"/>
+                          </a:solidFill>
+                          <a:latin typeface="Calibri" pitchFamily="34" charset="0"/>
+                          <a:ea typeface="Calibri" pitchFamily="34" charset="-122"/>
+                          <a:cs typeface="Calibri" pitchFamily="34" charset="-120"/>
+                        </a:rPr>
+                        <a:t>Not confirmed</a:t>
+                      </a:r>
+                      <a:endParaRPr lang="en-US" sz="830" dirty="0">
+                        <a:latin typeface="Calibri" charset="0"/>
+                        <a:ea typeface="Calibri" charset="0"/>
+                        <a:cs typeface="Calibri" charset="0"/>
+                      </a:endParaRPr>
+                    </a:p>
+                  </a:txBody>
+                  <a:tcPr marL="76200" marR="76200" marT="38100" marB="38100" anchor="ctr">
+                    <a:lnL w="9525" cap="flat" cmpd="sng" algn="ctr">
+                      <a:solidFill>
+                        <a:srgbClr val="D7E1F5"/>
+                      </a:solidFill>
+                      <a:prstDash val="solid"/>
+                      <a:round/>
+                      <a:headEnd type="none" w="med" len="med"/>
+                      <a:tailEnd type="none" w="med" len="med"/>
+                    </a:lnL>
+                    <a:lnR w="9525" cap="flat" cmpd="sng" algn="ctr">
+                      <a:solidFill>
+                        <a:srgbClr val="D7E1F5"/>
+                      </a:solidFill>
+                      <a:prstDash val="solid"/>
+                      <a:round/>
+                      <a:headEnd type="none" w="med" len="med"/>
+                      <a:tailEnd type="none" w="med" len="med"/>
+                    </a:lnR>
+                    <a:lnT w="9525" cap="flat" cmpd="sng" algn="ctr">
+                      <a:solidFill>
+                        <a:srgbClr val="D7E1F5"/>
+                      </a:solidFill>
+                      <a:prstDash val="solid"/>
+                      <a:round/>
+                      <a:headEnd type="none" w="med" len="med"/>
+                      <a:tailEnd type="none" w="med" len="med"/>
+                    </a:lnT>
+                    <a:lnB w="9525" cap="flat" cmpd="sng" algn="ctr">
+                      <a:solidFill>
+                        <a:srgbClr val="D7E1F5"/>
+                      </a:solidFill>
+                      <a:prstDash val="solid"/>
+                      <a:round/>
+                      <a:headEnd type="none" w="med" len="med"/>
+                      <a:tailEnd type="none" w="med" len="med"/>
+                    </a:lnB>
+                    <a:solidFill>
+                      <a:srgbClr val="FFFFFF"/>
+                    </a:solidFill>
+                  </a:tcPr>
+                </a:tc>
+                <a:tc>
+                  <a:txBody>
+                    <a:bodyPr/>
+                    <a:lstStyle/>
+                    <a:p>
+                      <a:pPr algn="ctr" indent="0" marL="0">
+                        <a:buNone/>
+                      </a:pPr>
+                      <a:r>
+                        <a:rPr lang="en-US" sz="830" dirty="0">
+                          <a:solidFill>
+                            <a:srgbClr val="3A4566"/>
+                          </a:solidFill>
+                          <a:latin typeface="Calibri" pitchFamily="34" charset="0"/>
+                          <a:ea typeface="Calibri" pitchFamily="34" charset="-122"/>
+                          <a:cs typeface="Calibri" pitchFamily="34" charset="-120"/>
+                        </a:rPr>
+                        <a:t>NAV Consulting</a:t>
+                      </a:r>
+                      <a:endParaRPr lang="en-US" sz="830" dirty="0">
+                        <a:latin typeface="Calibri" charset="0"/>
+                        <a:ea typeface="Calibri" charset="0"/>
+                        <a:cs typeface="Calibri" charset="0"/>
+                      </a:endParaRPr>
+                    </a:p>
+                  </a:txBody>
+                  <a:tcPr marL="76200" marR="76200" marT="38100" marB="38100" anchor="ctr">
+                    <a:lnL w="9525" cap="flat" cmpd="sng" algn="ctr">
+                      <a:solidFill>
+                        <a:srgbClr val="D7E1F5"/>
+                      </a:solidFill>
+                      <a:prstDash val="solid"/>
+                      <a:round/>
+                      <a:headEnd type="none" w="med" len="med"/>
+                      <a:tailEnd type="none" w="med" len="med"/>
+                    </a:lnL>
+                    <a:lnR w="9525" cap="flat" cmpd="sng" algn="ctr">
+                      <a:solidFill>
+                        <a:srgbClr val="D7E1F5"/>
+                      </a:solidFill>
+                      <a:prstDash val="solid"/>
+                      <a:round/>
+                      <a:headEnd type="none" w="med" len="med"/>
+                      <a:tailEnd type="none" w="med" len="med"/>
+                    </a:lnR>
+                    <a:lnT w="9525" cap="flat" cmpd="sng" algn="ctr">
+                      <a:solidFill>
+                        <a:srgbClr val="D7E1F5"/>
+                      </a:solidFill>
+                      <a:prstDash val="solid"/>
+                      <a:round/>
+                      <a:headEnd type="none" w="med" len="med"/>
+                      <a:tailEnd type="none" w="med" len="med"/>
+                    </a:lnT>
+                    <a:lnB w="9525" cap="flat" cmpd="sng" algn="ctr">
+                      <a:solidFill>
+                        <a:srgbClr val="D7E1F5"/>
+                      </a:solidFill>
+                      <a:prstDash val="solid"/>
+                      <a:round/>
+                      <a:headEnd type="none" w="med" len="med"/>
+                      <a:tailEnd type="none" w="med" len="med"/>
+                    </a:lnB>
+                    <a:solidFill>
+                      <a:srgbClr val="FFFFFF"/>
+                    </a:solidFill>
+                  </a:tcPr>
+                </a:tc>
+                <a:tc>
+                  <a:txBody>
+                    <a:bodyPr/>
+                    <a:lstStyle/>
+                    <a:p>
+                      <a:pPr algn="ctr" indent="0" marL="0">
+                        <a:buNone/>
+                      </a:pPr>
+                      <a:r>
+                        <a:rPr lang="en-US" sz="830" dirty="0">
+                          <a:solidFill>
+                            <a:srgbClr val="3A4566"/>
+                          </a:solidFill>
+                          <a:latin typeface="Calibri" pitchFamily="34" charset="0"/>
+                          <a:ea typeface="Calibri" pitchFamily="34" charset="-122"/>
+                          <a:cs typeface="Calibri" pitchFamily="34" charset="-120"/>
+                        </a:rPr>
+                        <a:t>Not confirmed</a:t>
+                      </a:r>
+                      <a:endParaRPr lang="en-US" sz="830" dirty="0">
+                        <a:latin typeface="Calibri" charset="0"/>
+                        <a:ea typeface="Calibri" charset="0"/>
+                        <a:cs typeface="Calibri" charset="0"/>
+                      </a:endParaRPr>
+                    </a:p>
+                  </a:txBody>
+                  <a:tcPr marL="76200" marR="76200" marT="38100" marB="38100" anchor="ctr">
+                    <a:lnL w="9525" cap="flat" cmpd="sng" algn="ctr">
+                      <a:solidFill>
+                        <a:srgbClr val="D7E1F5"/>
+                      </a:solidFill>
+                      <a:prstDash val="solid"/>
+                      <a:round/>
+                      <a:headEnd type="none" w="med" len="med"/>
+                      <a:tailEnd type="none" w="med" len="med"/>
+                    </a:lnL>
+                    <a:lnR w="9525" cap="flat" cmpd="sng" algn="ctr">
+                      <a:solidFill>
+                        <a:srgbClr val="D7E1F5"/>
+                      </a:solidFill>
+                      <a:prstDash val="solid"/>
+                      <a:round/>
+                      <a:headEnd type="none" w="med" len="med"/>
+                      <a:tailEnd type="none" w="med" len="med"/>
+                    </a:lnR>
+                    <a:lnT w="9525" cap="flat" cmpd="sng" algn="ctr">
+                      <a:solidFill>
+                        <a:srgbClr val="D7E1F5"/>
+                      </a:solidFill>
+                      <a:prstDash val="solid"/>
+                      <a:round/>
+                      <a:headEnd type="none" w="med" len="med"/>
+                      <a:tailEnd type="none" w="med" len="med"/>
+                    </a:lnT>
+                    <a:lnB w="9525" cap="flat" cmpd="sng" algn="ctr">
+                      <a:solidFill>
+                        <a:srgbClr val="D7E1F5"/>
+                      </a:solidFill>
+                      <a:prstDash val="solid"/>
+                      <a:round/>
+                      <a:headEnd type="none" w="med" len="med"/>
+                      <a:tailEnd type="none" w="med" len="med"/>
+                    </a:lnB>
+                    <a:solidFill>
+                      <a:srgbClr val="FFFFFF"/>
+                    </a:solidFill>
+                  </a:tcPr>
+                </a:tc>
+              </a:tr>
+              <a:tr h="0">
+                <a:tc>
+                  <a:txBody>
+                    <a:bodyPr/>
+                    <a:lstStyle/>
+                    <a:p>
+                      <a:pPr algn="l" indent="0" marL="0">
+                        <a:buNone/>
+                      </a:pPr>
+                      <a:r>
+                        <a:rPr lang="en-US" sz="830" b="1" dirty="0">
+                          <a:solidFill>
+                            <a:srgbClr val="1E2761"/>
+                          </a:solidFill>
+                          <a:latin typeface="Calibri" pitchFamily="34" charset="0"/>
+                          <a:ea typeface="Calibri" pitchFamily="34" charset="-122"/>
+                          <a:cs typeface="Calibri" pitchFamily="34" charset="-120"/>
+                        </a:rPr>
+                        <a:t>Custodian</a:t>
+                      </a:r>
+                      <a:endParaRPr lang="en-US" sz="830" dirty="0">
+                        <a:latin typeface="Calibri" charset="0"/>
+                        <a:ea typeface="Calibri" charset="0"/>
+                        <a:cs typeface="Calibri" charset="0"/>
+                      </a:endParaRPr>
+                    </a:p>
+                  </a:txBody>
+                  <a:tcPr marL="76200" marR="76200" marT="38100" marB="38100" anchor="ctr">
+                    <a:lnL w="9525" cap="flat" cmpd="sng" algn="ctr">
+                      <a:solidFill>
+                        <a:srgbClr val="D7E1F5"/>
+                      </a:solidFill>
+                      <a:prstDash val="solid"/>
+                      <a:round/>
+                      <a:headEnd type="none" w="med" len="med"/>
+                      <a:tailEnd type="none" w="med" len="med"/>
+                    </a:lnL>
+                    <a:lnR w="9525" cap="flat" cmpd="sng" algn="ctr">
+                      <a:solidFill>
+                        <a:srgbClr val="D7E1F5"/>
+                      </a:solidFill>
+                      <a:prstDash val="solid"/>
+                      <a:round/>
+                      <a:headEnd type="none" w="med" len="med"/>
+                      <a:tailEnd type="none" w="med" len="med"/>
+                    </a:lnR>
+                    <a:lnT w="9525" cap="flat" cmpd="sng" algn="ctr">
+                      <a:solidFill>
+                        <a:srgbClr val="D7E1F5"/>
+                      </a:solidFill>
+                      <a:prstDash val="solid"/>
+                      <a:round/>
+                      <a:headEnd type="none" w="med" len="med"/>
+                      <a:tailEnd type="none" w="med" len="med"/>
+                    </a:lnT>
+                    <a:lnB w="9525" cap="flat" cmpd="sng" algn="ctr">
+                      <a:solidFill>
+                        <a:srgbClr val="D7E1F5"/>
+                      </a:solidFill>
+                      <a:prstDash val="solid"/>
+                      <a:round/>
+                      <a:headEnd type="none" w="med" len="med"/>
+                      <a:tailEnd type="none" w="med" len="med"/>
+                    </a:lnB>
+                    <a:solidFill>
                       <a:srgbClr val="F5F8FD"/>
                     </a:solidFill>
                   </a:tcPr>
@@ -20475,7 +21431,7 @@
                           <a:ea typeface="Calibri" pitchFamily="34" charset="-122"/>
                           <a:cs typeface="Calibri" pitchFamily="34" charset="-120"/>
                         </a:rPr>
-                        <a:t>FT Services/JPMorgan</a:t>
+                        <a:t>JPMorgan Chase</a:t>
                       </a:r>
                       <a:endParaRPr lang="en-US" sz="830" dirty="0">
                         <a:latin typeface="Calibri" charset="0"/>
@@ -20747,7 +21703,7 @@
                           <a:ea typeface="Calibri" pitchFamily="34" charset="-122"/>
                           <a:cs typeface="Calibri" pitchFamily="34" charset="-120"/>
                         </a:rPr>
-                        <a:t>NAV Consulting</a:t>
+                        <a:t>Not confirmed</a:t>
                       </a:r>
                       <a:endParaRPr lang="en-US" sz="830" dirty="0">
                         <a:latin typeface="Calibri" charset="0"/>
@@ -20885,7 +21841,7 @@
                           <a:ea typeface="Calibri" pitchFamily="34" charset="-122"/>
                           <a:cs typeface="Calibri" pitchFamily="34" charset="-120"/>
                         </a:rPr>
-                        <a:t>Custodian</a:t>
+                        <a:t>Auditor</a:t>
                       </a:r>
                       <a:endParaRPr lang="en-US" sz="830" dirty="0">
                         <a:latin typeface="Calibri" charset="0"/>
@@ -20953,7 +21909,7 @@
                           <a:ea typeface="Calibri" pitchFamily="34" charset="-122"/>
                           <a:cs typeface="Calibri" pitchFamily="34" charset="-120"/>
                         </a:rPr>
-                        <a:t>JPMorgan Chase</a:t>
+                        <a:t>PwC</a:t>
                       </a:r>
                       <a:endParaRPr lang="en-US" sz="830" dirty="0">
                         <a:latin typeface="Calibri" charset="0"/>
@@ -21021,7 +21977,7 @@
                           <a:ea typeface="Calibri" pitchFamily="34" charset="-122"/>
                           <a:cs typeface="Calibri" pitchFamily="34" charset="-120"/>
                         </a:rPr>
-                        <a:t>BNY Mellon</a:t>
+                        <a:t>PwC</a:t>
                       </a:r>
                       <a:endParaRPr lang="en-US" sz="830" dirty="0">
                         <a:latin typeface="Calibri" charset="0"/>
@@ -21157,7 +22113,7 @@
                           <a:ea typeface="Calibri" pitchFamily="34" charset="-122"/>
                           <a:cs typeface="Calibri" pitchFamily="34" charset="-120"/>
                         </a:rPr>
-                        <a:t>Not confirmed</a:t>
+                        <a:t>EY (secondary)</a:t>
                       </a:r>
                       <a:endParaRPr lang="en-US" sz="830" dirty="0">
                         <a:latin typeface="Calibri" charset="0"/>
@@ -21363,484 +22319,6 @@
                           <a:ea typeface="Calibri" pitchFamily="34" charset="-122"/>
                           <a:cs typeface="Calibri" pitchFamily="34" charset="-120"/>
                         </a:rPr>
-                        <a:t>Auditor</a:t>
-                      </a:r>
-                      <a:endParaRPr lang="en-US" sz="830" dirty="0">
-                        <a:latin typeface="Calibri" charset="0"/>
-                        <a:ea typeface="Calibri" charset="0"/>
-                        <a:cs typeface="Calibri" charset="0"/>
-                      </a:endParaRPr>
-                    </a:p>
-                  </a:txBody>
-                  <a:tcPr marL="76200" marR="76200" marT="38100" marB="38100" anchor="ctr">
-                    <a:lnL w="9525" cap="flat" cmpd="sng" algn="ctr">
-                      <a:solidFill>
-                        <a:srgbClr val="D7E1F5"/>
-                      </a:solidFill>
-                      <a:prstDash val="solid"/>
-                      <a:round/>
-                      <a:headEnd type="none" w="med" len="med"/>
-                      <a:tailEnd type="none" w="med" len="med"/>
-                    </a:lnL>
-                    <a:lnR w="9525" cap="flat" cmpd="sng" algn="ctr">
-                      <a:solidFill>
-                        <a:srgbClr val="D7E1F5"/>
-                      </a:solidFill>
-                      <a:prstDash val="solid"/>
-                      <a:round/>
-                      <a:headEnd type="none" w="med" len="med"/>
-                      <a:tailEnd type="none" w="med" len="med"/>
-                    </a:lnR>
-                    <a:lnT w="9525" cap="flat" cmpd="sng" algn="ctr">
-                      <a:solidFill>
-                        <a:srgbClr val="D7E1F5"/>
-                      </a:solidFill>
-                      <a:prstDash val="solid"/>
-                      <a:round/>
-                      <a:headEnd type="none" w="med" len="med"/>
-                      <a:tailEnd type="none" w="med" len="med"/>
-                    </a:lnT>
-                    <a:lnB w="9525" cap="flat" cmpd="sng" algn="ctr">
-                      <a:solidFill>
-                        <a:srgbClr val="D7E1F5"/>
-                      </a:solidFill>
-                      <a:prstDash val="solid"/>
-                      <a:round/>
-                      <a:headEnd type="none" w="med" len="med"/>
-                      <a:tailEnd type="none" w="med" len="med"/>
-                    </a:lnB>
-                    <a:solidFill>
-                      <a:srgbClr val="F5F8FD"/>
-                    </a:solidFill>
-                  </a:tcPr>
-                </a:tc>
-                <a:tc>
-                  <a:txBody>
-                    <a:bodyPr/>
-                    <a:lstStyle/>
-                    <a:p>
-                      <a:pPr algn="ctr" indent="0" marL="0">
-                        <a:buNone/>
-                      </a:pPr>
-                      <a:r>
-                        <a:rPr lang="en-US" sz="830" dirty="0">
-                          <a:solidFill>
-                            <a:srgbClr val="3A4566"/>
-                          </a:solidFill>
-                          <a:latin typeface="Calibri" pitchFamily="34" charset="0"/>
-                          <a:ea typeface="Calibri" pitchFamily="34" charset="-122"/>
-                          <a:cs typeface="Calibri" pitchFamily="34" charset="-120"/>
-                        </a:rPr>
-                        <a:t>PwC</a:t>
-                      </a:r>
-                      <a:endParaRPr lang="en-US" sz="830" dirty="0">
-                        <a:latin typeface="Calibri" charset="0"/>
-                        <a:ea typeface="Calibri" charset="0"/>
-                        <a:cs typeface="Calibri" charset="0"/>
-                      </a:endParaRPr>
-                    </a:p>
-                  </a:txBody>
-                  <a:tcPr marL="76200" marR="76200" marT="38100" marB="38100" anchor="ctr">
-                    <a:lnL w="9525" cap="flat" cmpd="sng" algn="ctr">
-                      <a:solidFill>
-                        <a:srgbClr val="D7E1F5"/>
-                      </a:solidFill>
-                      <a:prstDash val="solid"/>
-                      <a:round/>
-                      <a:headEnd type="none" w="med" len="med"/>
-                      <a:tailEnd type="none" w="med" len="med"/>
-                    </a:lnL>
-                    <a:lnR w="9525" cap="flat" cmpd="sng" algn="ctr">
-                      <a:solidFill>
-                        <a:srgbClr val="D7E1F5"/>
-                      </a:solidFill>
-                      <a:prstDash val="solid"/>
-                      <a:round/>
-                      <a:headEnd type="none" w="med" len="med"/>
-                      <a:tailEnd type="none" w="med" len="med"/>
-                    </a:lnR>
-                    <a:lnT w="9525" cap="flat" cmpd="sng" algn="ctr">
-                      <a:solidFill>
-                        <a:srgbClr val="D7E1F5"/>
-                      </a:solidFill>
-                      <a:prstDash val="solid"/>
-                      <a:round/>
-                      <a:headEnd type="none" w="med" len="med"/>
-                      <a:tailEnd type="none" w="med" len="med"/>
-                    </a:lnT>
-                    <a:lnB w="9525" cap="flat" cmpd="sng" algn="ctr">
-                      <a:solidFill>
-                        <a:srgbClr val="D7E1F5"/>
-                      </a:solidFill>
-                      <a:prstDash val="solid"/>
-                      <a:round/>
-                      <a:headEnd type="none" w="med" len="med"/>
-                      <a:tailEnd type="none" w="med" len="med"/>
-                    </a:lnB>
-                    <a:solidFill>
-                      <a:srgbClr val="F5F8FD"/>
-                    </a:solidFill>
-                  </a:tcPr>
-                </a:tc>
-                <a:tc>
-                  <a:txBody>
-                    <a:bodyPr/>
-                    <a:lstStyle/>
-                    <a:p>
-                      <a:pPr algn="ctr" indent="0" marL="0">
-                        <a:buNone/>
-                      </a:pPr>
-                      <a:r>
-                        <a:rPr lang="en-US" sz="830" dirty="0">
-                          <a:solidFill>
-                            <a:srgbClr val="3A4566"/>
-                          </a:solidFill>
-                          <a:latin typeface="Calibri" pitchFamily="34" charset="0"/>
-                          <a:ea typeface="Calibri" pitchFamily="34" charset="-122"/>
-                          <a:cs typeface="Calibri" pitchFamily="34" charset="-120"/>
-                        </a:rPr>
-                        <a:t>PwC</a:t>
-                      </a:r>
-                      <a:endParaRPr lang="en-US" sz="830" dirty="0">
-                        <a:latin typeface="Calibri" charset="0"/>
-                        <a:ea typeface="Calibri" charset="0"/>
-                        <a:cs typeface="Calibri" charset="0"/>
-                      </a:endParaRPr>
-                    </a:p>
-                  </a:txBody>
-                  <a:tcPr marL="76200" marR="76200" marT="38100" marB="38100" anchor="ctr">
-                    <a:lnL w="9525" cap="flat" cmpd="sng" algn="ctr">
-                      <a:solidFill>
-                        <a:srgbClr val="D7E1F5"/>
-                      </a:solidFill>
-                      <a:prstDash val="solid"/>
-                      <a:round/>
-                      <a:headEnd type="none" w="med" len="med"/>
-                      <a:tailEnd type="none" w="med" len="med"/>
-                    </a:lnL>
-                    <a:lnR w="9525" cap="flat" cmpd="sng" algn="ctr">
-                      <a:solidFill>
-                        <a:srgbClr val="D7E1F5"/>
-                      </a:solidFill>
-                      <a:prstDash val="solid"/>
-                      <a:round/>
-                      <a:headEnd type="none" w="med" len="med"/>
-                      <a:tailEnd type="none" w="med" len="med"/>
-                    </a:lnR>
-                    <a:lnT w="9525" cap="flat" cmpd="sng" algn="ctr">
-                      <a:solidFill>
-                        <a:srgbClr val="D7E1F5"/>
-                      </a:solidFill>
-                      <a:prstDash val="solid"/>
-                      <a:round/>
-                      <a:headEnd type="none" w="med" len="med"/>
-                      <a:tailEnd type="none" w="med" len="med"/>
-                    </a:lnT>
-                    <a:lnB w="9525" cap="flat" cmpd="sng" algn="ctr">
-                      <a:solidFill>
-                        <a:srgbClr val="D7E1F5"/>
-                      </a:solidFill>
-                      <a:prstDash val="solid"/>
-                      <a:round/>
-                      <a:headEnd type="none" w="med" len="med"/>
-                      <a:tailEnd type="none" w="med" len="med"/>
-                    </a:lnB>
-                    <a:solidFill>
-                      <a:srgbClr val="F5F8FD"/>
-                    </a:solidFill>
-                  </a:tcPr>
-                </a:tc>
-                <a:tc>
-                  <a:txBody>
-                    <a:bodyPr/>
-                    <a:lstStyle/>
-                    <a:p>
-                      <a:pPr algn="ctr" indent="0" marL="0">
-                        <a:buNone/>
-                      </a:pPr>
-                      <a:r>
-                        <a:rPr lang="en-US" sz="830" dirty="0">
-                          <a:solidFill>
-                            <a:srgbClr val="3A4566"/>
-                          </a:solidFill>
-                          <a:latin typeface="Calibri" pitchFamily="34" charset="0"/>
-                          <a:ea typeface="Calibri" pitchFamily="34" charset="-122"/>
-                          <a:cs typeface="Calibri" pitchFamily="34" charset="-120"/>
-                        </a:rPr>
-                        <a:t>Not confirmed</a:t>
-                      </a:r>
-                      <a:endParaRPr lang="en-US" sz="830" dirty="0">
-                        <a:latin typeface="Calibri" charset="0"/>
-                        <a:ea typeface="Calibri" charset="0"/>
-                        <a:cs typeface="Calibri" charset="0"/>
-                      </a:endParaRPr>
-                    </a:p>
-                  </a:txBody>
-                  <a:tcPr marL="76200" marR="76200" marT="38100" marB="38100" anchor="ctr">
-                    <a:lnL w="9525" cap="flat" cmpd="sng" algn="ctr">
-                      <a:solidFill>
-                        <a:srgbClr val="D7E1F5"/>
-                      </a:solidFill>
-                      <a:prstDash val="solid"/>
-                      <a:round/>
-                      <a:headEnd type="none" w="med" len="med"/>
-                      <a:tailEnd type="none" w="med" len="med"/>
-                    </a:lnL>
-                    <a:lnR w="9525" cap="flat" cmpd="sng" algn="ctr">
-                      <a:solidFill>
-                        <a:srgbClr val="D7E1F5"/>
-                      </a:solidFill>
-                      <a:prstDash val="solid"/>
-                      <a:round/>
-                      <a:headEnd type="none" w="med" len="med"/>
-                      <a:tailEnd type="none" w="med" len="med"/>
-                    </a:lnR>
-                    <a:lnT w="9525" cap="flat" cmpd="sng" algn="ctr">
-                      <a:solidFill>
-                        <a:srgbClr val="D7E1F5"/>
-                      </a:solidFill>
-                      <a:prstDash val="solid"/>
-                      <a:round/>
-                      <a:headEnd type="none" w="med" len="med"/>
-                      <a:tailEnd type="none" w="med" len="med"/>
-                    </a:lnT>
-                    <a:lnB w="9525" cap="flat" cmpd="sng" algn="ctr">
-                      <a:solidFill>
-                        <a:srgbClr val="D7E1F5"/>
-                      </a:solidFill>
-                      <a:prstDash val="solid"/>
-                      <a:round/>
-                      <a:headEnd type="none" w="med" len="med"/>
-                      <a:tailEnd type="none" w="med" len="med"/>
-                    </a:lnB>
-                    <a:solidFill>
-                      <a:srgbClr val="F5F8FD"/>
-                    </a:solidFill>
-                  </a:tcPr>
-                </a:tc>
-                <a:tc>
-                  <a:txBody>
-                    <a:bodyPr/>
-                    <a:lstStyle/>
-                    <a:p>
-                      <a:pPr algn="ctr" indent="0" marL="0">
-                        <a:buNone/>
-                      </a:pPr>
-                      <a:r>
-                        <a:rPr lang="en-US" sz="830" dirty="0">
-                          <a:solidFill>
-                            <a:srgbClr val="3A4566"/>
-                          </a:solidFill>
-                          <a:latin typeface="Calibri" pitchFamily="34" charset="0"/>
-                          <a:ea typeface="Calibri" pitchFamily="34" charset="-122"/>
-                          <a:cs typeface="Calibri" pitchFamily="34" charset="-120"/>
-                        </a:rPr>
-                        <a:t>EY (secondary)</a:t>
-                      </a:r>
-                      <a:endParaRPr lang="en-US" sz="830" dirty="0">
-                        <a:latin typeface="Calibri" charset="0"/>
-                        <a:ea typeface="Calibri" charset="0"/>
-                        <a:cs typeface="Calibri" charset="0"/>
-                      </a:endParaRPr>
-                    </a:p>
-                  </a:txBody>
-                  <a:tcPr marL="76200" marR="76200" marT="38100" marB="38100" anchor="ctr">
-                    <a:lnL w="9525" cap="flat" cmpd="sng" algn="ctr">
-                      <a:solidFill>
-                        <a:srgbClr val="D7E1F5"/>
-                      </a:solidFill>
-                      <a:prstDash val="solid"/>
-                      <a:round/>
-                      <a:headEnd type="none" w="med" len="med"/>
-                      <a:tailEnd type="none" w="med" len="med"/>
-                    </a:lnL>
-                    <a:lnR w="9525" cap="flat" cmpd="sng" algn="ctr">
-                      <a:solidFill>
-                        <a:srgbClr val="D7E1F5"/>
-                      </a:solidFill>
-                      <a:prstDash val="solid"/>
-                      <a:round/>
-                      <a:headEnd type="none" w="med" len="med"/>
-                      <a:tailEnd type="none" w="med" len="med"/>
-                    </a:lnR>
-                    <a:lnT w="9525" cap="flat" cmpd="sng" algn="ctr">
-                      <a:solidFill>
-                        <a:srgbClr val="D7E1F5"/>
-                      </a:solidFill>
-                      <a:prstDash val="solid"/>
-                      <a:round/>
-                      <a:headEnd type="none" w="med" len="med"/>
-                      <a:tailEnd type="none" w="med" len="med"/>
-                    </a:lnT>
-                    <a:lnB w="9525" cap="flat" cmpd="sng" algn="ctr">
-                      <a:solidFill>
-                        <a:srgbClr val="D7E1F5"/>
-                      </a:solidFill>
-                      <a:prstDash val="solid"/>
-                      <a:round/>
-                      <a:headEnd type="none" w="med" len="med"/>
-                      <a:tailEnd type="none" w="med" len="med"/>
-                    </a:lnB>
-                    <a:solidFill>
-                      <a:srgbClr val="F5F8FD"/>
-                    </a:solidFill>
-                  </a:tcPr>
-                </a:tc>
-                <a:tc>
-                  <a:txBody>
-                    <a:bodyPr/>
-                    <a:lstStyle/>
-                    <a:p>
-                      <a:pPr algn="ctr" indent="0" marL="0">
-                        <a:buNone/>
-                      </a:pPr>
-                      <a:r>
-                        <a:rPr lang="en-US" sz="830" dirty="0">
-                          <a:solidFill>
-                            <a:srgbClr val="3A4566"/>
-                          </a:solidFill>
-                          <a:latin typeface="Calibri" pitchFamily="34" charset="0"/>
-                          <a:ea typeface="Calibri" pitchFamily="34" charset="-122"/>
-                          <a:cs typeface="Calibri" pitchFamily="34" charset="-120"/>
-                        </a:rPr>
-                        <a:t>Not confirmed</a:t>
-                      </a:r>
-                      <a:endParaRPr lang="en-US" sz="830" dirty="0">
-                        <a:latin typeface="Calibri" charset="0"/>
-                        <a:ea typeface="Calibri" charset="0"/>
-                        <a:cs typeface="Calibri" charset="0"/>
-                      </a:endParaRPr>
-                    </a:p>
-                  </a:txBody>
-                  <a:tcPr marL="76200" marR="76200" marT="38100" marB="38100" anchor="ctr">
-                    <a:lnL w="9525" cap="flat" cmpd="sng" algn="ctr">
-                      <a:solidFill>
-                        <a:srgbClr val="D7E1F5"/>
-                      </a:solidFill>
-                      <a:prstDash val="solid"/>
-                      <a:round/>
-                      <a:headEnd type="none" w="med" len="med"/>
-                      <a:tailEnd type="none" w="med" len="med"/>
-                    </a:lnL>
-                    <a:lnR w="9525" cap="flat" cmpd="sng" algn="ctr">
-                      <a:solidFill>
-                        <a:srgbClr val="D7E1F5"/>
-                      </a:solidFill>
-                      <a:prstDash val="solid"/>
-                      <a:round/>
-                      <a:headEnd type="none" w="med" len="med"/>
-                      <a:tailEnd type="none" w="med" len="med"/>
-                    </a:lnR>
-                    <a:lnT w="9525" cap="flat" cmpd="sng" algn="ctr">
-                      <a:solidFill>
-                        <a:srgbClr val="D7E1F5"/>
-                      </a:solidFill>
-                      <a:prstDash val="solid"/>
-                      <a:round/>
-                      <a:headEnd type="none" w="med" len="med"/>
-                      <a:tailEnd type="none" w="med" len="med"/>
-                    </a:lnT>
-                    <a:lnB w="9525" cap="flat" cmpd="sng" algn="ctr">
-                      <a:solidFill>
-                        <a:srgbClr val="D7E1F5"/>
-                      </a:solidFill>
-                      <a:prstDash val="solid"/>
-                      <a:round/>
-                      <a:headEnd type="none" w="med" len="med"/>
-                      <a:tailEnd type="none" w="med" len="med"/>
-                    </a:lnB>
-                    <a:solidFill>
-                      <a:srgbClr val="F5F8FD"/>
-                    </a:solidFill>
-                  </a:tcPr>
-                </a:tc>
-                <a:tc>
-                  <a:txBody>
-                    <a:bodyPr/>
-                    <a:lstStyle/>
-                    <a:p>
-                      <a:pPr algn="ctr" indent="0" marL="0">
-                        <a:buNone/>
-                      </a:pPr>
-                      <a:r>
-                        <a:rPr lang="en-US" sz="830" dirty="0">
-                          <a:solidFill>
-                            <a:srgbClr val="3A4566"/>
-                          </a:solidFill>
-                          <a:latin typeface="Calibri" pitchFamily="34" charset="0"/>
-                          <a:ea typeface="Calibri" pitchFamily="34" charset="-122"/>
-                          <a:cs typeface="Calibri" pitchFamily="34" charset="-120"/>
-                        </a:rPr>
-                        <a:t>Not confirmed</a:t>
-                      </a:r>
-                      <a:endParaRPr lang="en-US" sz="830" dirty="0">
-                        <a:latin typeface="Calibri" charset="0"/>
-                        <a:ea typeface="Calibri" charset="0"/>
-                        <a:cs typeface="Calibri" charset="0"/>
-                      </a:endParaRPr>
-                    </a:p>
-                  </a:txBody>
-                  <a:tcPr marL="76200" marR="76200" marT="38100" marB="38100" anchor="ctr">
-                    <a:lnL w="9525" cap="flat" cmpd="sng" algn="ctr">
-                      <a:solidFill>
-                        <a:srgbClr val="D7E1F5"/>
-                      </a:solidFill>
-                      <a:prstDash val="solid"/>
-                      <a:round/>
-                      <a:headEnd type="none" w="med" len="med"/>
-                      <a:tailEnd type="none" w="med" len="med"/>
-                    </a:lnL>
-                    <a:lnR w="9525" cap="flat" cmpd="sng" algn="ctr">
-                      <a:solidFill>
-                        <a:srgbClr val="D7E1F5"/>
-                      </a:solidFill>
-                      <a:prstDash val="solid"/>
-                      <a:round/>
-                      <a:headEnd type="none" w="med" len="med"/>
-                      <a:tailEnd type="none" w="med" len="med"/>
-                    </a:lnR>
-                    <a:lnT w="9525" cap="flat" cmpd="sng" algn="ctr">
-                      <a:solidFill>
-                        <a:srgbClr val="D7E1F5"/>
-                      </a:solidFill>
-                      <a:prstDash val="solid"/>
-                      <a:round/>
-                      <a:headEnd type="none" w="med" len="med"/>
-                      <a:tailEnd type="none" w="med" len="med"/>
-                    </a:lnT>
-                    <a:lnB w="9525" cap="flat" cmpd="sng" algn="ctr">
-                      <a:solidFill>
-                        <a:srgbClr val="D7E1F5"/>
-                      </a:solidFill>
-                      <a:prstDash val="solid"/>
-                      <a:round/>
-                      <a:headEnd type="none" w="med" len="med"/>
-                      <a:tailEnd type="none" w="med" len="med"/>
-                    </a:lnB>
-                    <a:solidFill>
-                      <a:srgbClr val="F5F8FD"/>
-                    </a:solidFill>
-                  </a:tcPr>
-                </a:tc>
-              </a:tr>
-              <a:tr h="0">
-                <a:tc>
-                  <a:txBody>
-                    <a:bodyPr/>
-                    <a:lstStyle/>
-                    <a:p>
-                      <a:pPr algn="l" indent="0" marL="0">
-                        <a:buNone/>
-                      </a:pPr>
-                      <a:r>
-                        <a:rPr lang="en-US" sz="830" b="1" dirty="0">
-                          <a:solidFill>
-                            <a:srgbClr val="1E2761"/>
-                          </a:solidFill>
-                          <a:latin typeface="Calibri" pitchFamily="34" charset="0"/>
-                          <a:ea typeface="Calibri" pitchFamily="34" charset="-122"/>
-                          <a:cs typeface="Calibri" pitchFamily="34" charset="-120"/>
-                        </a:rPr>
                         <a:t>Primary blockchain</a:t>
                       </a:r>
                       <a:endParaRPr lang="en-US" sz="830" dirty="0">
@@ -21888,7 +22366,7 @@
                       <a:tailEnd type="none" w="med" len="med"/>
                     </a:lnB>
                     <a:solidFill>
-                      <a:srgbClr val="FFFFFF"/>
+                      <a:srgbClr val="F5F8FD"/>
                     </a:solidFill>
                   </a:tcPr>
                 </a:tc>
@@ -21956,7 +22434,7 @@
                       <a:tailEnd type="none" w="med" len="med"/>
                     </a:lnB>
                     <a:solidFill>
-                      <a:srgbClr val="FFFFFF"/>
+                      <a:srgbClr val="F5F8FD"/>
                     </a:solidFill>
                   </a:tcPr>
                 </a:tc>
@@ -22024,7 +22502,7 @@
                       <a:tailEnd type="none" w="med" len="med"/>
                     </a:lnB>
                     <a:solidFill>
-                      <a:srgbClr val="FFFFFF"/>
+                      <a:srgbClr val="F5F8FD"/>
                     </a:solidFill>
                   </a:tcPr>
                 </a:tc>
@@ -22092,7 +22570,7 @@
                       <a:tailEnd type="none" w="med" len="med"/>
                     </a:lnB>
                     <a:solidFill>
-                      <a:srgbClr val="FFFFFF"/>
+                      <a:srgbClr val="F5F8FD"/>
                     </a:solidFill>
                   </a:tcPr>
                 </a:tc>
@@ -22160,7 +22638,7 @@
                       <a:tailEnd type="none" w="med" len="med"/>
                     </a:lnB>
                     <a:solidFill>
-                      <a:srgbClr val="FFFFFF"/>
+                      <a:srgbClr val="F5F8FD"/>
                     </a:solidFill>
                   </a:tcPr>
                 </a:tc>
@@ -22228,7 +22706,7 @@
                       <a:tailEnd type="none" w="med" len="med"/>
                     </a:lnB>
                     <a:solidFill>
-                      <a:srgbClr val="FFFFFF"/>
+                      <a:srgbClr val="F5F8FD"/>
                     </a:solidFill>
                   </a:tcPr>
                 </a:tc>
@@ -22296,7 +22774,7 @@
                       <a:tailEnd type="none" w="med" len="med"/>
                     </a:lnB>
                     <a:solidFill>
-                      <a:srgbClr val="FFFFFF"/>
+                      <a:srgbClr val="F5F8FD"/>
                     </a:solidFill>
                   </a:tcPr>
                 </a:tc>
@@ -22366,7 +22844,7 @@
                       <a:tailEnd type="none" w="med" len="med"/>
                     </a:lnB>
                     <a:solidFill>
-                      <a:srgbClr val="F5F8FD"/>
+                      <a:srgbClr val="FFFFFF"/>
                     </a:solidFill>
                   </a:tcPr>
                 </a:tc>
@@ -22434,7 +22912,7 @@
                       <a:tailEnd type="none" w="med" len="med"/>
                     </a:lnB>
                     <a:solidFill>
-                      <a:srgbClr val="F5F8FD"/>
+                      <a:srgbClr val="FFFFFF"/>
                     </a:solidFill>
                   </a:tcPr>
                 </a:tc>
@@ -22502,7 +22980,7 @@
                       <a:tailEnd type="none" w="med" len="med"/>
                     </a:lnB>
                     <a:solidFill>
-                      <a:srgbClr val="F5F8FD"/>
+                      <a:srgbClr val="FFFFFF"/>
                     </a:solidFill>
                   </a:tcPr>
                 </a:tc>
@@ -22570,7 +23048,7 @@
                       <a:tailEnd type="none" w="med" len="med"/>
                     </a:lnB>
                     <a:solidFill>
-                      <a:srgbClr val="F5F8FD"/>
+                      <a:srgbClr val="FFFFFF"/>
                     </a:solidFill>
                   </a:tcPr>
                 </a:tc>
@@ -22638,7 +23116,7 @@
                       <a:tailEnd type="none" w="med" len="med"/>
                     </a:lnB>
                     <a:solidFill>
-                      <a:srgbClr val="F5F8FD"/>
+                      <a:srgbClr val="FFFFFF"/>
                     </a:solidFill>
                   </a:tcPr>
                 </a:tc>
@@ -22706,7 +23184,7 @@
                       <a:tailEnd type="none" w="med" len="med"/>
                     </a:lnB>
                     <a:solidFill>
-                      <a:srgbClr val="F5F8FD"/>
+                      <a:srgbClr val="FFFFFF"/>
                     </a:solidFill>
                   </a:tcPr>
                 </a:tc>
@@ -22774,7 +23252,7 @@
                       <a:tailEnd type="none" w="med" len="med"/>
                     </a:lnB>
                     <a:solidFill>
-                      <a:srgbClr val="F5F8FD"/>
+                      <a:srgbClr val="FFFFFF"/>
                     </a:solidFill>
                   </a:tcPr>
                 </a:tc>
@@ -22844,7 +23322,7 @@
                       <a:tailEnd type="none" w="med" len="med"/>
                     </a:lnB>
                     <a:solidFill>
-                      <a:srgbClr val="FFFFFF"/>
+                      <a:srgbClr val="F5F8FD"/>
                     </a:solidFill>
                   </a:tcPr>
                 </a:tc>
@@ -22912,7 +23390,7 @@
                       <a:tailEnd type="none" w="med" len="med"/>
                     </a:lnB>
                     <a:solidFill>
-                      <a:srgbClr val="FFFFFF"/>
+                      <a:srgbClr val="F5F8FD"/>
                     </a:solidFill>
                   </a:tcPr>
                 </a:tc>
@@ -22980,7 +23458,7 @@
                       <a:tailEnd type="none" w="med" len="med"/>
                     </a:lnB>
                     <a:solidFill>
-                      <a:srgbClr val="FFFFFF"/>
+                      <a:srgbClr val="F5F8FD"/>
                     </a:solidFill>
                   </a:tcPr>
                 </a:tc>
@@ -23048,7 +23526,7 @@
                       <a:tailEnd type="none" w="med" len="med"/>
                     </a:lnB>
                     <a:solidFill>
-                      <a:srgbClr val="FFFFFF"/>
+                      <a:srgbClr val="F5F8FD"/>
                     </a:solidFill>
                   </a:tcPr>
                 </a:tc>
@@ -23116,7 +23594,7 @@
                       <a:tailEnd type="none" w="med" len="med"/>
                     </a:lnB>
                     <a:solidFill>
-                      <a:srgbClr val="FFFFFF"/>
+                      <a:srgbClr val="F5F8FD"/>
                     </a:solidFill>
                   </a:tcPr>
                 </a:tc>
@@ -23184,7 +23662,7 @@
                       <a:tailEnd type="none" w="med" len="med"/>
                     </a:lnB>
                     <a:solidFill>
-                      <a:srgbClr val="FFFFFF"/>
+                      <a:srgbClr val="F5F8FD"/>
                     </a:solidFill>
                   </a:tcPr>
                 </a:tc>
@@ -23252,7 +23730,7 @@
                       <a:tailEnd type="none" w="med" len="med"/>
                     </a:lnB>
                     <a:solidFill>
-                      <a:srgbClr val="FFFFFF"/>
+                      <a:srgbClr val="F5F8FD"/>
                     </a:solidFill>
                   </a:tcPr>
                 </a:tc>
@@ -23322,7 +23800,7 @@
                       <a:tailEnd type="none" w="med" len="med"/>
                     </a:lnB>
                     <a:solidFill>
-                      <a:srgbClr val="F5F8FD"/>
+                      <a:srgbClr val="FFFFFF"/>
                     </a:solidFill>
                   </a:tcPr>
                 </a:tc>
@@ -23390,7 +23868,7 @@
                       <a:tailEnd type="none" w="med" len="med"/>
                     </a:lnB>
                     <a:solidFill>
-                      <a:srgbClr val="F5F8FD"/>
+                      <a:srgbClr val="FFFFFF"/>
                     </a:solidFill>
                   </a:tcPr>
                 </a:tc>
@@ -23458,7 +23936,7 @@
                       <a:tailEnd type="none" w="med" len="med"/>
                     </a:lnB>
                     <a:solidFill>
-                      <a:srgbClr val="F5F8FD"/>
+                      <a:srgbClr val="FFFFFF"/>
                     </a:solidFill>
                   </a:tcPr>
                 </a:tc>
@@ -23526,7 +24004,7 @@
                       <a:tailEnd type="none" w="med" len="med"/>
                     </a:lnB>
                     <a:solidFill>
-                      <a:srgbClr val="F5F8FD"/>
+                      <a:srgbClr val="FFFFFF"/>
                     </a:solidFill>
                   </a:tcPr>
                 </a:tc>
@@ -23594,7 +24072,7 @@
                       <a:tailEnd type="none" w="med" len="med"/>
                     </a:lnB>
                     <a:solidFill>
-                      <a:srgbClr val="F5F8FD"/>
+                      <a:srgbClr val="FFFFFF"/>
                     </a:solidFill>
                   </a:tcPr>
                 </a:tc>
@@ -23662,7 +24140,7 @@
                       <a:tailEnd type="none" w="med" len="med"/>
                     </a:lnB>
                     <a:solidFill>
-                      <a:srgbClr val="F5F8FD"/>
+                      <a:srgbClr val="FFFFFF"/>
                     </a:solidFill>
                   </a:tcPr>
                 </a:tc>
@@ -23730,7 +24208,7 @@
                       <a:tailEnd type="none" w="med" len="med"/>
                     </a:lnB>
                     <a:solidFill>
-                      <a:srgbClr val="F5F8FD"/>
+                      <a:srgbClr val="FFFFFF"/>
                     </a:solidFill>
                   </a:tcPr>
                 </a:tc>

--- a/docs/presentations/Tokenized_Funds_Comparative_Analysis.pptx
+++ b/docs/presentations/Tokenized_Funds_Comparative_Analysis.pptx
@@ -23275,6 +23275,484 @@
                           <a:ea typeface="Calibri" pitchFamily="34" charset="-122"/>
                           <a:cs typeface="Calibri" pitchFamily="34" charset="-120"/>
                         </a:rPr>
+                        <a:t>Used as DeFi/lending collateral?</a:t>
+                      </a:r>
+                      <a:endParaRPr lang="en-US" sz="830" dirty="0">
+                        <a:latin typeface="Calibri" charset="0"/>
+                        <a:ea typeface="Calibri" charset="0"/>
+                        <a:cs typeface="Calibri" charset="0"/>
+                      </a:endParaRPr>
+                    </a:p>
+                  </a:txBody>
+                  <a:tcPr marL="76200" marR="76200" marT="38100" marB="38100" anchor="ctr">
+                    <a:lnL w="9525" cap="flat" cmpd="sng" algn="ctr">
+                      <a:solidFill>
+                        <a:srgbClr val="D7E1F5"/>
+                      </a:solidFill>
+                      <a:prstDash val="solid"/>
+                      <a:round/>
+                      <a:headEnd type="none" w="med" len="med"/>
+                      <a:tailEnd type="none" w="med" len="med"/>
+                    </a:lnL>
+                    <a:lnR w="9525" cap="flat" cmpd="sng" algn="ctr">
+                      <a:solidFill>
+                        <a:srgbClr val="D7E1F5"/>
+                      </a:solidFill>
+                      <a:prstDash val="solid"/>
+                      <a:round/>
+                      <a:headEnd type="none" w="med" len="med"/>
+                      <a:tailEnd type="none" w="med" len="med"/>
+                    </a:lnR>
+                    <a:lnT w="9525" cap="flat" cmpd="sng" algn="ctr">
+                      <a:solidFill>
+                        <a:srgbClr val="D7E1F5"/>
+                      </a:solidFill>
+                      <a:prstDash val="solid"/>
+                      <a:round/>
+                      <a:headEnd type="none" w="med" len="med"/>
+                      <a:tailEnd type="none" w="med" len="med"/>
+                    </a:lnT>
+                    <a:lnB w="9525" cap="flat" cmpd="sng" algn="ctr">
+                      <a:solidFill>
+                        <a:srgbClr val="D7E1F5"/>
+                      </a:solidFill>
+                      <a:prstDash val="solid"/>
+                      <a:round/>
+                      <a:headEnd type="none" w="med" len="med"/>
+                      <a:tailEnd type="none" w="med" len="med"/>
+                    </a:lnB>
+                    <a:solidFill>
+                      <a:srgbClr val="F5F8FD"/>
+                    </a:solidFill>
+                  </a:tcPr>
+                </a:tc>
+                <a:tc>
+                  <a:txBody>
+                    <a:bodyPr/>
+                    <a:lstStyle/>
+                    <a:p>
+                      <a:pPr algn="ctr" indent="0" marL="0">
+                        <a:buNone/>
+                      </a:pPr>
+                      <a:r>
+                        <a:rPr lang="en-US" sz="830" dirty="0">
+                          <a:solidFill>
+                            <a:srgbClr val="3A4566"/>
+                          </a:solidFill>
+                          <a:latin typeface="Calibri" pitchFamily="34" charset="0"/>
+                          <a:ea typeface="Calibri" pitchFamily="34" charset="-122"/>
+                          <a:cs typeface="Calibri" pitchFamily="34" charset="-120"/>
+                        </a:rPr>
+                        <a:t>Yes — intra-Franklin only</a:t>
+                      </a:r>
+                      <a:endParaRPr lang="en-US" sz="830" dirty="0">
+                        <a:latin typeface="Calibri" charset="0"/>
+                        <a:ea typeface="Calibri" charset="0"/>
+                        <a:cs typeface="Calibri" charset="0"/>
+                      </a:endParaRPr>
+                    </a:p>
+                  </a:txBody>
+                  <a:tcPr marL="76200" marR="76200" marT="38100" marB="38100" anchor="ctr">
+                    <a:lnL w="9525" cap="flat" cmpd="sng" algn="ctr">
+                      <a:solidFill>
+                        <a:srgbClr val="D7E1F5"/>
+                      </a:solidFill>
+                      <a:prstDash val="solid"/>
+                      <a:round/>
+                      <a:headEnd type="none" w="med" len="med"/>
+                      <a:tailEnd type="none" w="med" len="med"/>
+                    </a:lnL>
+                    <a:lnR w="9525" cap="flat" cmpd="sng" algn="ctr">
+                      <a:solidFill>
+                        <a:srgbClr val="D7E1F5"/>
+                      </a:solidFill>
+                      <a:prstDash val="solid"/>
+                      <a:round/>
+                      <a:headEnd type="none" w="med" len="med"/>
+                      <a:tailEnd type="none" w="med" len="med"/>
+                    </a:lnR>
+                    <a:lnT w="9525" cap="flat" cmpd="sng" algn="ctr">
+                      <a:solidFill>
+                        <a:srgbClr val="D7E1F5"/>
+                      </a:solidFill>
+                      <a:prstDash val="solid"/>
+                      <a:round/>
+                      <a:headEnd type="none" w="med" len="med"/>
+                      <a:tailEnd type="none" w="med" len="med"/>
+                    </a:lnT>
+                    <a:lnB w="9525" cap="flat" cmpd="sng" algn="ctr">
+                      <a:solidFill>
+                        <a:srgbClr val="D7E1F5"/>
+                      </a:solidFill>
+                      <a:prstDash val="solid"/>
+                      <a:round/>
+                      <a:headEnd type="none" w="med" len="med"/>
+                      <a:tailEnd type="none" w="med" len="med"/>
+                    </a:lnB>
+                    <a:solidFill>
+                      <a:srgbClr val="F5F8FD"/>
+                    </a:solidFill>
+                  </a:tcPr>
+                </a:tc>
+                <a:tc>
+                  <a:txBody>
+                    <a:bodyPr/>
+                    <a:lstStyle/>
+                    <a:p>
+                      <a:pPr algn="ctr" indent="0" marL="0">
+                        <a:buNone/>
+                      </a:pPr>
+                      <a:r>
+                        <a:rPr lang="en-US" sz="830" dirty="0">
+                          <a:solidFill>
+                            <a:srgbClr val="3A4566"/>
+                          </a:solidFill>
+                          <a:latin typeface="Calibri" pitchFamily="34" charset="0"/>
+                          <a:ea typeface="Calibri" pitchFamily="34" charset="-122"/>
+                          <a:cs typeface="Calibri" pitchFamily="34" charset="-120"/>
+                        </a:rPr>
+                        <a:t>Yes — Binance (BNB Chain)</a:t>
+                      </a:r>
+                      <a:endParaRPr lang="en-US" sz="830" dirty="0">
+                        <a:latin typeface="Calibri" charset="0"/>
+                        <a:ea typeface="Calibri" charset="0"/>
+                        <a:cs typeface="Calibri" charset="0"/>
+                      </a:endParaRPr>
+                    </a:p>
+                  </a:txBody>
+                  <a:tcPr marL="76200" marR="76200" marT="38100" marB="38100" anchor="ctr">
+                    <a:lnL w="9525" cap="flat" cmpd="sng" algn="ctr">
+                      <a:solidFill>
+                        <a:srgbClr val="D7E1F5"/>
+                      </a:solidFill>
+                      <a:prstDash val="solid"/>
+                      <a:round/>
+                      <a:headEnd type="none" w="med" len="med"/>
+                      <a:tailEnd type="none" w="med" len="med"/>
+                    </a:lnL>
+                    <a:lnR w="9525" cap="flat" cmpd="sng" algn="ctr">
+                      <a:solidFill>
+                        <a:srgbClr val="D7E1F5"/>
+                      </a:solidFill>
+                      <a:prstDash val="solid"/>
+                      <a:round/>
+                      <a:headEnd type="none" w="med" len="med"/>
+                      <a:tailEnd type="none" w="med" len="med"/>
+                    </a:lnR>
+                    <a:lnT w="9525" cap="flat" cmpd="sng" algn="ctr">
+                      <a:solidFill>
+                        <a:srgbClr val="D7E1F5"/>
+                      </a:solidFill>
+                      <a:prstDash val="solid"/>
+                      <a:round/>
+                      <a:headEnd type="none" w="med" len="med"/>
+                      <a:tailEnd type="none" w="med" len="med"/>
+                    </a:lnT>
+                    <a:lnB w="9525" cap="flat" cmpd="sng" algn="ctr">
+                      <a:solidFill>
+                        <a:srgbClr val="D7E1F5"/>
+                      </a:solidFill>
+                      <a:prstDash val="solid"/>
+                      <a:round/>
+                      <a:headEnd type="none" w="med" len="med"/>
+                      <a:tailEnd type="none" w="med" len="med"/>
+                    </a:lnB>
+                    <a:solidFill>
+                      <a:srgbClr val="F5F8FD"/>
+                    </a:solidFill>
+                  </a:tcPr>
+                </a:tc>
+                <a:tc>
+                  <a:txBody>
+                    <a:bodyPr/>
+                    <a:lstStyle/>
+                    <a:p>
+                      <a:pPr algn="ctr" indent="0" marL="0">
+                        <a:buNone/>
+                      </a:pPr>
+                      <a:r>
+                        <a:rPr lang="en-US" sz="830" dirty="0">
+                          <a:solidFill>
+                            <a:srgbClr val="3A4566"/>
+                          </a:solidFill>
+                          <a:latin typeface="Calibri" pitchFamily="34" charset="0"/>
+                          <a:ea typeface="Calibri" pitchFamily="34" charset="-122"/>
+                          <a:cs typeface="Calibri" pitchFamily="34" charset="-120"/>
+                        </a:rPr>
+                        <a:t>Yes — limited KYC pools (Aave)</a:t>
+                      </a:r>
+                      <a:endParaRPr lang="en-US" sz="830" dirty="0">
+                        <a:latin typeface="Calibri" charset="0"/>
+                        <a:ea typeface="Calibri" charset="0"/>
+                        <a:cs typeface="Calibri" charset="0"/>
+                      </a:endParaRPr>
+                    </a:p>
+                  </a:txBody>
+                  <a:tcPr marL="76200" marR="76200" marT="38100" marB="38100" anchor="ctr">
+                    <a:lnL w="9525" cap="flat" cmpd="sng" algn="ctr">
+                      <a:solidFill>
+                        <a:srgbClr val="D7E1F5"/>
+                      </a:solidFill>
+                      <a:prstDash val="solid"/>
+                      <a:round/>
+                      <a:headEnd type="none" w="med" len="med"/>
+                      <a:tailEnd type="none" w="med" len="med"/>
+                    </a:lnL>
+                    <a:lnR w="9525" cap="flat" cmpd="sng" algn="ctr">
+                      <a:solidFill>
+                        <a:srgbClr val="D7E1F5"/>
+                      </a:solidFill>
+                      <a:prstDash val="solid"/>
+                      <a:round/>
+                      <a:headEnd type="none" w="med" len="med"/>
+                      <a:tailEnd type="none" w="med" len="med"/>
+                    </a:lnR>
+                    <a:lnT w="9525" cap="flat" cmpd="sng" algn="ctr">
+                      <a:solidFill>
+                        <a:srgbClr val="D7E1F5"/>
+                      </a:solidFill>
+                      <a:prstDash val="solid"/>
+                      <a:round/>
+                      <a:headEnd type="none" w="med" len="med"/>
+                      <a:tailEnd type="none" w="med" len="med"/>
+                    </a:lnT>
+                    <a:lnB w="9525" cap="flat" cmpd="sng" algn="ctr">
+                      <a:solidFill>
+                        <a:srgbClr val="D7E1F5"/>
+                      </a:solidFill>
+                      <a:prstDash val="solid"/>
+                      <a:round/>
+                      <a:headEnd type="none" w="med" len="med"/>
+                      <a:tailEnd type="none" w="med" len="med"/>
+                    </a:lnB>
+                    <a:solidFill>
+                      <a:srgbClr val="F5F8FD"/>
+                    </a:solidFill>
+                  </a:tcPr>
+                </a:tc>
+                <a:tc>
+                  <a:txBody>
+                    <a:bodyPr/>
+                    <a:lstStyle/>
+                    <a:p>
+                      <a:pPr algn="ctr" indent="0" marL="0">
+                        <a:buNone/>
+                      </a:pPr>
+                      <a:r>
+                        <a:rPr lang="en-US" sz="830" dirty="0">
+                          <a:solidFill>
+                            <a:srgbClr val="3A4566"/>
+                          </a:solidFill>
+                          <a:latin typeface="Calibri" pitchFamily="34" charset="0"/>
+                          <a:ea typeface="Calibri" pitchFamily="34" charset="-122"/>
+                          <a:cs typeface="Calibri" pitchFamily="34" charset="-120"/>
+                        </a:rPr>
+                        <a:t>Yes — Aave/Kamino/Morpho, &gt;$120M</a:t>
+                      </a:r>
+                      <a:endParaRPr lang="en-US" sz="830" dirty="0">
+                        <a:latin typeface="Calibri" charset="0"/>
+                        <a:ea typeface="Calibri" charset="0"/>
+                        <a:cs typeface="Calibri" charset="0"/>
+                      </a:endParaRPr>
+                    </a:p>
+                  </a:txBody>
+                  <a:tcPr marL="76200" marR="76200" marT="38100" marB="38100" anchor="ctr">
+                    <a:lnL w="9525" cap="flat" cmpd="sng" algn="ctr">
+                      <a:solidFill>
+                        <a:srgbClr val="D7E1F5"/>
+                      </a:solidFill>
+                      <a:prstDash val="solid"/>
+                      <a:round/>
+                      <a:headEnd type="none" w="med" len="med"/>
+                      <a:tailEnd type="none" w="med" len="med"/>
+                    </a:lnL>
+                    <a:lnR w="9525" cap="flat" cmpd="sng" algn="ctr">
+                      <a:solidFill>
+                        <a:srgbClr val="D7E1F5"/>
+                      </a:solidFill>
+                      <a:prstDash val="solid"/>
+                      <a:round/>
+                      <a:headEnd type="none" w="med" len="med"/>
+                      <a:tailEnd type="none" w="med" len="med"/>
+                    </a:lnR>
+                    <a:lnT w="9525" cap="flat" cmpd="sng" algn="ctr">
+                      <a:solidFill>
+                        <a:srgbClr val="D7E1F5"/>
+                      </a:solidFill>
+                      <a:prstDash val="solid"/>
+                      <a:round/>
+                      <a:headEnd type="none" w="med" len="med"/>
+                      <a:tailEnd type="none" w="med" len="med"/>
+                    </a:lnT>
+                    <a:lnB w="9525" cap="flat" cmpd="sng" algn="ctr">
+                      <a:solidFill>
+                        <a:srgbClr val="D7E1F5"/>
+                      </a:solidFill>
+                      <a:prstDash val="solid"/>
+                      <a:round/>
+                      <a:headEnd type="none" w="med" len="med"/>
+                      <a:tailEnd type="none" w="med" len="med"/>
+                    </a:lnB>
+                    <a:solidFill>
+                      <a:srgbClr val="F5F8FD"/>
+                    </a:solidFill>
+                  </a:tcPr>
+                </a:tc>
+                <a:tc>
+                  <a:txBody>
+                    <a:bodyPr/>
+                    <a:lstStyle/>
+                    <a:p>
+                      <a:pPr algn="ctr" indent="0" marL="0">
+                        <a:buNone/>
+                      </a:pPr>
+                      <a:r>
+                        <a:rPr lang="en-US" sz="830" dirty="0">
+                          <a:solidFill>
+                            <a:srgbClr val="3A4566"/>
+                          </a:solidFill>
+                          <a:latin typeface="Calibri" pitchFamily="34" charset="0"/>
+                          <a:ea typeface="Calibri" pitchFamily="34" charset="-122"/>
+                          <a:cs typeface="Calibri" pitchFamily="34" charset="-120"/>
+                        </a:rPr>
+                        <a:t>Yes — Flux Finance (KYC pool)</a:t>
+                      </a:r>
+                      <a:endParaRPr lang="en-US" sz="830" dirty="0">
+                        <a:latin typeface="Calibri" charset="0"/>
+                        <a:ea typeface="Calibri" charset="0"/>
+                        <a:cs typeface="Calibri" charset="0"/>
+                      </a:endParaRPr>
+                    </a:p>
+                  </a:txBody>
+                  <a:tcPr marL="76200" marR="76200" marT="38100" marB="38100" anchor="ctr">
+                    <a:lnL w="9525" cap="flat" cmpd="sng" algn="ctr">
+                      <a:solidFill>
+                        <a:srgbClr val="D7E1F5"/>
+                      </a:solidFill>
+                      <a:prstDash val="solid"/>
+                      <a:round/>
+                      <a:headEnd type="none" w="med" len="med"/>
+                      <a:tailEnd type="none" w="med" len="med"/>
+                    </a:lnL>
+                    <a:lnR w="9525" cap="flat" cmpd="sng" algn="ctr">
+                      <a:solidFill>
+                        <a:srgbClr val="D7E1F5"/>
+                      </a:solidFill>
+                      <a:prstDash val="solid"/>
+                      <a:round/>
+                      <a:headEnd type="none" w="med" len="med"/>
+                      <a:tailEnd type="none" w="med" len="med"/>
+                    </a:lnR>
+                    <a:lnT w="9525" cap="flat" cmpd="sng" algn="ctr">
+                      <a:solidFill>
+                        <a:srgbClr val="D7E1F5"/>
+                      </a:solidFill>
+                      <a:prstDash val="solid"/>
+                      <a:round/>
+                      <a:headEnd type="none" w="med" len="med"/>
+                      <a:tailEnd type="none" w="med" len="med"/>
+                    </a:lnT>
+                    <a:lnB w="9525" cap="flat" cmpd="sng" algn="ctr">
+                      <a:solidFill>
+                        <a:srgbClr val="D7E1F5"/>
+                      </a:solidFill>
+                      <a:prstDash val="solid"/>
+                      <a:round/>
+                      <a:headEnd type="none" w="med" len="med"/>
+                      <a:tailEnd type="none" w="med" len="med"/>
+                    </a:lnB>
+                    <a:solidFill>
+                      <a:srgbClr val="F5F8FD"/>
+                    </a:solidFill>
+                  </a:tcPr>
+                </a:tc>
+                <a:tc>
+                  <a:txBody>
+                    <a:bodyPr/>
+                    <a:lstStyle/>
+                    <a:p>
+                      <a:pPr algn="ctr" indent="0" marL="0">
+                        <a:buNone/>
+                      </a:pPr>
+                      <a:r>
+                        <a:rPr lang="en-US" sz="830" dirty="0">
+                          <a:solidFill>
+                            <a:srgbClr val="3A4566"/>
+                          </a:solidFill>
+                          <a:latin typeface="Calibri" pitchFamily="34" charset="0"/>
+                          <a:ea typeface="Calibri" pitchFamily="34" charset="-122"/>
+                          <a:cs typeface="Calibri" pitchFamily="34" charset="-120"/>
+                        </a:rPr>
+                        <a:t>Yes — LotusUSD reserve backing</a:t>
+                      </a:r>
+                      <a:endParaRPr lang="en-US" sz="830" dirty="0">
+                        <a:latin typeface="Calibri" charset="0"/>
+                        <a:ea typeface="Calibri" charset="0"/>
+                        <a:cs typeface="Calibri" charset="0"/>
+                      </a:endParaRPr>
+                    </a:p>
+                  </a:txBody>
+                  <a:tcPr marL="76200" marR="76200" marT="38100" marB="38100" anchor="ctr">
+                    <a:lnL w="9525" cap="flat" cmpd="sng" algn="ctr">
+                      <a:solidFill>
+                        <a:srgbClr val="D7E1F5"/>
+                      </a:solidFill>
+                      <a:prstDash val="solid"/>
+                      <a:round/>
+                      <a:headEnd type="none" w="med" len="med"/>
+                      <a:tailEnd type="none" w="med" len="med"/>
+                    </a:lnL>
+                    <a:lnR w="9525" cap="flat" cmpd="sng" algn="ctr">
+                      <a:solidFill>
+                        <a:srgbClr val="D7E1F5"/>
+                      </a:solidFill>
+                      <a:prstDash val="solid"/>
+                      <a:round/>
+                      <a:headEnd type="none" w="med" len="med"/>
+                      <a:tailEnd type="none" w="med" len="med"/>
+                    </a:lnR>
+                    <a:lnT w="9525" cap="flat" cmpd="sng" algn="ctr">
+                      <a:solidFill>
+                        <a:srgbClr val="D7E1F5"/>
+                      </a:solidFill>
+                      <a:prstDash val="solid"/>
+                      <a:round/>
+                      <a:headEnd type="none" w="med" len="med"/>
+                      <a:tailEnd type="none" w="med" len="med"/>
+                    </a:lnT>
+                    <a:lnB w="9525" cap="flat" cmpd="sng" algn="ctr">
+                      <a:solidFill>
+                        <a:srgbClr val="D7E1F5"/>
+                      </a:solidFill>
+                      <a:prstDash val="solid"/>
+                      <a:round/>
+                      <a:headEnd type="none" w="med" len="med"/>
+                      <a:tailEnd type="none" w="med" len="med"/>
+                    </a:lnB>
+                    <a:solidFill>
+                      <a:srgbClr val="F5F8FD"/>
+                    </a:solidFill>
+                  </a:tcPr>
+                </a:tc>
+              </a:tr>
+              <a:tr h="0">
+                <a:tc>
+                  <a:txBody>
+                    <a:bodyPr/>
+                    <a:lstStyle/>
+                    <a:p>
+                      <a:pPr algn="l" indent="0" marL="0">
+                        <a:buNone/>
+                      </a:pPr>
+                      <a:r>
+                        <a:rPr lang="en-US" sz="830" b="1" dirty="0">
+                          <a:solidFill>
+                            <a:srgbClr val="1E2761"/>
+                          </a:solidFill>
+                          <a:latin typeface="Calibri" pitchFamily="34" charset="0"/>
+                          <a:ea typeface="Calibri" pitchFamily="34" charset="-122"/>
+                          <a:cs typeface="Calibri" pitchFamily="34" charset="-120"/>
+                        </a:rPr>
                         <a:t>Settlement rail</a:t>
                       </a:r>
                       <a:endParaRPr lang="en-US" sz="830" dirty="0">
@@ -23322,7 +23800,7 @@
                       <a:tailEnd type="none" w="med" len="med"/>
                     </a:lnB>
                     <a:solidFill>
-                      <a:srgbClr val="F5F8FD"/>
+                      <a:srgbClr val="FFFFFF"/>
                     </a:solidFill>
                   </a:tcPr>
                 </a:tc>
@@ -23390,7 +23868,7 @@
                       <a:tailEnd type="none" w="med" len="med"/>
                     </a:lnB>
                     <a:solidFill>
-                      <a:srgbClr val="F5F8FD"/>
+                      <a:srgbClr val="FFFFFF"/>
                     </a:solidFill>
                   </a:tcPr>
                 </a:tc>
@@ -23458,7 +23936,7 @@
                       <a:tailEnd type="none" w="med" len="med"/>
                     </a:lnB>
                     <a:solidFill>
-                      <a:srgbClr val="F5F8FD"/>
+                      <a:srgbClr val="FFFFFF"/>
                     </a:solidFill>
                   </a:tcPr>
                 </a:tc>
@@ -23526,7 +24004,7 @@
                       <a:tailEnd type="none" w="med" len="med"/>
                     </a:lnB>
                     <a:solidFill>
-                      <a:srgbClr val="F5F8FD"/>
+                      <a:srgbClr val="FFFFFF"/>
                     </a:solidFill>
                   </a:tcPr>
                 </a:tc>
@@ -23594,7 +24072,7 @@
                       <a:tailEnd type="none" w="med" len="med"/>
                     </a:lnB>
                     <a:solidFill>
-                      <a:srgbClr val="F5F8FD"/>
+                      <a:srgbClr val="FFFFFF"/>
                     </a:solidFill>
                   </a:tcPr>
                 </a:tc>
@@ -23662,7 +24140,7 @@
                       <a:tailEnd type="none" w="med" len="med"/>
                     </a:lnB>
                     <a:solidFill>
-                      <a:srgbClr val="F5F8FD"/>
+                      <a:srgbClr val="FFFFFF"/>
                     </a:solidFill>
                   </a:tcPr>
                 </a:tc>
@@ -23730,7 +24208,7 @@
                       <a:tailEnd type="none" w="med" len="med"/>
                     </a:lnB>
                     <a:solidFill>
-                      <a:srgbClr val="F5F8FD"/>
+                      <a:srgbClr val="FFFFFF"/>
                     </a:solidFill>
                   </a:tcPr>
                 </a:tc>
@@ -23800,7 +24278,7 @@
                       <a:tailEnd type="none" w="med" len="med"/>
                     </a:lnB>
                     <a:solidFill>
-                      <a:srgbClr val="FFFFFF"/>
+                      <a:srgbClr val="F5F8FD"/>
                     </a:solidFill>
                   </a:tcPr>
                 </a:tc>
@@ -23868,7 +24346,7 @@
                       <a:tailEnd type="none" w="med" len="med"/>
                     </a:lnB>
                     <a:solidFill>
-                      <a:srgbClr val="FFFFFF"/>
+                      <a:srgbClr val="F5F8FD"/>
                     </a:solidFill>
                   </a:tcPr>
                 </a:tc>
@@ -23936,7 +24414,7 @@
                       <a:tailEnd type="none" w="med" len="med"/>
                     </a:lnB>
                     <a:solidFill>
-                      <a:srgbClr val="FFFFFF"/>
+                      <a:srgbClr val="F5F8FD"/>
                     </a:solidFill>
                   </a:tcPr>
                 </a:tc>
@@ -24004,7 +24482,7 @@
                       <a:tailEnd type="none" w="med" len="med"/>
                     </a:lnB>
                     <a:solidFill>
-                      <a:srgbClr val="FFFFFF"/>
+                      <a:srgbClr val="F5F8FD"/>
                     </a:solidFill>
                   </a:tcPr>
                 </a:tc>
@@ -24072,7 +24550,7 @@
                       <a:tailEnd type="none" w="med" len="med"/>
                     </a:lnB>
                     <a:solidFill>
-                      <a:srgbClr val="FFFFFF"/>
+                      <a:srgbClr val="F5F8FD"/>
                     </a:solidFill>
                   </a:tcPr>
                 </a:tc>
@@ -24140,7 +24618,7 @@
                       <a:tailEnd type="none" w="med" len="med"/>
                     </a:lnB>
                     <a:solidFill>
-                      <a:srgbClr val="FFFFFF"/>
+                      <a:srgbClr val="F5F8FD"/>
                     </a:solidFill>
                   </a:tcPr>
                 </a:tc>
@@ -24208,7 +24686,7 @@
                       <a:tailEnd type="none" w="med" len="med"/>
                     </a:lnB>
                     <a:solidFill>
-                      <a:srgbClr val="FFFFFF"/>
+                      <a:srgbClr val="F5F8FD"/>
                     </a:solidFill>
                   </a:tcPr>
                 </a:tc>

--- a/docs/presentations/Tokenized_Funds_Comparative_Analysis.pptx
+++ b/docs/presentations/Tokenized_Funds_Comparative_Analysis.pptx
@@ -23753,6 +23753,484 @@
                           <a:ea typeface="Calibri" pitchFamily="34" charset="-122"/>
                           <a:cs typeface="Calibri" pitchFamily="34" charset="-120"/>
                         </a:rPr>
+                        <a:t>Collateral agreement mechanism</a:t>
+                      </a:r>
+                      <a:endParaRPr lang="en-US" sz="830" dirty="0">
+                        <a:latin typeface="Calibri" charset="0"/>
+                        <a:ea typeface="Calibri" charset="0"/>
+                        <a:cs typeface="Calibri" charset="0"/>
+                      </a:endParaRPr>
+                    </a:p>
+                  </a:txBody>
+                  <a:tcPr marL="76200" marR="76200" marT="38100" marB="38100" anchor="ctr">
+                    <a:lnL w="9525" cap="flat" cmpd="sng" algn="ctr">
+                      <a:solidFill>
+                        <a:srgbClr val="D7E1F5"/>
+                      </a:solidFill>
+                      <a:prstDash val="solid"/>
+                      <a:round/>
+                      <a:headEnd type="none" w="med" len="med"/>
+                      <a:tailEnd type="none" w="med" len="med"/>
+                    </a:lnL>
+                    <a:lnR w="9525" cap="flat" cmpd="sng" algn="ctr">
+                      <a:solidFill>
+                        <a:srgbClr val="D7E1F5"/>
+                      </a:solidFill>
+                      <a:prstDash val="solid"/>
+                      <a:round/>
+                      <a:headEnd type="none" w="med" len="med"/>
+                      <a:tailEnd type="none" w="med" len="med"/>
+                    </a:lnR>
+                    <a:lnT w="9525" cap="flat" cmpd="sng" algn="ctr">
+                      <a:solidFill>
+                        <a:srgbClr val="D7E1F5"/>
+                      </a:solidFill>
+                      <a:prstDash val="solid"/>
+                      <a:round/>
+                      <a:headEnd type="none" w="med" len="med"/>
+                      <a:tailEnd type="none" w="med" len="med"/>
+                    </a:lnT>
+                    <a:lnB w="9525" cap="flat" cmpd="sng" algn="ctr">
+                      <a:solidFill>
+                        <a:srgbClr val="D7E1F5"/>
+                      </a:solidFill>
+                      <a:prstDash val="solid"/>
+                      <a:round/>
+                      <a:headEnd type="none" w="med" len="med"/>
+                      <a:tailEnd type="none" w="med" len="med"/>
+                    </a:lnB>
+                    <a:solidFill>
+                      <a:srgbClr val="FFFFFF"/>
+                    </a:solidFill>
+                  </a:tcPr>
+                </a:tc>
+                <a:tc>
+                  <a:txBody>
+                    <a:bodyPr/>
+                    <a:lstStyle/>
+                    <a:p>
+                      <a:pPr algn="ctr" indent="0" marL="0">
+                        <a:buNone/>
+                      </a:pPr>
+                      <a:r>
+                        <a:rPr lang="en-US" sz="830" dirty="0">
+                          <a:solidFill>
+                            <a:srgbClr val="3A4566"/>
+                          </a:solidFill>
+                          <a:latin typeface="Calibri" pitchFamily="34" charset="0"/>
+                          <a:ea typeface="Calibri" pitchFamily="34" charset="-122"/>
+                          <a:cs typeface="Calibri" pitchFamily="34" charset="-120"/>
+                        </a:rPr>
+                        <a:t>Off-chain (UCC Art. 8)</a:t>
+                      </a:r>
+                      <a:endParaRPr lang="en-US" sz="830" dirty="0">
+                        <a:latin typeface="Calibri" charset="0"/>
+                        <a:ea typeface="Calibri" charset="0"/>
+                        <a:cs typeface="Calibri" charset="0"/>
+                      </a:endParaRPr>
+                    </a:p>
+                  </a:txBody>
+                  <a:tcPr marL="76200" marR="76200" marT="38100" marB="38100" anchor="ctr">
+                    <a:lnL w="9525" cap="flat" cmpd="sng" algn="ctr">
+                      <a:solidFill>
+                        <a:srgbClr val="D7E1F5"/>
+                      </a:solidFill>
+                      <a:prstDash val="solid"/>
+                      <a:round/>
+                      <a:headEnd type="none" w="med" len="med"/>
+                      <a:tailEnd type="none" w="med" len="med"/>
+                    </a:lnL>
+                    <a:lnR w="9525" cap="flat" cmpd="sng" algn="ctr">
+                      <a:solidFill>
+                        <a:srgbClr val="D7E1F5"/>
+                      </a:solidFill>
+                      <a:prstDash val="solid"/>
+                      <a:round/>
+                      <a:headEnd type="none" w="med" len="med"/>
+                      <a:tailEnd type="none" w="med" len="med"/>
+                    </a:lnR>
+                    <a:lnT w="9525" cap="flat" cmpd="sng" algn="ctr">
+                      <a:solidFill>
+                        <a:srgbClr val="D7E1F5"/>
+                      </a:solidFill>
+                      <a:prstDash val="solid"/>
+                      <a:round/>
+                      <a:headEnd type="none" w="med" len="med"/>
+                      <a:tailEnd type="none" w="med" len="med"/>
+                    </a:lnT>
+                    <a:lnB w="9525" cap="flat" cmpd="sng" algn="ctr">
+                      <a:solidFill>
+                        <a:srgbClr val="D7E1F5"/>
+                      </a:solidFill>
+                      <a:prstDash val="solid"/>
+                      <a:round/>
+                      <a:headEnd type="none" w="med" len="med"/>
+                      <a:tailEnd type="none" w="med" len="med"/>
+                    </a:lnB>
+                    <a:solidFill>
+                      <a:srgbClr val="FFFFFF"/>
+                    </a:solidFill>
+                  </a:tcPr>
+                </a:tc>
+                <a:tc>
+                  <a:txBody>
+                    <a:bodyPr/>
+                    <a:lstStyle/>
+                    <a:p>
+                      <a:pPr algn="ctr" indent="0" marL="0">
+                        <a:buNone/>
+                      </a:pPr>
+                      <a:r>
+                        <a:rPr lang="en-US" sz="830" dirty="0">
+                          <a:solidFill>
+                            <a:srgbClr val="3A4566"/>
+                          </a:solidFill>
+                          <a:latin typeface="Calibri" pitchFamily="34" charset="0"/>
+                          <a:ea typeface="Calibri" pitchFamily="34" charset="-122"/>
+                          <a:cs typeface="Calibri" pitchFamily="34" charset="-120"/>
+                        </a:rPr>
+                        <a:t>On-chain (Allowlist escrow)</a:t>
+                      </a:r>
+                      <a:endParaRPr lang="en-US" sz="830" dirty="0">
+                        <a:latin typeface="Calibri" charset="0"/>
+                        <a:ea typeface="Calibri" charset="0"/>
+                        <a:cs typeface="Calibri" charset="0"/>
+                      </a:endParaRPr>
+                    </a:p>
+                  </a:txBody>
+                  <a:tcPr marL="76200" marR="76200" marT="38100" marB="38100" anchor="ctr">
+                    <a:lnL w="9525" cap="flat" cmpd="sng" algn="ctr">
+                      <a:solidFill>
+                        <a:srgbClr val="D7E1F5"/>
+                      </a:solidFill>
+                      <a:prstDash val="solid"/>
+                      <a:round/>
+                      <a:headEnd type="none" w="med" len="med"/>
+                      <a:tailEnd type="none" w="med" len="med"/>
+                    </a:lnL>
+                    <a:lnR w="9525" cap="flat" cmpd="sng" algn="ctr">
+                      <a:solidFill>
+                        <a:srgbClr val="D7E1F5"/>
+                      </a:solidFill>
+                      <a:prstDash val="solid"/>
+                      <a:round/>
+                      <a:headEnd type="none" w="med" len="med"/>
+                      <a:tailEnd type="none" w="med" len="med"/>
+                    </a:lnR>
+                    <a:lnT w="9525" cap="flat" cmpd="sng" algn="ctr">
+                      <a:solidFill>
+                        <a:srgbClr val="D7E1F5"/>
+                      </a:solidFill>
+                      <a:prstDash val="solid"/>
+                      <a:round/>
+                      <a:headEnd type="none" w="med" len="med"/>
+                      <a:tailEnd type="none" w="med" len="med"/>
+                    </a:lnT>
+                    <a:lnB w="9525" cap="flat" cmpd="sng" algn="ctr">
+                      <a:solidFill>
+                        <a:srgbClr val="D7E1F5"/>
+                      </a:solidFill>
+                      <a:prstDash val="solid"/>
+                      <a:round/>
+                      <a:headEnd type="none" w="med" len="med"/>
+                      <a:tailEnd type="none" w="med" len="med"/>
+                    </a:lnB>
+                    <a:solidFill>
+                      <a:srgbClr val="FFFFFF"/>
+                    </a:solidFill>
+                  </a:tcPr>
+                </a:tc>
+                <a:tc>
+                  <a:txBody>
+                    <a:bodyPr/>
+                    <a:lstStyle/>
+                    <a:p>
+                      <a:pPr algn="ctr" indent="0" marL="0">
+                        <a:buNone/>
+                      </a:pPr>
+                      <a:r>
+                        <a:rPr lang="en-US" sz="830" dirty="0">
+                          <a:solidFill>
+                            <a:srgbClr val="3A4566"/>
+                          </a:solidFill>
+                          <a:latin typeface="Calibri" pitchFamily="34" charset="0"/>
+                          <a:ea typeface="Calibri" pitchFamily="34" charset="-122"/>
+                          <a:cs typeface="Calibri" pitchFamily="34" charset="-120"/>
+                        </a:rPr>
+                        <a:t>On-chain (Allowlist escrow)</a:t>
+                      </a:r>
+                      <a:endParaRPr lang="en-US" sz="830" dirty="0">
+                        <a:latin typeface="Calibri" charset="0"/>
+                        <a:ea typeface="Calibri" charset="0"/>
+                        <a:cs typeface="Calibri" charset="0"/>
+                      </a:endParaRPr>
+                    </a:p>
+                  </a:txBody>
+                  <a:tcPr marL="76200" marR="76200" marT="38100" marB="38100" anchor="ctr">
+                    <a:lnL w="9525" cap="flat" cmpd="sng" algn="ctr">
+                      <a:solidFill>
+                        <a:srgbClr val="D7E1F5"/>
+                      </a:solidFill>
+                      <a:prstDash val="solid"/>
+                      <a:round/>
+                      <a:headEnd type="none" w="med" len="med"/>
+                      <a:tailEnd type="none" w="med" len="med"/>
+                    </a:lnL>
+                    <a:lnR w="9525" cap="flat" cmpd="sng" algn="ctr">
+                      <a:solidFill>
+                        <a:srgbClr val="D7E1F5"/>
+                      </a:solidFill>
+                      <a:prstDash val="solid"/>
+                      <a:round/>
+                      <a:headEnd type="none" w="med" len="med"/>
+                      <a:tailEnd type="none" w="med" len="med"/>
+                    </a:lnR>
+                    <a:lnT w="9525" cap="flat" cmpd="sng" algn="ctr">
+                      <a:solidFill>
+                        <a:srgbClr val="D7E1F5"/>
+                      </a:solidFill>
+                      <a:prstDash val="solid"/>
+                      <a:round/>
+                      <a:headEnd type="none" w="med" len="med"/>
+                      <a:tailEnd type="none" w="med" len="med"/>
+                    </a:lnT>
+                    <a:lnB w="9525" cap="flat" cmpd="sng" algn="ctr">
+                      <a:solidFill>
+                        <a:srgbClr val="D7E1F5"/>
+                      </a:solidFill>
+                      <a:prstDash val="solid"/>
+                      <a:round/>
+                      <a:headEnd type="none" w="med" len="med"/>
+                      <a:tailEnd type="none" w="med" len="med"/>
+                    </a:lnB>
+                    <a:solidFill>
+                      <a:srgbClr val="FFFFFF"/>
+                    </a:solidFill>
+                  </a:tcPr>
+                </a:tc>
+                <a:tc>
+                  <a:txBody>
+                    <a:bodyPr/>
+                    <a:lstStyle/>
+                    <a:p>
+                      <a:pPr algn="ctr" indent="0" marL="0">
+                        <a:buNone/>
+                      </a:pPr>
+                      <a:r>
+                        <a:rPr lang="en-US" sz="830" dirty="0">
+                          <a:solidFill>
+                            <a:srgbClr val="3A4566"/>
+                          </a:solidFill>
+                          <a:latin typeface="Calibri" pitchFamily="34" charset="0"/>
+                          <a:ea typeface="Calibri" pitchFamily="34" charset="-122"/>
+                          <a:cs typeface="Calibri" pitchFamily="34" charset="-120"/>
+                        </a:rPr>
+                        <a:t>On-chain (Allowlist escrow)</a:t>
+                      </a:r>
+                      <a:endParaRPr lang="en-US" sz="830" dirty="0">
+                        <a:latin typeface="Calibri" charset="0"/>
+                        <a:ea typeface="Calibri" charset="0"/>
+                        <a:cs typeface="Calibri" charset="0"/>
+                      </a:endParaRPr>
+                    </a:p>
+                  </a:txBody>
+                  <a:tcPr marL="76200" marR="76200" marT="38100" marB="38100" anchor="ctr">
+                    <a:lnL w="9525" cap="flat" cmpd="sng" algn="ctr">
+                      <a:solidFill>
+                        <a:srgbClr val="D7E1F5"/>
+                      </a:solidFill>
+                      <a:prstDash val="solid"/>
+                      <a:round/>
+                      <a:headEnd type="none" w="med" len="med"/>
+                      <a:tailEnd type="none" w="med" len="med"/>
+                    </a:lnL>
+                    <a:lnR w="9525" cap="flat" cmpd="sng" algn="ctr">
+                      <a:solidFill>
+                        <a:srgbClr val="D7E1F5"/>
+                      </a:solidFill>
+                      <a:prstDash val="solid"/>
+                      <a:round/>
+                      <a:headEnd type="none" w="med" len="med"/>
+                      <a:tailEnd type="none" w="med" len="med"/>
+                    </a:lnR>
+                    <a:lnT w="9525" cap="flat" cmpd="sng" algn="ctr">
+                      <a:solidFill>
+                        <a:srgbClr val="D7E1F5"/>
+                      </a:solidFill>
+                      <a:prstDash val="solid"/>
+                      <a:round/>
+                      <a:headEnd type="none" w="med" len="med"/>
+                      <a:tailEnd type="none" w="med" len="med"/>
+                    </a:lnT>
+                    <a:lnB w="9525" cap="flat" cmpd="sng" algn="ctr">
+                      <a:solidFill>
+                        <a:srgbClr val="D7E1F5"/>
+                      </a:solidFill>
+                      <a:prstDash val="solid"/>
+                      <a:round/>
+                      <a:headEnd type="none" w="med" len="med"/>
+                      <a:tailEnd type="none" w="med" len="med"/>
+                    </a:lnB>
+                    <a:solidFill>
+                      <a:srgbClr val="FFFFFF"/>
+                    </a:solidFill>
+                  </a:tcPr>
+                </a:tc>
+                <a:tc>
+                  <a:txBody>
+                    <a:bodyPr/>
+                    <a:lstStyle/>
+                    <a:p>
+                      <a:pPr algn="ctr" indent="0" marL="0">
+                        <a:buNone/>
+                      </a:pPr>
+                      <a:r>
+                        <a:rPr lang="en-US" sz="830" dirty="0">
+                          <a:solidFill>
+                            <a:srgbClr val="3A4566"/>
+                          </a:solidFill>
+                          <a:latin typeface="Calibri" pitchFamily="34" charset="0"/>
+                          <a:ea typeface="Calibri" pitchFamily="34" charset="-122"/>
+                          <a:cs typeface="Calibri" pitchFamily="34" charset="-120"/>
+                        </a:rPr>
+                        <a:t>On-chain (Allowlist, fTokens)</a:t>
+                      </a:r>
+                      <a:endParaRPr lang="en-US" sz="830" dirty="0">
+                        <a:latin typeface="Calibri" charset="0"/>
+                        <a:ea typeface="Calibri" charset="0"/>
+                        <a:cs typeface="Calibri" charset="0"/>
+                      </a:endParaRPr>
+                    </a:p>
+                  </a:txBody>
+                  <a:tcPr marL="76200" marR="76200" marT="38100" marB="38100" anchor="ctr">
+                    <a:lnL w="9525" cap="flat" cmpd="sng" algn="ctr">
+                      <a:solidFill>
+                        <a:srgbClr val="D7E1F5"/>
+                      </a:solidFill>
+                      <a:prstDash val="solid"/>
+                      <a:round/>
+                      <a:headEnd type="none" w="med" len="med"/>
+                      <a:tailEnd type="none" w="med" len="med"/>
+                    </a:lnL>
+                    <a:lnR w="9525" cap="flat" cmpd="sng" algn="ctr">
+                      <a:solidFill>
+                        <a:srgbClr val="D7E1F5"/>
+                      </a:solidFill>
+                      <a:prstDash val="solid"/>
+                      <a:round/>
+                      <a:headEnd type="none" w="med" len="med"/>
+                      <a:tailEnd type="none" w="med" len="med"/>
+                    </a:lnR>
+                    <a:lnT w="9525" cap="flat" cmpd="sng" algn="ctr">
+                      <a:solidFill>
+                        <a:srgbClr val="D7E1F5"/>
+                      </a:solidFill>
+                      <a:prstDash val="solid"/>
+                      <a:round/>
+                      <a:headEnd type="none" w="med" len="med"/>
+                      <a:tailEnd type="none" w="med" len="med"/>
+                    </a:lnT>
+                    <a:lnB w="9525" cap="flat" cmpd="sng" algn="ctr">
+                      <a:solidFill>
+                        <a:srgbClr val="D7E1F5"/>
+                      </a:solidFill>
+                      <a:prstDash val="solid"/>
+                      <a:round/>
+                      <a:headEnd type="none" w="med" len="med"/>
+                      <a:tailEnd type="none" w="med" len="med"/>
+                    </a:lnB>
+                    <a:solidFill>
+                      <a:srgbClr val="FFFFFF"/>
+                    </a:solidFill>
+                  </a:tcPr>
+                </a:tc>
+                <a:tc>
+                  <a:txBody>
+                    <a:bodyPr/>
+                    <a:lstStyle/>
+                    <a:p>
+                      <a:pPr algn="ctr" indent="0" marL="0">
+                        <a:buNone/>
+                      </a:pPr>
+                      <a:r>
+                        <a:rPr lang="en-US" sz="830" dirty="0">
+                          <a:solidFill>
+                            <a:srgbClr val="3A4566"/>
+                          </a:solidFill>
+                          <a:latin typeface="Calibri" pitchFamily="34" charset="0"/>
+                          <a:ea typeface="Calibri" pitchFamily="34" charset="-122"/>
+                          <a:cs typeface="Calibri" pitchFamily="34" charset="-120"/>
+                        </a:rPr>
+                        <a:t>On-chain (DeFi vault reserve)</a:t>
+                      </a:r>
+                      <a:endParaRPr lang="en-US" sz="830" dirty="0">
+                        <a:latin typeface="Calibri" charset="0"/>
+                        <a:ea typeface="Calibri" charset="0"/>
+                        <a:cs typeface="Calibri" charset="0"/>
+                      </a:endParaRPr>
+                    </a:p>
+                  </a:txBody>
+                  <a:tcPr marL="76200" marR="76200" marT="38100" marB="38100" anchor="ctr">
+                    <a:lnL w="9525" cap="flat" cmpd="sng" algn="ctr">
+                      <a:solidFill>
+                        <a:srgbClr val="D7E1F5"/>
+                      </a:solidFill>
+                      <a:prstDash val="solid"/>
+                      <a:round/>
+                      <a:headEnd type="none" w="med" len="med"/>
+                      <a:tailEnd type="none" w="med" len="med"/>
+                    </a:lnL>
+                    <a:lnR w="9525" cap="flat" cmpd="sng" algn="ctr">
+                      <a:solidFill>
+                        <a:srgbClr val="D7E1F5"/>
+                      </a:solidFill>
+                      <a:prstDash val="solid"/>
+                      <a:round/>
+                      <a:headEnd type="none" w="med" len="med"/>
+                      <a:tailEnd type="none" w="med" len="med"/>
+                    </a:lnR>
+                    <a:lnT w="9525" cap="flat" cmpd="sng" algn="ctr">
+                      <a:solidFill>
+                        <a:srgbClr val="D7E1F5"/>
+                      </a:solidFill>
+                      <a:prstDash val="solid"/>
+                      <a:round/>
+                      <a:headEnd type="none" w="med" len="med"/>
+                      <a:tailEnd type="none" w="med" len="med"/>
+                    </a:lnT>
+                    <a:lnB w="9525" cap="flat" cmpd="sng" algn="ctr">
+                      <a:solidFill>
+                        <a:srgbClr val="D7E1F5"/>
+                      </a:solidFill>
+                      <a:prstDash val="solid"/>
+                      <a:round/>
+                      <a:headEnd type="none" w="med" len="med"/>
+                      <a:tailEnd type="none" w="med" len="med"/>
+                    </a:lnB>
+                    <a:solidFill>
+                      <a:srgbClr val="FFFFFF"/>
+                    </a:solidFill>
+                  </a:tcPr>
+                </a:tc>
+              </a:tr>
+              <a:tr h="0">
+                <a:tc>
+                  <a:txBody>
+                    <a:bodyPr/>
+                    <a:lstStyle/>
+                    <a:p>
+                      <a:pPr algn="l" indent="0" marL="0">
+                        <a:buNone/>
+                      </a:pPr>
+                      <a:r>
+                        <a:rPr lang="en-US" sz="830" b="1" dirty="0">
+                          <a:solidFill>
+                            <a:srgbClr val="1E2761"/>
+                          </a:solidFill>
+                          <a:latin typeface="Calibri" pitchFamily="34" charset="0"/>
+                          <a:ea typeface="Calibri" pitchFamily="34" charset="-122"/>
+                          <a:cs typeface="Calibri" pitchFamily="34" charset="-120"/>
+                        </a:rPr>
                         <a:t>Settlement rail</a:t>
                       </a:r>
                       <a:endParaRPr lang="en-US" sz="830" dirty="0">
@@ -23800,7 +24278,7 @@
                       <a:tailEnd type="none" w="med" len="med"/>
                     </a:lnB>
                     <a:solidFill>
-                      <a:srgbClr val="FFFFFF"/>
+                      <a:srgbClr val="F5F8FD"/>
                     </a:solidFill>
                   </a:tcPr>
                 </a:tc>
@@ -23868,7 +24346,7 @@
                       <a:tailEnd type="none" w="med" len="med"/>
                     </a:lnB>
                     <a:solidFill>
-                      <a:srgbClr val="FFFFFF"/>
+                      <a:srgbClr val="F5F8FD"/>
                     </a:solidFill>
                   </a:tcPr>
                 </a:tc>
@@ -23936,7 +24414,7 @@
                       <a:tailEnd type="none" w="med" len="med"/>
                     </a:lnB>
                     <a:solidFill>
-                      <a:srgbClr val="FFFFFF"/>
+                      <a:srgbClr val="F5F8FD"/>
                     </a:solidFill>
                   </a:tcPr>
                 </a:tc>
@@ -24004,7 +24482,7 @@
                       <a:tailEnd type="none" w="med" len="med"/>
                     </a:lnB>
                     <a:solidFill>
-                      <a:srgbClr val="FFFFFF"/>
+                      <a:srgbClr val="F5F8FD"/>
                     </a:solidFill>
                   </a:tcPr>
                 </a:tc>
@@ -24072,7 +24550,7 @@
                       <a:tailEnd type="none" w="med" len="med"/>
                     </a:lnB>
                     <a:solidFill>
-                      <a:srgbClr val="FFFFFF"/>
+                      <a:srgbClr val="F5F8FD"/>
                     </a:solidFill>
                   </a:tcPr>
                 </a:tc>
@@ -24140,7 +24618,7 @@
                       <a:tailEnd type="none" w="med" len="med"/>
                     </a:lnB>
                     <a:solidFill>
-                      <a:srgbClr val="FFFFFF"/>
+                      <a:srgbClr val="F5F8FD"/>
                     </a:solidFill>
                   </a:tcPr>
                 </a:tc>
@@ -24208,7 +24686,7 @@
                       <a:tailEnd type="none" w="med" len="med"/>
                     </a:lnB>
                     <a:solidFill>
-                      <a:srgbClr val="FFFFFF"/>
+                      <a:srgbClr val="F5F8FD"/>
                     </a:solidFill>
                   </a:tcPr>
                 </a:tc>
@@ -24278,7 +24756,7 @@
                       <a:tailEnd type="none" w="med" len="med"/>
                     </a:lnB>
                     <a:solidFill>
-                      <a:srgbClr val="F5F8FD"/>
+                      <a:srgbClr val="FFFFFF"/>
                     </a:solidFill>
                   </a:tcPr>
                 </a:tc>
@@ -24346,7 +24824,7 @@
                       <a:tailEnd type="none" w="med" len="med"/>
                     </a:lnB>
                     <a:solidFill>
-                      <a:srgbClr val="F5F8FD"/>
+                      <a:srgbClr val="FFFFFF"/>
                     </a:solidFill>
                   </a:tcPr>
                 </a:tc>
@@ -24414,7 +24892,7 @@
                       <a:tailEnd type="none" w="med" len="med"/>
                     </a:lnB>
                     <a:solidFill>
-                      <a:srgbClr val="F5F8FD"/>
+                      <a:srgbClr val="FFFFFF"/>
                     </a:solidFill>
                   </a:tcPr>
                 </a:tc>
@@ -24482,7 +24960,7 @@
                       <a:tailEnd type="none" w="med" len="med"/>
                     </a:lnB>
                     <a:solidFill>
-                      <a:srgbClr val="F5F8FD"/>
+                      <a:srgbClr val="FFFFFF"/>
                     </a:solidFill>
                   </a:tcPr>
                 </a:tc>
@@ -24550,7 +25028,7 @@
                       <a:tailEnd type="none" w="med" len="med"/>
                     </a:lnB>
                     <a:solidFill>
-                      <a:srgbClr val="F5F8FD"/>
+                      <a:srgbClr val="FFFFFF"/>
                     </a:solidFill>
                   </a:tcPr>
                 </a:tc>
@@ -24618,7 +25096,7 @@
                       <a:tailEnd type="none" w="med" len="med"/>
                     </a:lnB>
                     <a:solidFill>
-                      <a:srgbClr val="F5F8FD"/>
+                      <a:srgbClr val="FFFFFF"/>
                     </a:solidFill>
                   </a:tcPr>
                 </a:tc>
@@ -24686,7 +25164,7 @@
                       <a:tailEnd type="none" w="med" len="med"/>
                     </a:lnB>
                     <a:solidFill>
-                      <a:srgbClr val="F5F8FD"/>
+                      <a:srgbClr val="FFFFFF"/>
                     </a:solidFill>
                   </a:tcPr>
                 </a:tc>

--- a/docs/presentations/Tokenized_Funds_Comparative_Analysis.pptx
+++ b/docs/presentations/Tokenized_Funds_Comparative_Analysis.pptx
@@ -2946,8 +2946,8 @@
         </p:nvSpPr>
         <p:spPr>
           <a:xfrm>
-            <a:off x="502920" y="1783080"/>
-            <a:ext cx="566928" cy="566928"/>
+            <a:off x="502920" y="1691640"/>
+            <a:ext cx="502920" cy="502920"/>
           </a:xfrm>
           <a:prstGeom prst="ellipse">
             <a:avLst/>
@@ -2974,8 +2974,8 @@
         </p:blipFill>
         <p:spPr>
           <a:xfrm>
-            <a:off x="650321" y="1930481"/>
-            <a:ext cx="272125" cy="272125"/>
+            <a:off x="633679" y="1822399"/>
+            <a:ext cx="241402" cy="241402"/>
           </a:xfrm>
           <a:prstGeom prst="rect">
             <a:avLst/>
@@ -2990,8 +2990,8 @@
         </p:nvSpPr>
         <p:spPr>
           <a:xfrm>
-            <a:off x="1252728" y="1728216"/>
-            <a:ext cx="10436047" cy="1188720"/>
+            <a:off x="1188720" y="1636776"/>
+            <a:ext cx="10500055" cy="1005840"/>
           </a:xfrm>
           <a:prstGeom prst="rect">
             <a:avLst/>
@@ -3005,15 +3005,15 @@
           <a:p>
             <a:pPr algn="l" indent="0" marL="0">
               <a:lnSpc>
-                <a:spcPct val="120000"/>
+                <a:spcPct val="115000"/>
               </a:lnSpc>
               <a:spcAft>
-                <a:spcPts val="300"/>
+                <a:spcPts val="200"/>
               </a:spcAft>
               <a:buNone/>
             </a:pPr>
             <a:r>
-              <a:rPr lang="en-US" sz="1500" b="1" dirty="0">
+              <a:rPr lang="en-US" sz="1400" b="1" dirty="0">
                 <a:solidFill>
                   <a:srgbClr val="1A2332"/>
                 </a:solidFill>
@@ -3021,22 +3021,22 @@
                 <a:ea typeface="Calibri" pitchFamily="34" charset="-122"/>
                 <a:cs typeface="Calibri" pitchFamily="34" charset="-120"/>
               </a:rPr>
-              <a:t>BENJI / WTGXX</a:t>
+              <a:t>BENJI</a:t>
             </a:r>
-            <a:endParaRPr lang="en-US" sz="1500" dirty="0"/>
+            <a:endParaRPr lang="en-US" sz="1400" dirty="0"/>
           </a:p>
           <a:p>
             <a:pPr algn="l" indent="0" marL="0">
               <a:lnSpc>
-                <a:spcPct val="120000"/>
+                <a:spcPct val="115000"/>
               </a:lnSpc>
               <a:spcAft>
-                <a:spcPts val="300"/>
+                <a:spcPts val="200"/>
               </a:spcAft>
               <a:buNone/>
             </a:pPr>
             <a:r>
-              <a:rPr lang="en-US" sz="1200" dirty="0">
+              <a:rPr lang="en-US" sz="1100" dirty="0">
                 <a:solidFill>
                   <a:srgbClr val="3A4566"/>
                 </a:solidFill>
@@ -3044,9 +3044,9 @@
                 <a:ea typeface="Calibri" pitchFamily="34" charset="-122"/>
                 <a:cs typeface="Calibri" pitchFamily="34" charset="-120"/>
               </a:rPr>
-              <a:t>Blockchain is an explicitly secondary, non-authoritative record. The transfer agent's off-chain book-entry system stays legally authoritative — the token is a representation, reconciled against it.</a:t>
+              <a:t>FTIS's “Integrated System” joins off-chain book-entry (PII) and on-chain data (transactions, NAVs, dividends) into one official record in real time — neither half is authoritative alone; FTIS retains unilateral administrative control over both, per its Aug. 2026 SEC no-action letter.</a:t>
             </a:r>
-            <a:endParaRPr lang="en-US" sz="1500" dirty="0"/>
+            <a:endParaRPr lang="en-US" sz="1400" dirty="0"/>
           </a:p>
         </p:txBody>
       </p:sp>
@@ -3058,8 +3058,8 @@
         </p:nvSpPr>
         <p:spPr>
           <a:xfrm>
-            <a:off x="502920" y="3200400"/>
-            <a:ext cx="566928" cy="566928"/>
+            <a:off x="502920" y="2807208"/>
+            <a:ext cx="502920" cy="502920"/>
           </a:xfrm>
           <a:prstGeom prst="ellipse">
             <a:avLst/>
@@ -3086,8 +3086,8 @@
         </p:blipFill>
         <p:spPr>
           <a:xfrm>
-            <a:off x="650321" y="3347801"/>
-            <a:ext cx="272125" cy="272125"/>
+            <a:off x="633679" y="2937967"/>
+            <a:ext cx="241402" cy="241402"/>
           </a:xfrm>
           <a:prstGeom prst="rect">
             <a:avLst/>
@@ -3102,8 +3102,8 @@
         </p:nvSpPr>
         <p:spPr>
           <a:xfrm>
-            <a:off x="1252728" y="3145536"/>
-            <a:ext cx="10436047" cy="1188720"/>
+            <a:off x="1188720" y="2752344"/>
+            <a:ext cx="10500055" cy="1005840"/>
           </a:xfrm>
           <a:prstGeom prst="rect">
             <a:avLst/>
@@ -3117,15 +3117,127 @@
           <a:p>
             <a:pPr algn="l" indent="0" marL="0">
               <a:lnSpc>
-                <a:spcPct val="120000"/>
+                <a:spcPct val="115000"/>
               </a:lnSpc>
               <a:spcAft>
-                <a:spcPts val="300"/>
+                <a:spcPts val="200"/>
               </a:spcAft>
               <a:buNone/>
             </a:pPr>
             <a:r>
-              <a:rPr lang="en-US" sz="1500" b="1" dirty="0">
+              <a:rPr lang="en-US" sz="1400" b="1" dirty="0">
+                <a:solidFill>
+                  <a:srgbClr val="1A2332"/>
+                </a:solidFill>
+                <a:latin typeface="Calibri" pitchFamily="34" charset="0"/>
+                <a:ea typeface="Calibri" pitchFamily="34" charset="-122"/>
+                <a:cs typeface="Calibri" pitchFamily="34" charset="-120"/>
+              </a:rPr>
+              <a:t>WTGXX</a:t>
+            </a:r>
+            <a:endParaRPr lang="en-US" sz="1400" dirty="0"/>
+          </a:p>
+          <a:p>
+            <a:pPr algn="l" indent="0" marL="0">
+              <a:lnSpc>
+                <a:spcPct val="115000"/>
+              </a:lnSpc>
+              <a:spcAft>
+                <a:spcPts val="200"/>
+              </a:spcAft>
+              <a:buNone/>
+            </a:pPr>
+            <a:r>
+              <a:rPr lang="en-US" sz="1100" dirty="0">
+                <a:solidFill>
+                  <a:srgbClr val="3A4566"/>
+                </a:solidFill>
+                <a:latin typeface="Calibri" pitchFamily="34" charset="0"/>
+                <a:ea typeface="Calibri" pitchFamily="34" charset="-122"/>
+                <a:cs typeface="Calibri" pitchFamily="34" charset="-120"/>
+              </a:rPr>
+              <a:t>WisdomTree's own materials explicitly label the blockchain a “Secondary Record.” Book-entry stays unambiguously authoritative, and the token is a representation reconciled against it — a genuinely different architecture from BENJI's joined system.</a:t>
+            </a:r>
+            <a:endParaRPr lang="en-US" sz="1400" dirty="0"/>
+          </a:p>
+        </p:txBody>
+      </p:sp>
+      <p:sp>
+        <p:nvSpPr>
+          <p:cNvPr id="10" name="Shape 6"/>
+          <p:cNvSpPr/>
+          <p:nvPr/>
+        </p:nvSpPr>
+        <p:spPr>
+          <a:xfrm>
+            <a:off x="502920" y="3922776"/>
+            <a:ext cx="502920" cy="502920"/>
+          </a:xfrm>
+          <a:prstGeom prst="ellipse">
+            <a:avLst/>
+          </a:prstGeom>
+          <a:solidFill>
+            <a:srgbClr val="1E2761"/>
+          </a:solidFill>
+          <a:ln/>
+        </p:spPr>
+      </p:sp>
+      <p:pic>
+        <p:nvPicPr>
+          <p:cNvPr id="11" name="Image 2" descr="preencoded.png">    </p:cNvPr>
+          <p:cNvPicPr>
+            <a:picLocks noChangeAspect="1"/>
+          </p:cNvPicPr>
+          <p:nvPr/>
+        </p:nvPicPr>
+        <p:blipFill>
+          <a:blip r:embed="rId3"/>
+          <a:stretch>
+            <a:fillRect/>
+          </a:stretch>
+        </p:blipFill>
+        <p:spPr>
+          <a:xfrm>
+            <a:off x="633679" y="4053535"/>
+            <a:ext cx="241402" cy="241402"/>
+          </a:xfrm>
+          <a:prstGeom prst="rect">
+            <a:avLst/>
+          </a:prstGeom>
+        </p:spPr>
+      </p:pic>
+      <p:sp>
+        <p:nvSpPr>
+          <p:cNvPr id="12" name="Text 7"/>
+          <p:cNvSpPr txBox="1"/>
+          <p:nvPr/>
+        </p:nvSpPr>
+        <p:spPr>
+          <a:xfrm>
+            <a:off x="1188720" y="3867912"/>
+            <a:ext cx="10500055" cy="1005840"/>
+          </a:xfrm>
+          <a:prstGeom prst="rect">
+            <a:avLst/>
+          </a:prstGeom>
+          <a:noFill/>
+          <a:ln/>
+        </p:spPr>
+        <p:txBody>
+          <a:bodyPr wrap="square" lIns="0" tIns="0" rIns="0" bIns="0" rtlCol="0" anchor="t"/>
+          <a:lstStyle/>
+          <a:p>
+            <a:pPr algn="l" indent="0" marL="0">
+              <a:lnSpc>
+                <a:spcPct val="115000"/>
+              </a:lnSpc>
+              <a:spcAft>
+                <a:spcPts val="200"/>
+              </a:spcAft>
+              <a:buNone/>
+            </a:pPr>
+            <a:r>
+              <a:rPr lang="en-US" sz="1400" b="1" dirty="0">
                 <a:solidFill>
                   <a:srgbClr val="1A2332"/>
                 </a:solidFill>
@@ -3135,20 +3247,20 @@
               </a:rPr>
               <a:t>BUIDL / USTB / USCC</a:t>
             </a:r>
-            <a:endParaRPr lang="en-US" sz="1500" dirty="0"/>
+            <a:endParaRPr lang="en-US" sz="1400" dirty="0"/>
           </a:p>
           <a:p>
             <a:pPr algn="l" indent="0" marL="0">
               <a:lnSpc>
-                <a:spcPct val="120000"/>
+                <a:spcPct val="115000"/>
               </a:lnSpc>
               <a:spcAft>
-                <a:spcPts val="300"/>
+                <a:spcPts val="200"/>
               </a:spcAft>
               <a:buNone/>
             </a:pPr>
             <a:r>
-              <a:rPr lang="en-US" sz="1200" dirty="0">
+              <a:rPr lang="en-US" sz="1100" dirty="0">
                 <a:solidFill>
                   <a:srgbClr val="3A4566"/>
                 </a:solidFill>
@@ -3158,20 +3270,20 @@
               </a:rPr>
               <a:t>A hybrid on-chain/off-chain master securityholder file. Ownership is enforced by a smart-contract Allowlist; the TA's off-chain record still legally controls, but the chain is treated as closer to a primary ledger.</a:t>
             </a:r>
-            <a:endParaRPr lang="en-US" sz="1500" dirty="0"/>
+            <a:endParaRPr lang="en-US" sz="1400" dirty="0"/>
           </a:p>
         </p:txBody>
       </p:sp>
       <p:sp>
         <p:nvSpPr>
-          <p:cNvPr id="10" name="Shape 6"/>
+          <p:cNvPr id="13" name="Shape 8"/>
           <p:cNvSpPr/>
           <p:nvPr/>
         </p:nvSpPr>
         <p:spPr>
           <a:xfrm>
-            <a:off x="502920" y="4617720"/>
-            <a:ext cx="566928" cy="566928"/>
+            <a:off x="502920" y="5038344"/>
+            <a:ext cx="502920" cy="502920"/>
           </a:xfrm>
           <a:prstGeom prst="ellipse">
             <a:avLst/>
@@ -3184,22 +3296,22 @@
       </p:sp>
       <p:pic>
         <p:nvPicPr>
-          <p:cNvPr id="11" name="Image 2" descr="preencoded.png">    </p:cNvPr>
+          <p:cNvPr id="14" name="Image 3" descr="preencoded.png">    </p:cNvPr>
           <p:cNvPicPr>
             <a:picLocks noChangeAspect="1"/>
           </p:cNvPicPr>
           <p:nvPr/>
         </p:nvPicPr>
         <p:blipFill>
-          <a:blip r:embed="rId3"/>
+          <a:blip r:embed="rId4"/>
           <a:stretch>
             <a:fillRect/>
           </a:stretch>
         </p:blipFill>
         <p:spPr>
           <a:xfrm>
-            <a:off x="650321" y="4765121"/>
-            <a:ext cx="272125" cy="272125"/>
+            <a:off x="633679" y="5169103"/>
+            <a:ext cx="241402" cy="241402"/>
           </a:xfrm>
           <a:prstGeom prst="rect">
             <a:avLst/>
@@ -3208,14 +3320,14 @@
       </p:pic>
       <p:sp>
         <p:nvSpPr>
-          <p:cNvPr id="12" name="Text 7"/>
+          <p:cNvPr id="15" name="Text 9"/>
           <p:cNvSpPr txBox="1"/>
           <p:nvPr/>
         </p:nvSpPr>
         <p:spPr>
           <a:xfrm>
-            <a:off x="1252728" y="4562856"/>
-            <a:ext cx="10436047" cy="1188720"/>
+            <a:off x="1188720" y="4983480"/>
+            <a:ext cx="10500055" cy="1005840"/>
           </a:xfrm>
           <a:prstGeom prst="rect">
             <a:avLst/>
@@ -3229,15 +3341,15 @@
           <a:p>
             <a:pPr algn="l" indent="0" marL="0">
               <a:lnSpc>
-                <a:spcPct val="120000"/>
+                <a:spcPct val="115000"/>
               </a:lnSpc>
               <a:spcAft>
-                <a:spcPts val="300"/>
+                <a:spcPts val="200"/>
               </a:spcAft>
               <a:buNone/>
             </a:pPr>
             <a:r>
-              <a:rPr lang="en-US" sz="1500" b="1" dirty="0">
+              <a:rPr lang="en-US" sz="1400" b="1" dirty="0">
                 <a:solidFill>
                   <a:srgbClr val="1A2332"/>
                 </a:solidFill>
@@ -3247,20 +3359,20 @@
               </a:rPr>
               <a:t>OUSG</a:t>
             </a:r>
-            <a:endParaRPr lang="en-US" sz="1500" dirty="0"/>
+            <a:endParaRPr lang="en-US" sz="1400" dirty="0"/>
           </a:p>
           <a:p>
             <a:pPr algn="l" indent="0" marL="0">
               <a:lnSpc>
-                <a:spcPct val="120000"/>
+                <a:spcPct val="115000"/>
               </a:lnSpc>
               <a:spcAft>
-                <a:spcPts val="300"/>
+                <a:spcPts val="200"/>
               </a:spcAft>
               <a:buNone/>
             </a:pPr>
             <a:r>
-              <a:rPr lang="en-US" sz="1200" dirty="0">
+              <a:rPr lang="en-US" sz="1100" dirty="0">
                 <a:solidFill>
                   <a:srgbClr val="3A4566"/>
                 </a:solidFill>
@@ -3270,13 +3382,13 @@
               </a:rPr>
               <a:t>TA function and title-authority model not disclosed in any source found — a genuine open item, not just an abbreviation of a known answer.</a:t>
             </a:r>
-            <a:endParaRPr lang="en-US" sz="1500" dirty="0"/>
+            <a:endParaRPr lang="en-US" sz="1400" dirty="0"/>
           </a:p>
         </p:txBody>
       </p:sp>
       <p:sp>
         <p:nvSpPr>
-          <p:cNvPr id="13" name="Text 8"/>
+          <p:cNvPr id="16" name="Text 10"/>
           <p:cNvSpPr txBox="1"/>
           <p:nvPr/>
         </p:nvSpPr>
@@ -3315,7 +3427,7 @@
       </p:sp>
       <p:sp>
         <p:nvSpPr>
-          <p:cNvPr id="14" name="Text 9"/>
+          <p:cNvPr id="17" name="Text 11"/>
           <p:cNvSpPr txBox="1"/>
           <p:nvPr/>
         </p:nvSpPr>
@@ -22865,7 +22977,7 @@
                           <a:ea typeface="Calibri" pitchFamily="34" charset="-122"/>
                           <a:cs typeface="Calibri" pitchFamily="34" charset="-120"/>
                         </a:rPr>
-                        <a:t>No — secondary record</a:t>
+                        <a:t>Joined — TA controls both halves</a:t>
                       </a:r>
                       <a:endParaRPr lang="en-US" sz="830" dirty="0">
                         <a:latin typeface="Calibri" charset="0"/>
